--- a/mcp_remort.pptx
+++ b/mcp_remort.pptx
@@ -3220,7 +3220,7 @@
                 </a:solidFill>
                 <a:latin typeface="メイリオ"/>
               </a:rPr>
-              <a:t>気象データ取得MCPサーバーの構築 リモート版</a:t>
+              <a:t>jma-mcp-remote とは</a:t>
             </a:r>
           </a:p>
         </p:txBody>
@@ -3255,7 +3255,7 @@
                 </a:solidFill>
                 <a:latin typeface="メイリオ"/>
               </a:rPr>
-              <a:t>Claude チャット　から気象データMCPサーバーを利用する</a:t>
+              <a:t/>
             </a:r>
           </a:p>
         </p:txBody>
@@ -3290,7 +3290,7 @@
                 </a:solidFill>
                 <a:latin typeface="メイリオ"/>
               </a:rPr>
-              <a:t>2026年7月　上原政博</a:t>
+              <a:t>　</a:t>
             </a:r>
           </a:p>
         </p:txBody>

--- a/mcp_remort.pptx
+++ b/mcp_remort.pptx
@@ -14,6 +14,15 @@
     <p:sldId id="262" r:id="rId13"/>
     <p:sldId id="263" r:id="rId14"/>
     <p:sldId id="264" r:id="rId15"/>
+    <p:sldId id="265" r:id="rId16"/>
+    <p:sldId id="266" r:id="rId17"/>
+    <p:sldId id="267" r:id="rId18"/>
+    <p:sldId id="268" r:id="rId19"/>
+    <p:sldId id="269" r:id="rId20"/>
+    <p:sldId id="270" r:id="rId21"/>
+    <p:sldId id="271" r:id="rId22"/>
+    <p:sldId id="272" r:id="rId23"/>
+    <p:sldId id="273" r:id="rId24"/>
   </p:sldIdLst>
   <p:sldSz cx="12188952" cy="6858000" type="screen4x3"/>
   <p:notesSz cx="6858000" cy="9144000"/>
@@ -3220,7 +3229,7 @@
                 </a:solidFill>
                 <a:latin typeface="メイリオ"/>
               </a:rPr>
-              <a:t>jma-mcp-remote とは</a:t>
+              <a:t>jma-mcp-remote — JMA MCP サーバー リモート版（HTTP/SSE）</a:t>
             </a:r>
           </a:p>
         </p:txBody>
@@ -3298,6 +3307,4335 @@
       <p:sp>
         <p:nvSpPr>
           <p:cNvPr id="7" name="Rectangle 6"/>
+          <p:cNvSpPr/>
+          <p:nvPr/>
+        </p:nvSpPr>
+        <p:spPr>
+          <a:xfrm>
+            <a:off x="0" y="6583680"/>
+            <a:ext cx="12188952" cy="274320"/>
+          </a:xfrm>
+          <a:prstGeom prst="rect">
+            <a:avLst/>
+          </a:prstGeom>
+          <a:solidFill>
+            <a:srgbClr val="1F497D"/>
+          </a:solidFill>
+          <a:ln>
+            <a:noFill/>
+          </a:ln>
+        </p:spPr>
+        <p:style>
+          <a:lnRef idx="1">
+            <a:schemeClr val="accent1"/>
+          </a:lnRef>
+          <a:fillRef idx="3">
+            <a:schemeClr val="accent1"/>
+          </a:fillRef>
+          <a:effectRef idx="2">
+            <a:schemeClr val="accent1"/>
+          </a:effectRef>
+          <a:fontRef idx="minor">
+            <a:schemeClr val="lt1"/>
+          </a:fontRef>
+        </p:style>
+        <p:txBody>
+          <a:bodyPr rtlCol="0" anchor="ctr"/>
+          <a:lstStyle/>
+          <a:p>
+            <a:pPr algn="ctr"/>
+          </a:p>
+        </p:txBody>
+      </p:sp>
+    </p:spTree>
+  </p:cSld>
+  <p:clrMapOvr>
+    <a:masterClrMapping/>
+  </p:clrMapOvr>
+</p:sld>
+</file>
+
+<file path=ppt/slides/slide10.xml><?xml version="1.0" encoding="utf-8"?>
+<p:sld xmlns:a="http://schemas.openxmlformats.org/drawingml/2006/main" xmlns:p="http://schemas.openxmlformats.org/presentationml/2006/main" xmlns:r="http://schemas.openxmlformats.org/officeDocument/2006/relationships">
+  <p:cSld>
+    <p:bg>
+      <p:bgPr>
+        <a:solidFill>
+          <a:srgbClr val="F2F2F2"/>
+        </a:solidFill>
+        <a:effectLst/>
+      </p:bgPr>
+    </p:bg>
+    <p:spTree>
+      <p:nvGrpSpPr>
+        <p:cNvPr id="1" name=""/>
+        <p:cNvGrpSpPr/>
+        <p:nvPr/>
+      </p:nvGrpSpPr>
+      <p:grpSpPr/>
+      <p:sp>
+        <p:nvSpPr>
+          <p:cNvPr id="2" name="Rectangle 1"/>
+          <p:cNvSpPr/>
+          <p:nvPr/>
+        </p:nvSpPr>
+        <p:spPr>
+          <a:xfrm>
+            <a:off x="0" y="0"/>
+            <a:ext cx="12188952" cy="1097280"/>
+          </a:xfrm>
+          <a:prstGeom prst="rect">
+            <a:avLst/>
+          </a:prstGeom>
+          <a:solidFill>
+            <a:srgbClr val="1F497D"/>
+          </a:solidFill>
+          <a:ln>
+            <a:noFill/>
+          </a:ln>
+        </p:spPr>
+        <p:style>
+          <a:lnRef idx="1">
+            <a:schemeClr val="accent1"/>
+          </a:lnRef>
+          <a:fillRef idx="3">
+            <a:schemeClr val="accent1"/>
+          </a:fillRef>
+          <a:effectRef idx="2">
+            <a:schemeClr val="accent1"/>
+          </a:effectRef>
+          <a:fontRef idx="minor">
+            <a:schemeClr val="lt1"/>
+          </a:fontRef>
+        </p:style>
+        <p:txBody>
+          <a:bodyPr rtlCol="0" anchor="ctr"/>
+          <a:lstStyle/>
+          <a:p>
+            <a:pPr algn="ctr"/>
+          </a:p>
+        </p:txBody>
+      </p:sp>
+      <p:sp>
+        <p:nvSpPr>
+          <p:cNvPr id="3" name="TextBox 2"/>
+          <p:cNvSpPr txBox="1"/>
+          <p:nvPr/>
+        </p:nvSpPr>
+        <p:spPr>
+          <a:xfrm>
+            <a:off x="457200" y="182880"/>
+            <a:ext cx="10972800" cy="731520"/>
+          </a:xfrm>
+          <a:prstGeom prst="rect">
+            <a:avLst/>
+          </a:prstGeom>
+          <a:noFill/>
+        </p:spPr>
+        <p:txBody>
+          <a:bodyPr wrap="square">
+            <a:spAutoFit/>
+          </a:bodyPr>
+          <a:lstStyle/>
+          <a:p>
+            <a:pPr algn="l"/>
+            <a:r>
+              <a:rPr sz="3200" b="1">
+                <a:solidFill>
+                  <a:srgbClr val="FFFFFF"/>
+                </a:solidFill>
+                <a:latin typeface="メイリオ"/>
+              </a:rPr>
+              <a:t>jma-mcp-remote — JMA MCP サーバー リモート版（HTTP/SSE）</a:t>
+            </a:r>
+          </a:p>
+        </p:txBody>
+      </p:sp>
+      <p:sp>
+        <p:nvSpPr>
+          <p:cNvPr id="4" name="TextBox 3"/>
+          <p:cNvSpPr txBox="1"/>
+          <p:nvPr/>
+        </p:nvSpPr>
+        <p:spPr>
+          <a:xfrm>
+            <a:off x="731520" y="1371600"/>
+            <a:ext cx="10698480" cy="1534160"/>
+          </a:xfrm>
+          <a:prstGeom prst="rect">
+            <a:avLst/>
+          </a:prstGeom>
+          <a:noFill/>
+        </p:spPr>
+        <p:txBody>
+          <a:bodyPr wrap="square">
+            <a:normAutofit/>
+          </a:bodyPr>
+          <a:lstStyle/>
+          <a:p>
+            <a:pPr algn="l"/>
+            <a:r>
+              <a:rPr sz="2200" b="0">
+                <a:solidFill>
+                  <a:srgbClr val="262626"/>
+                </a:solidFill>
+                <a:latin typeface="メイリオ"/>
+              </a:rPr>
+              <a:t>jma_mcp（stdio ローカル版）をベースに HTTP/SSE 通信へ切り替えたリモートデプロイ版。</a:t>
+            </a:r>
+          </a:p>
+          <a:p>
+            <a:pPr algn="l"/>
+            <a:r>
+              <a:rPr sz="2200" b="0">
+                <a:solidFill>
+                  <a:srgbClr val="262626"/>
+                </a:solidFill>
+                <a:latin typeface="メイリオ"/>
+              </a:rPr>
+              <a:t>Render にデプロイし、Claude.ai Web版・デスクトップアプリ・iPhone版から使用する。</a:t>
+            </a:r>
+          </a:p>
+        </p:txBody>
+      </p:sp>
+      <p:sp>
+        <p:nvSpPr>
+          <p:cNvPr id="5" name="Rectangle 4"/>
+          <p:cNvSpPr/>
+          <p:nvPr/>
+        </p:nvSpPr>
+        <p:spPr>
+          <a:xfrm>
+            <a:off x="0" y="6583680"/>
+            <a:ext cx="12188952" cy="274320"/>
+          </a:xfrm>
+          <a:prstGeom prst="rect">
+            <a:avLst/>
+          </a:prstGeom>
+          <a:solidFill>
+            <a:srgbClr val="1F497D"/>
+          </a:solidFill>
+          <a:ln>
+            <a:noFill/>
+          </a:ln>
+        </p:spPr>
+        <p:style>
+          <a:lnRef idx="1">
+            <a:schemeClr val="accent1"/>
+          </a:lnRef>
+          <a:fillRef idx="3">
+            <a:schemeClr val="accent1"/>
+          </a:fillRef>
+          <a:effectRef idx="2">
+            <a:schemeClr val="accent1"/>
+          </a:effectRef>
+          <a:fontRef idx="minor">
+            <a:schemeClr val="lt1"/>
+          </a:fontRef>
+        </p:style>
+        <p:txBody>
+          <a:bodyPr rtlCol="0" anchor="ctr"/>
+          <a:lstStyle/>
+          <a:p>
+            <a:pPr algn="ctr"/>
+          </a:p>
+        </p:txBody>
+      </p:sp>
+    </p:spTree>
+  </p:cSld>
+  <p:clrMapOvr>
+    <a:masterClrMapping/>
+  </p:clrMapOvr>
+</p:sld>
+</file>
+
+<file path=ppt/slides/slide11.xml><?xml version="1.0" encoding="utf-8"?>
+<p:sld xmlns:a="http://schemas.openxmlformats.org/drawingml/2006/main" xmlns:p="http://schemas.openxmlformats.org/presentationml/2006/main" xmlns:r="http://schemas.openxmlformats.org/officeDocument/2006/relationships">
+  <p:cSld>
+    <p:bg>
+      <p:bgPr>
+        <a:solidFill>
+          <a:srgbClr val="F2F2F2"/>
+        </a:solidFill>
+        <a:effectLst/>
+      </p:bgPr>
+    </p:bg>
+    <p:spTree>
+      <p:nvGrpSpPr>
+        <p:cNvPr id="1" name=""/>
+        <p:cNvGrpSpPr/>
+        <p:nvPr/>
+      </p:nvGrpSpPr>
+      <p:grpSpPr/>
+      <p:sp>
+        <p:nvSpPr>
+          <p:cNvPr id="2" name="Rectangle 1"/>
+          <p:cNvSpPr/>
+          <p:nvPr/>
+        </p:nvSpPr>
+        <p:spPr>
+          <a:xfrm>
+            <a:off x="0" y="0"/>
+            <a:ext cx="12188952" cy="1097280"/>
+          </a:xfrm>
+          <a:prstGeom prst="rect">
+            <a:avLst/>
+          </a:prstGeom>
+          <a:solidFill>
+            <a:srgbClr val="1F497D"/>
+          </a:solidFill>
+          <a:ln>
+            <a:noFill/>
+          </a:ln>
+        </p:spPr>
+        <p:style>
+          <a:lnRef idx="1">
+            <a:schemeClr val="accent1"/>
+          </a:lnRef>
+          <a:fillRef idx="3">
+            <a:schemeClr val="accent1"/>
+          </a:fillRef>
+          <a:effectRef idx="2">
+            <a:schemeClr val="accent1"/>
+          </a:effectRef>
+          <a:fontRef idx="minor">
+            <a:schemeClr val="lt1"/>
+          </a:fontRef>
+        </p:style>
+        <p:txBody>
+          <a:bodyPr rtlCol="0" anchor="ctr"/>
+          <a:lstStyle/>
+          <a:p>
+            <a:pPr algn="ctr"/>
+          </a:p>
+        </p:txBody>
+      </p:sp>
+      <p:sp>
+        <p:nvSpPr>
+          <p:cNvPr id="3" name="TextBox 2"/>
+          <p:cNvSpPr txBox="1"/>
+          <p:nvPr/>
+        </p:nvSpPr>
+        <p:spPr>
+          <a:xfrm>
+            <a:off x="457200" y="182880"/>
+            <a:ext cx="10972800" cy="731520"/>
+          </a:xfrm>
+          <a:prstGeom prst="rect">
+            <a:avLst/>
+          </a:prstGeom>
+          <a:noFill/>
+        </p:spPr>
+        <p:txBody>
+          <a:bodyPr wrap="square">
+            <a:spAutoFit/>
+          </a:bodyPr>
+          <a:lstStyle/>
+          <a:p>
+            <a:pPr algn="l"/>
+            <a:r>
+              <a:rPr sz="3200" b="1">
+                <a:solidFill>
+                  <a:srgbClr val="FFFFFF"/>
+                </a:solidFill>
+                <a:latin typeface="メイリオ"/>
+              </a:rPr>
+              <a:t>概要</a:t>
+            </a:r>
+          </a:p>
+        </p:txBody>
+      </p:sp>
+      <p:graphicFrame>
+        <p:nvGraphicFramePr>
+          <p:cNvPr id="4" name="Table 3"/>
+          <p:cNvGraphicFramePr>
+            <a:graphicFrameLocks noGrp="1"/>
+          </p:cNvGraphicFramePr>
+          <p:nvPr/>
+        </p:nvGraphicFramePr>
+        <p:xfrm>
+          <a:off x="731520" y="1371600"/>
+          <a:ext cx="10698480" cy="1920240"/>
+        </p:xfrm>
+        <a:graphic>
+          <a:graphicData uri="http://schemas.openxmlformats.org/drawingml/2006/table">
+            <a:tbl>
+              <a:tblPr firstRow="1">
+                <a:tableStyleId>{5C22544A-7EE6-4342-B048-85BDC9FD1C3A}</a:tableStyleId>
+              </a:tblPr>
+              <a:tblGrid>
+                <a:gridCol w="5349240"/>
+                <a:gridCol w="5349240"/>
+              </a:tblGrid>
+              <a:tr h="320040">
+                <a:tc>
+                  <a:txBody>
+                    <a:bodyPr/>
+                    <a:lstStyle/>
+                    <a:p>
+                      <a:r>
+                        <a:rPr sz="1400" b="1">
+                          <a:solidFill>
+                            <a:srgbClr val="FFFFFF"/>
+                          </a:solidFill>
+                          <a:latin typeface="メイリオ"/>
+                        </a:rPr>
+                        <a:t>項目</a:t>
+                      </a:r>
+                    </a:p>
+                  </a:txBody>
+                  <a:tcPr anchor="ctr" marL="73152" marR="73152" marT="27432" marB="27432">
+                    <a:solidFill>
+                      <a:srgbClr val="1F497D"/>
+                    </a:solidFill>
+                  </a:tcPr>
+                </a:tc>
+                <a:tc>
+                  <a:txBody>
+                    <a:bodyPr/>
+                    <a:lstStyle/>
+                    <a:p>
+                      <a:r>
+                        <a:rPr sz="1400" b="1">
+                          <a:solidFill>
+                            <a:srgbClr val="FFFFFF"/>
+                          </a:solidFill>
+                          <a:latin typeface="メイリオ"/>
+                        </a:rPr>
+                        <a:t>内容</a:t>
+                      </a:r>
+                    </a:p>
+                  </a:txBody>
+                  <a:tcPr anchor="ctr" marL="73152" marR="73152" marT="27432" marB="27432">
+                    <a:solidFill>
+                      <a:srgbClr val="1F497D"/>
+                    </a:solidFill>
+                  </a:tcPr>
+                </a:tc>
+              </a:tr>
+              <a:tr h="320040">
+                <a:tc>
+                  <a:txBody>
+                    <a:bodyPr/>
+                    <a:lstStyle/>
+                    <a:p>
+                      <a:r>
+                        <a:rPr sz="1400" b="0">
+                          <a:solidFill>
+                            <a:srgbClr val="262626"/>
+                          </a:solidFill>
+                          <a:latin typeface="メイリオ"/>
+                        </a:rPr>
+                        <a:t>プロトコル</a:t>
+                      </a:r>
+                    </a:p>
+                  </a:txBody>
+                  <a:tcPr anchor="ctr" marL="73152" marR="73152" marT="27432" marB="27432">
+                    <a:solidFill>
+                      <a:srgbClr val="FFFFFF"/>
+                    </a:solidFill>
+                  </a:tcPr>
+                </a:tc>
+                <a:tc>
+                  <a:txBody>
+                    <a:bodyPr/>
+                    <a:lstStyle/>
+                    <a:p>
+                      <a:r>
+                        <a:rPr sz="1400" b="0">
+                          <a:solidFill>
+                            <a:srgbClr val="262626"/>
+                          </a:solidFill>
+                          <a:latin typeface="メイリオ"/>
+                        </a:rPr>
+                        <a:t>MCP（Model Context Protocol）/ HTTP + SSE ベース</a:t>
+                      </a:r>
+                    </a:p>
+                  </a:txBody>
+                  <a:tcPr anchor="ctr" marL="73152" marR="73152" marT="27432" marB="27432">
+                    <a:solidFill>
+                      <a:srgbClr val="FFFFFF"/>
+                    </a:solidFill>
+                  </a:tcPr>
+                </a:tc>
+              </a:tr>
+              <a:tr h="320040">
+                <a:tc>
+                  <a:txBody>
+                    <a:bodyPr/>
+                    <a:lstStyle/>
+                    <a:p>
+                      <a:r>
+                        <a:rPr sz="1400" b="0">
+                          <a:solidFill>
+                            <a:srgbClr val="262626"/>
+                          </a:solidFill>
+                          <a:latin typeface="メイリオ"/>
+                        </a:rPr>
+                        <a:t>デプロイ先</a:t>
+                      </a:r>
+                    </a:p>
+                  </a:txBody>
+                  <a:tcPr anchor="ctr" marL="73152" marR="73152" marT="27432" marB="27432">
+                    <a:solidFill>
+                      <a:srgbClr val="FFFFFF"/>
+                    </a:solidFill>
+                  </a:tcPr>
+                </a:tc>
+                <a:tc>
+                  <a:txBody>
+                    <a:bodyPr/>
+                    <a:lstStyle/>
+                    <a:p>
+                      <a:r>
+                        <a:rPr sz="1400" b="0">
+                          <a:solidFill>
+                            <a:srgbClr val="262626"/>
+                          </a:solidFill>
+                          <a:latin typeface="メイリオ"/>
+                        </a:rPr>
+                        <a:t>Render（Web Service）</a:t>
+                      </a:r>
+                    </a:p>
+                  </a:txBody>
+                  <a:tcPr anchor="ctr" marL="73152" marR="73152" marT="27432" marB="27432">
+                    <a:solidFill>
+                      <a:srgbClr val="FFFFFF"/>
+                    </a:solidFill>
+                  </a:tcPr>
+                </a:tc>
+              </a:tr>
+              <a:tr h="320040">
+                <a:tc>
+                  <a:txBody>
+                    <a:bodyPr/>
+                    <a:lstStyle/>
+                    <a:p>
+                      <a:r>
+                        <a:rPr sz="1400" b="0">
+                          <a:solidFill>
+                            <a:srgbClr val="262626"/>
+                          </a:solidFill>
+                          <a:latin typeface="メイリオ"/>
+                        </a:rPr>
+                        <a:t>SSE エンドポイント</a:t>
+                      </a:r>
+                    </a:p>
+                  </a:txBody>
+                  <a:tcPr anchor="ctr" marL="73152" marR="73152" marT="27432" marB="27432">
+                    <a:solidFill>
+                      <a:srgbClr val="FFFFFF"/>
+                    </a:solidFill>
+                  </a:tcPr>
+                </a:tc>
+                <a:tc>
+                  <a:txBody>
+                    <a:bodyPr/>
+                    <a:lstStyle/>
+                    <a:p>
+                      <a:r>
+                        <a:rPr sz="1400" b="0">
+                          <a:solidFill>
+                            <a:srgbClr val="262626"/>
+                          </a:solidFill>
+                          <a:latin typeface="メイリオ"/>
+                        </a:rPr>
+                        <a:t>https://jma-mcp-remote.onrender.com/sse</a:t>
+                      </a:r>
+                    </a:p>
+                  </a:txBody>
+                  <a:tcPr anchor="ctr" marL="73152" marR="73152" marT="27432" marB="27432">
+                    <a:solidFill>
+                      <a:srgbClr val="FFFFFF"/>
+                    </a:solidFill>
+                  </a:tcPr>
+                </a:tc>
+              </a:tr>
+              <a:tr h="320040">
+                <a:tc>
+                  <a:txBody>
+                    <a:bodyPr/>
+                    <a:lstStyle/>
+                    <a:p>
+                      <a:r>
+                        <a:rPr sz="1400" b="0">
+                          <a:solidFill>
+                            <a:srgbClr val="262626"/>
+                          </a:solidFill>
+                          <a:latin typeface="メイリオ"/>
+                        </a:rPr>
+                        <a:t>対応クライアント</a:t>
+                      </a:r>
+                    </a:p>
+                  </a:txBody>
+                  <a:tcPr anchor="ctr" marL="73152" marR="73152" marT="27432" marB="27432">
+                    <a:solidFill>
+                      <a:srgbClr val="FFFFFF"/>
+                    </a:solidFill>
+                  </a:tcPr>
+                </a:tc>
+                <a:tc>
+                  <a:txBody>
+                    <a:bodyPr/>
+                    <a:lstStyle/>
+                    <a:p>
+                      <a:r>
+                        <a:rPr sz="1400" b="0">
+                          <a:solidFill>
+                            <a:srgbClr val="262626"/>
+                          </a:solidFill>
+                          <a:latin typeface="メイリオ"/>
+                        </a:rPr>
+                        <a:t>Claude.ai Web版・デスクトップアプリ（macOS）・iPhone版</a:t>
+                      </a:r>
+                    </a:p>
+                  </a:txBody>
+                  <a:tcPr anchor="ctr" marL="73152" marR="73152" marT="27432" marB="27432">
+                    <a:solidFill>
+                      <a:srgbClr val="FFFFFF"/>
+                    </a:solidFill>
+                  </a:tcPr>
+                </a:tc>
+              </a:tr>
+              <a:tr h="320040">
+                <a:tc>
+                  <a:txBody>
+                    <a:bodyPr/>
+                    <a:lstStyle/>
+                    <a:p>
+                      <a:r>
+                        <a:rPr sz="1400" b="0">
+                          <a:solidFill>
+                            <a:srgbClr val="262626"/>
+                          </a:solidFill>
+                          <a:latin typeface="メイリオ"/>
+                        </a:rPr>
+                        <a:t>GitHub</a:t>
+                      </a:r>
+                    </a:p>
+                  </a:txBody>
+                  <a:tcPr anchor="ctr" marL="73152" marR="73152" marT="27432" marB="27432">
+                    <a:solidFill>
+                      <a:srgbClr val="FFFFFF"/>
+                    </a:solidFill>
+                  </a:tcPr>
+                </a:tc>
+                <a:tc>
+                  <a:txBody>
+                    <a:bodyPr/>
+                    <a:lstStyle/>
+                    <a:p>
+                      <a:r>
+                        <a:rPr sz="1400" b="0">
+                          <a:solidFill>
+                            <a:srgbClr val="262626"/>
+                          </a:solidFill>
+                          <a:latin typeface="メイリオ"/>
+                        </a:rPr>
+                        <a:t>https://github.com/masauehr/jma-mcp-remote</a:t>
+                      </a:r>
+                    </a:p>
+                  </a:txBody>
+                  <a:tcPr anchor="ctr" marL="73152" marR="73152" marT="27432" marB="27432">
+                    <a:solidFill>
+                      <a:srgbClr val="FFFFFF"/>
+                    </a:solidFill>
+                  </a:tcPr>
+                </a:tc>
+              </a:tr>
+            </a:tbl>
+          </a:graphicData>
+        </a:graphic>
+      </p:graphicFrame>
+      <p:sp>
+        <p:nvSpPr>
+          <p:cNvPr id="5" name="Rectangle 4"/>
+          <p:cNvSpPr/>
+          <p:nvPr/>
+        </p:nvSpPr>
+        <p:spPr>
+          <a:xfrm>
+            <a:off x="0" y="6583680"/>
+            <a:ext cx="12188952" cy="274320"/>
+          </a:xfrm>
+          <a:prstGeom prst="rect">
+            <a:avLst/>
+          </a:prstGeom>
+          <a:solidFill>
+            <a:srgbClr val="1F497D"/>
+          </a:solidFill>
+          <a:ln>
+            <a:noFill/>
+          </a:ln>
+        </p:spPr>
+        <p:style>
+          <a:lnRef idx="1">
+            <a:schemeClr val="accent1"/>
+          </a:lnRef>
+          <a:fillRef idx="3">
+            <a:schemeClr val="accent1"/>
+          </a:fillRef>
+          <a:effectRef idx="2">
+            <a:schemeClr val="accent1"/>
+          </a:effectRef>
+          <a:fontRef idx="minor">
+            <a:schemeClr val="lt1"/>
+          </a:fontRef>
+        </p:style>
+        <p:txBody>
+          <a:bodyPr rtlCol="0" anchor="ctr"/>
+          <a:lstStyle/>
+          <a:p>
+            <a:pPr algn="ctr"/>
+          </a:p>
+        </p:txBody>
+      </p:sp>
+    </p:spTree>
+  </p:cSld>
+  <p:clrMapOvr>
+    <a:masterClrMapping/>
+  </p:clrMapOvr>
+</p:sld>
+</file>
+
+<file path=ppt/slides/slide12.xml><?xml version="1.0" encoding="utf-8"?>
+<p:sld xmlns:a="http://schemas.openxmlformats.org/drawingml/2006/main" xmlns:p="http://schemas.openxmlformats.org/presentationml/2006/main" xmlns:r="http://schemas.openxmlformats.org/officeDocument/2006/relationships">
+  <p:cSld>
+    <p:bg>
+      <p:bgPr>
+        <a:solidFill>
+          <a:srgbClr val="F2F2F2"/>
+        </a:solidFill>
+        <a:effectLst/>
+      </p:bgPr>
+    </p:bg>
+    <p:spTree>
+      <p:nvGrpSpPr>
+        <p:cNvPr id="1" name=""/>
+        <p:cNvGrpSpPr/>
+        <p:nvPr/>
+      </p:nvGrpSpPr>
+      <p:grpSpPr/>
+      <p:sp>
+        <p:nvSpPr>
+          <p:cNvPr id="2" name="Rectangle 1"/>
+          <p:cNvSpPr/>
+          <p:nvPr/>
+        </p:nvSpPr>
+        <p:spPr>
+          <a:xfrm>
+            <a:off x="0" y="0"/>
+            <a:ext cx="12188952" cy="1097280"/>
+          </a:xfrm>
+          <a:prstGeom prst="rect">
+            <a:avLst/>
+          </a:prstGeom>
+          <a:solidFill>
+            <a:srgbClr val="1F497D"/>
+          </a:solidFill>
+          <a:ln>
+            <a:noFill/>
+          </a:ln>
+        </p:spPr>
+        <p:style>
+          <a:lnRef idx="1">
+            <a:schemeClr val="accent1"/>
+          </a:lnRef>
+          <a:fillRef idx="3">
+            <a:schemeClr val="accent1"/>
+          </a:fillRef>
+          <a:effectRef idx="2">
+            <a:schemeClr val="accent1"/>
+          </a:effectRef>
+          <a:fontRef idx="minor">
+            <a:schemeClr val="lt1"/>
+          </a:fontRef>
+        </p:style>
+        <p:txBody>
+          <a:bodyPr rtlCol="0" anchor="ctr"/>
+          <a:lstStyle/>
+          <a:p>
+            <a:pPr algn="ctr"/>
+          </a:p>
+        </p:txBody>
+      </p:sp>
+      <p:sp>
+        <p:nvSpPr>
+          <p:cNvPr id="3" name="TextBox 2"/>
+          <p:cNvSpPr txBox="1"/>
+          <p:nvPr/>
+        </p:nvSpPr>
+        <p:spPr>
+          <a:xfrm>
+            <a:off x="457200" y="182880"/>
+            <a:ext cx="10972800" cy="731520"/>
+          </a:xfrm>
+          <a:prstGeom prst="rect">
+            <a:avLst/>
+          </a:prstGeom>
+          <a:noFill/>
+        </p:spPr>
+        <p:txBody>
+          <a:bodyPr wrap="square">
+            <a:spAutoFit/>
+          </a:bodyPr>
+          <a:lstStyle/>
+          <a:p>
+            <a:pPr algn="l"/>
+            <a:r>
+              <a:rPr sz="3200" b="1">
+                <a:solidFill>
+                  <a:srgbClr val="FFFFFF"/>
+                </a:solidFill>
+                <a:latin typeface="メイリオ"/>
+              </a:rPr>
+              <a:t>ローカル版との違い</a:t>
+            </a:r>
+          </a:p>
+        </p:txBody>
+      </p:sp>
+      <p:graphicFrame>
+        <p:nvGraphicFramePr>
+          <p:cNvPr id="4" name="Table 3"/>
+          <p:cNvGraphicFramePr>
+            <a:graphicFrameLocks noGrp="1"/>
+          </p:cNvGraphicFramePr>
+          <p:nvPr/>
+        </p:nvGraphicFramePr>
+        <p:xfrm>
+          <a:off x="731520" y="1371600"/>
+          <a:ext cx="10698480" cy="2634488"/>
+        </p:xfrm>
+        <a:graphic>
+          <a:graphicData uri="http://schemas.openxmlformats.org/drawingml/2006/table">
+            <a:tbl>
+              <a:tblPr firstRow="1">
+                <a:tableStyleId>{5C22544A-7EE6-4342-B048-85BDC9FD1C3A}</a:tableStyleId>
+              </a:tblPr>
+              <a:tblGrid>
+                <a:gridCol w="3566160"/>
+                <a:gridCol w="3566160"/>
+                <a:gridCol w="3566160"/>
+              </a:tblGrid>
+              <a:tr h="320040">
+                <a:tc>
+                  <a:txBody>
+                    <a:bodyPr/>
+                    <a:lstStyle/>
+                    <a:p>
+                      <a:r>
+                        <a:rPr sz="1400" b="1">
+                          <a:solidFill>
+                            <a:srgbClr val="FFFFFF"/>
+                          </a:solidFill>
+                          <a:latin typeface="メイリオ"/>
+                        </a:rPr>
+                        <a:t>比較項目</a:t>
+                      </a:r>
+                    </a:p>
+                  </a:txBody>
+                  <a:tcPr anchor="ctr" marL="73152" marR="73152" marT="27432" marB="27432">
+                    <a:solidFill>
+                      <a:srgbClr val="1F497D"/>
+                    </a:solidFill>
+                  </a:tcPr>
+                </a:tc>
+                <a:tc>
+                  <a:txBody>
+                    <a:bodyPr/>
+                    <a:lstStyle/>
+                    <a:p>
+                      <a:r>
+                        <a:rPr sz="1400" b="1">
+                          <a:solidFill>
+                            <a:srgbClr val="FFFFFF"/>
+                          </a:solidFill>
+                          <a:latin typeface="メイリオ"/>
+                        </a:rPr>
+                        <a:t>jma_mcp（ローカル版）</a:t>
+                      </a:r>
+                    </a:p>
+                  </a:txBody>
+                  <a:tcPr anchor="ctr" marL="73152" marR="73152" marT="27432" marB="27432">
+                    <a:solidFill>
+                      <a:srgbClr val="1F497D"/>
+                    </a:solidFill>
+                  </a:tcPr>
+                </a:tc>
+                <a:tc>
+                  <a:txBody>
+                    <a:bodyPr/>
+                    <a:lstStyle/>
+                    <a:p>
+                      <a:r>
+                        <a:rPr sz="1400" b="1">
+                          <a:solidFill>
+                            <a:srgbClr val="FFFFFF"/>
+                          </a:solidFill>
+                          <a:latin typeface="メイリオ"/>
+                        </a:rPr>
+                        <a:t>jma_mcp_remote（リモート版）</a:t>
+                      </a:r>
+                    </a:p>
+                  </a:txBody>
+                  <a:tcPr anchor="ctr" marL="73152" marR="73152" marT="27432" marB="27432">
+                    <a:solidFill>
+                      <a:srgbClr val="1F497D"/>
+                    </a:solidFill>
+                  </a:tcPr>
+                </a:tc>
+              </a:tr>
+              <a:tr h="320040">
+                <a:tc>
+                  <a:txBody>
+                    <a:bodyPr/>
+                    <a:lstStyle/>
+                    <a:p>
+                      <a:r>
+                        <a:rPr sz="1400" b="0">
+                          <a:solidFill>
+                            <a:srgbClr val="262626"/>
+                          </a:solidFill>
+                          <a:latin typeface="メイリオ"/>
+                        </a:rPr>
+                        <a:t>通信方式</a:t>
+                      </a:r>
+                    </a:p>
+                  </a:txBody>
+                  <a:tcPr anchor="ctr" marL="73152" marR="73152" marT="27432" marB="27432">
+                    <a:solidFill>
+                      <a:srgbClr val="FFFFFF"/>
+                    </a:solidFill>
+                  </a:tcPr>
+                </a:tc>
+                <a:tc>
+                  <a:txBody>
+                    <a:bodyPr/>
+                    <a:lstStyle/>
+                    <a:p>
+                      <a:r>
+                        <a:rPr sz="1400" b="0">
+                          <a:solidFill>
+                            <a:srgbClr val="262626"/>
+                          </a:solidFill>
+                          <a:latin typeface="メイリオ"/>
+                        </a:rPr>
+                        <a:t>stdio（標準入出力）</a:t>
+                      </a:r>
+                    </a:p>
+                  </a:txBody>
+                  <a:tcPr anchor="ctr" marL="73152" marR="73152" marT="27432" marB="27432">
+                    <a:solidFill>
+                      <a:srgbClr val="FFFFFF"/>
+                    </a:solidFill>
+                  </a:tcPr>
+                </a:tc>
+                <a:tc>
+                  <a:txBody>
+                    <a:bodyPr/>
+                    <a:lstStyle/>
+                    <a:p>
+                      <a:r>
+                        <a:rPr sz="1400" b="0">
+                          <a:solidFill>
+                            <a:srgbClr val="262626"/>
+                          </a:solidFill>
+                          <a:latin typeface="メイリオ"/>
+                        </a:rPr>
+                        <a:t>HTTP + SSE</a:t>
+                      </a:r>
+                    </a:p>
+                  </a:txBody>
+                  <a:tcPr anchor="ctr" marL="73152" marR="73152" marT="27432" marB="27432">
+                    <a:solidFill>
+                      <a:srgbClr val="FFFFFF"/>
+                    </a:solidFill>
+                  </a:tcPr>
+                </a:tc>
+              </a:tr>
+              <a:tr h="320040">
+                <a:tc>
+                  <a:txBody>
+                    <a:bodyPr/>
+                    <a:lstStyle/>
+                    <a:p>
+                      <a:r>
+                        <a:rPr sz="1400" b="0">
+                          <a:solidFill>
+                            <a:srgbClr val="262626"/>
+                          </a:solidFill>
+                          <a:latin typeface="メイリオ"/>
+                        </a:rPr>
+                        <a:t>起動方法</a:t>
+                      </a:r>
+                    </a:p>
+                  </a:txBody>
+                  <a:tcPr anchor="ctr" marL="73152" marR="73152" marT="27432" marB="27432">
+                    <a:solidFill>
+                      <a:srgbClr val="FFFFFF"/>
+                    </a:solidFill>
+                  </a:tcPr>
+                </a:tc>
+                <a:tc>
+                  <a:txBody>
+                    <a:bodyPr/>
+                    <a:lstStyle/>
+                    <a:p>
+                      <a:r>
+                        <a:rPr sz="1400" b="0">
+                          <a:solidFill>
+                            <a:srgbClr val="262626"/>
+                          </a:solidFill>
+                          <a:latin typeface="メイリオ"/>
+                        </a:rPr>
+                        <a:t>Claude Code がサブプロセス起動</a:t>
+                      </a:r>
+                    </a:p>
+                  </a:txBody>
+                  <a:tcPr anchor="ctr" marL="73152" marR="73152" marT="27432" marB="27432">
+                    <a:solidFill>
+                      <a:srgbClr val="FFFFFF"/>
+                    </a:solidFill>
+                  </a:tcPr>
+                </a:tc>
+                <a:tc>
+                  <a:txBody>
+                    <a:bodyPr/>
+                    <a:lstStyle/>
+                    <a:p>
+                      <a:r>
+                        <a:rPr sz="1400" b="0">
+                          <a:solidFill>
+                            <a:srgbClr val="262626"/>
+                          </a:solidFill>
+                          <a:latin typeface="メイリオ"/>
+                        </a:rPr>
+                        <a:t>Render 上で常駐</a:t>
+                      </a:r>
+                    </a:p>
+                  </a:txBody>
+                  <a:tcPr anchor="ctr" marL="73152" marR="73152" marT="27432" marB="27432">
+                    <a:solidFill>
+                      <a:srgbClr val="FFFFFF"/>
+                    </a:solidFill>
+                  </a:tcPr>
+                </a:tc>
+              </a:tr>
+              <a:tr h="517144">
+                <a:tc>
+                  <a:txBody>
+                    <a:bodyPr/>
+                    <a:lstStyle/>
+                    <a:p>
+                      <a:r>
+                        <a:rPr sz="1400" b="0">
+                          <a:solidFill>
+                            <a:srgbClr val="262626"/>
+                          </a:solidFill>
+                          <a:latin typeface="メイリオ"/>
+                        </a:rPr>
+                        <a:t>対応クライアント</a:t>
+                      </a:r>
+                    </a:p>
+                  </a:txBody>
+                  <a:tcPr anchor="ctr" marL="73152" marR="73152" marT="27432" marB="27432">
+                    <a:solidFill>
+                      <a:srgbClr val="FFFFFF"/>
+                    </a:solidFill>
+                  </a:tcPr>
+                </a:tc>
+                <a:tc>
+                  <a:txBody>
+                    <a:bodyPr/>
+                    <a:lstStyle/>
+                    <a:p>
+                      <a:r>
+                        <a:rPr sz="1400" b="0">
+                          <a:solidFill>
+                            <a:srgbClr val="262626"/>
+                          </a:solidFill>
+                          <a:latin typeface="メイリオ"/>
+                        </a:rPr>
+                        <a:t>Claude Code（CLI）</a:t>
+                      </a:r>
+                    </a:p>
+                  </a:txBody>
+                  <a:tcPr anchor="ctr" marL="73152" marR="73152" marT="27432" marB="27432">
+                    <a:solidFill>
+                      <a:srgbClr val="FFFFFF"/>
+                    </a:solidFill>
+                  </a:tcPr>
+                </a:tc>
+                <a:tc>
+                  <a:txBody>
+                    <a:bodyPr/>
+                    <a:lstStyle/>
+                    <a:p>
+                      <a:r>
+                        <a:rPr sz="1400" b="0">
+                          <a:solidFill>
+                            <a:srgbClr val="262626"/>
+                          </a:solidFill>
+                          <a:latin typeface="メイリオ"/>
+                        </a:rPr>
+                        <a:t>Claude.ai Web・デスクトップアプリ・iPhone版</a:t>
+                      </a:r>
+                    </a:p>
+                  </a:txBody>
+                  <a:tcPr anchor="ctr" marL="73152" marR="73152" marT="27432" marB="27432">
+                    <a:solidFill>
+                      <a:srgbClr val="FFFFFF"/>
+                    </a:solidFill>
+                  </a:tcPr>
+                </a:tc>
+              </a:tr>
+              <a:tr h="517144">
+                <a:tc>
+                  <a:txBody>
+                    <a:bodyPr/>
+                    <a:lstStyle/>
+                    <a:p>
+                      <a:r>
+                        <a:rPr sz="1400" b="0">
+                          <a:solidFill>
+                            <a:srgbClr val="262626"/>
+                          </a:solidFill>
+                          <a:latin typeface="メイリオ"/>
+                        </a:rPr>
+                        <a:t>設定ファイル</a:t>
+                      </a:r>
+                    </a:p>
+                  </a:txBody>
+                  <a:tcPr anchor="ctr" marL="73152" marR="73152" marT="27432" marB="27432">
+                    <a:solidFill>
+                      <a:srgbClr val="FFFFFF"/>
+                    </a:solidFill>
+                  </a:tcPr>
+                </a:tc>
+                <a:tc>
+                  <a:txBody>
+                    <a:bodyPr/>
+                    <a:lstStyle/>
+                    <a:p>
+                      <a:r>
+                        <a:rPr sz="1400" b="0">
+                          <a:solidFill>
+                            <a:srgbClr val="262626"/>
+                          </a:solidFill>
+                          <a:latin typeface="メイリオ"/>
+                        </a:rPr>
+                        <a:t>.mcp.json（command/args）</a:t>
+                      </a:r>
+                    </a:p>
+                  </a:txBody>
+                  <a:tcPr anchor="ctr" marL="73152" marR="73152" marT="27432" marB="27432">
+                    <a:solidFill>
+                      <a:srgbClr val="FFFFFF"/>
+                    </a:solidFill>
+                  </a:tcPr>
+                </a:tc>
+                <a:tc>
+                  <a:txBody>
+                    <a:bodyPr/>
+                    <a:lstStyle/>
+                    <a:p>
+                      <a:r>
+                        <a:rPr sz="1400" b="0">
+                          <a:solidFill>
+                            <a:srgbClr val="262626"/>
+                          </a:solidFill>
+                          <a:latin typeface="メイリオ"/>
+                        </a:rPr>
+                        <a:t>.mcp.json または Claude.ai 設定（url）</a:t>
+                      </a:r>
+                    </a:p>
+                  </a:txBody>
+                  <a:tcPr anchor="ctr" marL="73152" marR="73152" marT="27432" marB="27432">
+                    <a:solidFill>
+                      <a:srgbClr val="FFFFFF"/>
+                    </a:solidFill>
+                  </a:tcPr>
+                </a:tc>
+              </a:tr>
+              <a:tr h="320040">
+                <a:tc>
+                  <a:txBody>
+                    <a:bodyPr/>
+                    <a:lstStyle/>
+                    <a:p>
+                      <a:r>
+                        <a:rPr sz="1400" b="0">
+                          <a:solidFill>
+                            <a:srgbClr val="262626"/>
+                          </a:solidFill>
+                          <a:latin typeface="メイリオ"/>
+                        </a:rPr>
+                        <a:t>コスト</a:t>
+                      </a:r>
+                    </a:p>
+                  </a:txBody>
+                  <a:tcPr anchor="ctr" marL="73152" marR="73152" marT="27432" marB="27432">
+                    <a:solidFill>
+                      <a:srgbClr val="FFFFFF"/>
+                    </a:solidFill>
+                  </a:tcPr>
+                </a:tc>
+                <a:tc>
+                  <a:txBody>
+                    <a:bodyPr/>
+                    <a:lstStyle/>
+                    <a:p>
+                      <a:r>
+                        <a:rPr sz="1400" b="0">
+                          <a:solidFill>
+                            <a:srgbClr val="262626"/>
+                          </a:solidFill>
+                          <a:latin typeface="メイリオ"/>
+                        </a:rPr>
+                        <a:t>無料（ローカル実行）</a:t>
+                      </a:r>
+                    </a:p>
+                  </a:txBody>
+                  <a:tcPr anchor="ctr" marL="73152" marR="73152" marT="27432" marB="27432">
+                    <a:solidFill>
+                      <a:srgbClr val="FFFFFF"/>
+                    </a:solidFill>
+                  </a:tcPr>
+                </a:tc>
+                <a:tc>
+                  <a:txBody>
+                    <a:bodyPr/>
+                    <a:lstStyle/>
+                    <a:p>
+                      <a:r>
+                        <a:rPr sz="1400" b="0">
+                          <a:solidFill>
+                            <a:srgbClr val="262626"/>
+                          </a:solidFill>
+                          <a:latin typeface="メイリオ"/>
+                        </a:rPr>
+                        <a:t>Render 無料プラン（スリープあり）</a:t>
+                      </a:r>
+                    </a:p>
+                  </a:txBody>
+                  <a:tcPr anchor="ctr" marL="73152" marR="73152" marT="27432" marB="27432">
+                    <a:solidFill>
+                      <a:srgbClr val="FFFFFF"/>
+                    </a:solidFill>
+                  </a:tcPr>
+                </a:tc>
+              </a:tr>
+              <a:tr h="320040">
+                <a:tc>
+                  <a:txBody>
+                    <a:bodyPr/>
+                    <a:lstStyle/>
+                    <a:p>
+                      <a:r>
+                        <a:rPr sz="1400" b="0">
+                          <a:solidFill>
+                            <a:srgbClr val="262626"/>
+                          </a:solidFill>
+                          <a:latin typeface="メイリオ"/>
+                        </a:rPr>
+                        <a:t>ツール内容</a:t>
+                      </a:r>
+                    </a:p>
+                  </a:txBody>
+                  <a:tcPr anchor="ctr" marL="73152" marR="73152" marT="27432" marB="27432">
+                    <a:solidFill>
+                      <a:srgbClr val="FFFFFF"/>
+                    </a:solidFill>
+                  </a:tcPr>
+                </a:tc>
+                <a:tc>
+                  <a:txBody>
+                    <a:bodyPr/>
+                    <a:lstStyle/>
+                    <a:p>
+                      <a:r>
+                        <a:rPr sz="1400" b="0">
+                          <a:solidFill>
+                            <a:srgbClr val="262626"/>
+                          </a:solidFill>
+                          <a:latin typeface="メイリオ"/>
+                        </a:rPr>
+                        <a:t>全21種</a:t>
+                      </a:r>
+                    </a:p>
+                  </a:txBody>
+                  <a:tcPr anchor="ctr" marL="73152" marR="73152" marT="27432" marB="27432">
+                    <a:solidFill>
+                      <a:srgbClr val="FFFFFF"/>
+                    </a:solidFill>
+                  </a:tcPr>
+                </a:tc>
+                <a:tc>
+                  <a:txBody>
+                    <a:bodyPr/>
+                    <a:lstStyle/>
+                    <a:p>
+                      <a:r>
+                        <a:rPr sz="1400" b="0">
+                          <a:solidFill>
+                            <a:srgbClr val="262626"/>
+                          </a:solidFill>
+                          <a:latin typeface="メイリオ"/>
+                        </a:rPr>
+                        <a:t>同一（server.py を共有）</a:t>
+                      </a:r>
+                    </a:p>
+                  </a:txBody>
+                  <a:tcPr anchor="ctr" marL="73152" marR="73152" marT="27432" marB="27432">
+                    <a:solidFill>
+                      <a:srgbClr val="FFFFFF"/>
+                    </a:solidFill>
+                  </a:tcPr>
+                </a:tc>
+              </a:tr>
+            </a:tbl>
+          </a:graphicData>
+        </a:graphic>
+      </p:graphicFrame>
+      <p:sp>
+        <p:nvSpPr>
+          <p:cNvPr id="5" name="Rectangle 4"/>
+          <p:cNvSpPr/>
+          <p:nvPr/>
+        </p:nvSpPr>
+        <p:spPr>
+          <a:xfrm>
+            <a:off x="0" y="6583680"/>
+            <a:ext cx="12188952" cy="274320"/>
+          </a:xfrm>
+          <a:prstGeom prst="rect">
+            <a:avLst/>
+          </a:prstGeom>
+          <a:solidFill>
+            <a:srgbClr val="1F497D"/>
+          </a:solidFill>
+          <a:ln>
+            <a:noFill/>
+          </a:ln>
+        </p:spPr>
+        <p:style>
+          <a:lnRef idx="1">
+            <a:schemeClr val="accent1"/>
+          </a:lnRef>
+          <a:fillRef idx="3">
+            <a:schemeClr val="accent1"/>
+          </a:fillRef>
+          <a:effectRef idx="2">
+            <a:schemeClr val="accent1"/>
+          </a:effectRef>
+          <a:fontRef idx="minor">
+            <a:schemeClr val="lt1"/>
+          </a:fontRef>
+        </p:style>
+        <p:txBody>
+          <a:bodyPr rtlCol="0" anchor="ctr"/>
+          <a:lstStyle/>
+          <a:p>
+            <a:pPr algn="ctr"/>
+          </a:p>
+        </p:txBody>
+      </p:sp>
+    </p:spTree>
+  </p:cSld>
+  <p:clrMapOvr>
+    <a:masterClrMapping/>
+  </p:clrMapOvr>
+</p:sld>
+</file>
+
+<file path=ppt/slides/slide13.xml><?xml version="1.0" encoding="utf-8"?>
+<p:sld xmlns:a="http://schemas.openxmlformats.org/drawingml/2006/main" xmlns:p="http://schemas.openxmlformats.org/presentationml/2006/main" xmlns:r="http://schemas.openxmlformats.org/officeDocument/2006/relationships">
+  <p:cSld>
+    <p:bg>
+      <p:bgPr>
+        <a:solidFill>
+          <a:srgbClr val="F2F2F2"/>
+        </a:solidFill>
+        <a:effectLst/>
+      </p:bgPr>
+    </p:bg>
+    <p:spTree>
+      <p:nvGrpSpPr>
+        <p:cNvPr id="1" name=""/>
+        <p:cNvGrpSpPr/>
+        <p:nvPr/>
+      </p:nvGrpSpPr>
+      <p:grpSpPr/>
+      <p:sp>
+        <p:nvSpPr>
+          <p:cNvPr id="2" name="Rectangle 1"/>
+          <p:cNvSpPr/>
+          <p:nvPr/>
+        </p:nvSpPr>
+        <p:spPr>
+          <a:xfrm>
+            <a:off x="0" y="0"/>
+            <a:ext cx="12188952" cy="1097280"/>
+          </a:xfrm>
+          <a:prstGeom prst="rect">
+            <a:avLst/>
+          </a:prstGeom>
+          <a:solidFill>
+            <a:srgbClr val="1F497D"/>
+          </a:solidFill>
+          <a:ln>
+            <a:noFill/>
+          </a:ln>
+        </p:spPr>
+        <p:style>
+          <a:lnRef idx="1">
+            <a:schemeClr val="accent1"/>
+          </a:lnRef>
+          <a:fillRef idx="3">
+            <a:schemeClr val="accent1"/>
+          </a:fillRef>
+          <a:effectRef idx="2">
+            <a:schemeClr val="accent1"/>
+          </a:effectRef>
+          <a:fontRef idx="minor">
+            <a:schemeClr val="lt1"/>
+          </a:fontRef>
+        </p:style>
+        <p:txBody>
+          <a:bodyPr rtlCol="0" anchor="ctr"/>
+          <a:lstStyle/>
+          <a:p>
+            <a:pPr algn="ctr"/>
+          </a:p>
+        </p:txBody>
+      </p:sp>
+      <p:sp>
+        <p:nvSpPr>
+          <p:cNvPr id="3" name="TextBox 2"/>
+          <p:cNvSpPr txBox="1"/>
+          <p:nvPr/>
+        </p:nvSpPr>
+        <p:spPr>
+          <a:xfrm>
+            <a:off x="457200" y="182880"/>
+            <a:ext cx="10972800" cy="731520"/>
+          </a:xfrm>
+          <a:prstGeom prst="rect">
+            <a:avLst/>
+          </a:prstGeom>
+          <a:noFill/>
+        </p:spPr>
+        <p:txBody>
+          <a:bodyPr wrap="square">
+            <a:spAutoFit/>
+          </a:bodyPr>
+          <a:lstStyle/>
+          <a:p>
+            <a:pPr algn="l"/>
+            <a:r>
+              <a:rPr sz="3200" b="1">
+                <a:solidFill>
+                  <a:srgbClr val="FFFFFF"/>
+                </a:solidFill>
+                <a:latin typeface="メイリオ"/>
+              </a:rPr>
+              <a:t>ファイル構成</a:t>
+            </a:r>
+          </a:p>
+        </p:txBody>
+      </p:sp>
+      <p:sp>
+        <p:nvSpPr>
+          <p:cNvPr id="4" name="Rectangle 3"/>
+          <p:cNvSpPr/>
+          <p:nvPr/>
+        </p:nvSpPr>
+        <p:spPr>
+          <a:xfrm>
+            <a:off x="731520" y="1371600"/>
+            <a:ext cx="10698480" cy="1891665"/>
+          </a:xfrm>
+          <a:prstGeom prst="rect">
+            <a:avLst/>
+          </a:prstGeom>
+          <a:solidFill>
+            <a:srgbClr val="E8E8E8"/>
+          </a:solidFill>
+          <a:ln>
+            <a:noFill/>
+          </a:ln>
+        </p:spPr>
+        <p:style>
+          <a:lnRef idx="1">
+            <a:schemeClr val="accent1"/>
+          </a:lnRef>
+          <a:fillRef idx="3">
+            <a:schemeClr val="accent1"/>
+          </a:fillRef>
+          <a:effectRef idx="2">
+            <a:schemeClr val="accent1"/>
+          </a:effectRef>
+          <a:fontRef idx="minor">
+            <a:schemeClr val="lt1"/>
+          </a:fontRef>
+        </p:style>
+        <p:txBody>
+          <a:bodyPr rtlCol="0" anchor="ctr"/>
+          <a:lstStyle/>
+          <a:p>
+            <a:pPr algn="ctr"/>
+          </a:p>
+        </p:txBody>
+      </p:sp>
+      <p:sp>
+        <p:nvSpPr>
+          <p:cNvPr id="5" name="Rectangle 4"/>
+          <p:cNvSpPr/>
+          <p:nvPr/>
+        </p:nvSpPr>
+        <p:spPr>
+          <a:xfrm>
+            <a:off x="731520" y="1371600"/>
+            <a:ext cx="54864" cy="1891665"/>
+          </a:xfrm>
+          <a:prstGeom prst="rect">
+            <a:avLst/>
+          </a:prstGeom>
+          <a:solidFill>
+            <a:srgbClr val="1F497D"/>
+          </a:solidFill>
+          <a:ln>
+            <a:noFill/>
+          </a:ln>
+        </p:spPr>
+        <p:style>
+          <a:lnRef idx="1">
+            <a:schemeClr val="accent1"/>
+          </a:lnRef>
+          <a:fillRef idx="3">
+            <a:schemeClr val="accent1"/>
+          </a:fillRef>
+          <a:effectRef idx="2">
+            <a:schemeClr val="accent1"/>
+          </a:effectRef>
+          <a:fontRef idx="minor">
+            <a:schemeClr val="lt1"/>
+          </a:fontRef>
+        </p:style>
+        <p:txBody>
+          <a:bodyPr rtlCol="0" anchor="ctr"/>
+          <a:lstStyle/>
+          <a:p>
+            <a:pPr algn="ctr"/>
+          </a:p>
+        </p:txBody>
+      </p:sp>
+      <p:sp>
+        <p:nvSpPr>
+          <p:cNvPr id="6" name="TextBox 5"/>
+          <p:cNvSpPr txBox="1"/>
+          <p:nvPr/>
+        </p:nvSpPr>
+        <p:spPr>
+          <a:xfrm>
+            <a:off x="1005840" y="1463040"/>
+            <a:ext cx="10058400" cy="1708785"/>
+          </a:xfrm>
+          <a:prstGeom prst="rect">
+            <a:avLst/>
+          </a:prstGeom>
+          <a:noFill/>
+        </p:spPr>
+        <p:txBody>
+          <a:bodyPr wrap="square">
+            <a:spAutoFit/>
+          </a:bodyPr>
+          <a:lstStyle/>
+          <a:p>
+            <a:pPr algn="l"/>
+            <a:r>
+              <a:rPr sz="1300" b="0">
+                <a:solidFill>
+                  <a:srgbClr val="262626"/>
+                </a:solidFill>
+                <a:latin typeface="Courier New"/>
+              </a:rPr>
+              <a:t>jma_mcp_remote/</a:t>
+            </a:r>
+          </a:p>
+          <a:p>
+            <a:pPr algn="l"/>
+            <a:r>
+              <a:rPr sz="1300" b="0">
+                <a:solidFill>
+                  <a:srgbClr val="262626"/>
+                </a:solidFill>
+                <a:latin typeface="Courier New"/>
+              </a:rPr>
+              <a:t>├── server.py          # jma_mcp/server.py から起動部分のみ SSE に変更</a:t>
+            </a:r>
+          </a:p>
+          <a:p>
+            <a:pPr algn="l"/>
+            <a:r>
+              <a:rPr sz="1300" b="0">
+                <a:solidFill>
+                  <a:srgbClr val="262626"/>
+                </a:solidFill>
+                <a:latin typeface="Courier New"/>
+              </a:rPr>
+              <a:t>├── areas.py           # jma_mcp/areas.py からコピー</a:t>
+            </a:r>
+          </a:p>
+          <a:p>
+            <a:pPr algn="l"/>
+            <a:r>
+              <a:rPr sz="1300" b="0">
+                <a:solidFill>
+                  <a:srgbClr val="262626"/>
+                </a:solidFill>
+                <a:latin typeface="Courier New"/>
+              </a:rPr>
+              <a:t>├── requirements.txt   # mcp, requests, uvicorn, starlette</a:t>
+            </a:r>
+          </a:p>
+          <a:p>
+            <a:pPr algn="l"/>
+            <a:r>
+              <a:rPr sz="1300" b="0">
+                <a:solidFill>
+                  <a:srgbClr val="262626"/>
+                </a:solidFill>
+                <a:latin typeface="Courier New"/>
+              </a:rPr>
+              <a:t>├── render.yaml        # Render デプロイ設定</a:t>
+            </a:r>
+          </a:p>
+          <a:p>
+            <a:pPr algn="l"/>
+            <a:r>
+              <a:rPr sz="1300" b="0">
+                <a:solidFill>
+                  <a:srgbClr val="262626"/>
+                </a:solidFill>
+                <a:latin typeface="Courier New"/>
+              </a:rPr>
+              <a:t>├── README.md          # プロジェクト概要</a:t>
+            </a:r>
+          </a:p>
+          <a:p>
+            <a:pPr algn="l"/>
+            <a:r>
+              <a:rPr sz="1300" b="0">
+                <a:solidFill>
+                  <a:srgbClr val="262626"/>
+                </a:solidFill>
+                <a:latin typeface="Courier New"/>
+              </a:rPr>
+              <a:t>├── jma-mcp-remote.md  # このファイル（詳細マニュアル）</a:t>
+            </a:r>
+          </a:p>
+          <a:p>
+            <a:pPr algn="l"/>
+            <a:r>
+              <a:rPr sz="1300" b="0">
+                <a:solidFill>
+                  <a:srgbClr val="262626"/>
+                </a:solidFill>
+                <a:latin typeface="Courier New"/>
+              </a:rPr>
+              <a:t>├── .mcp.json          # Claude Code からリモート接続する場合の設定（gitignore済み）</a:t>
+            </a:r>
+          </a:p>
+          <a:p>
+            <a:pPr algn="l"/>
+            <a:r>
+              <a:rPr sz="1300" b="0">
+                <a:solidFill>
+                  <a:srgbClr val="262626"/>
+                </a:solidFill>
+                <a:latin typeface="Courier New"/>
+              </a:rPr>
+              <a:t>└── .gitignore</a:t>
+            </a:r>
+          </a:p>
+        </p:txBody>
+      </p:sp>
+      <p:sp>
+        <p:nvSpPr>
+          <p:cNvPr id="7" name="Rectangle 6"/>
+          <p:cNvSpPr/>
+          <p:nvPr/>
+        </p:nvSpPr>
+        <p:spPr>
+          <a:xfrm>
+            <a:off x="0" y="6583680"/>
+            <a:ext cx="12188952" cy="274320"/>
+          </a:xfrm>
+          <a:prstGeom prst="rect">
+            <a:avLst/>
+          </a:prstGeom>
+          <a:solidFill>
+            <a:srgbClr val="1F497D"/>
+          </a:solidFill>
+          <a:ln>
+            <a:noFill/>
+          </a:ln>
+        </p:spPr>
+        <p:style>
+          <a:lnRef idx="1">
+            <a:schemeClr val="accent1"/>
+          </a:lnRef>
+          <a:fillRef idx="3">
+            <a:schemeClr val="accent1"/>
+          </a:fillRef>
+          <a:effectRef idx="2">
+            <a:schemeClr val="accent1"/>
+          </a:effectRef>
+          <a:fontRef idx="minor">
+            <a:schemeClr val="lt1"/>
+          </a:fontRef>
+        </p:style>
+        <p:txBody>
+          <a:bodyPr rtlCol="0" anchor="ctr"/>
+          <a:lstStyle/>
+          <a:p>
+            <a:pPr algn="ctr"/>
+          </a:p>
+        </p:txBody>
+      </p:sp>
+    </p:spTree>
+  </p:cSld>
+  <p:clrMapOvr>
+    <a:masterClrMapping/>
+  </p:clrMapOvr>
+</p:sld>
+</file>
+
+<file path=ppt/slides/slide14.xml><?xml version="1.0" encoding="utf-8"?>
+<p:sld xmlns:a="http://schemas.openxmlformats.org/drawingml/2006/main" xmlns:p="http://schemas.openxmlformats.org/presentationml/2006/main" xmlns:r="http://schemas.openxmlformats.org/officeDocument/2006/relationships">
+  <p:cSld>
+    <p:bg>
+      <p:bgPr>
+        <a:solidFill>
+          <a:srgbClr val="F2F2F2"/>
+        </a:solidFill>
+        <a:effectLst/>
+      </p:bgPr>
+    </p:bg>
+    <p:spTree>
+      <p:nvGrpSpPr>
+        <p:cNvPr id="1" name=""/>
+        <p:cNvGrpSpPr/>
+        <p:nvPr/>
+      </p:nvGrpSpPr>
+      <p:grpSpPr/>
+      <p:sp>
+        <p:nvSpPr>
+          <p:cNvPr id="2" name="Rectangle 1"/>
+          <p:cNvSpPr/>
+          <p:nvPr/>
+        </p:nvSpPr>
+        <p:spPr>
+          <a:xfrm>
+            <a:off x="0" y="0"/>
+            <a:ext cx="12188952" cy="1097280"/>
+          </a:xfrm>
+          <a:prstGeom prst="rect">
+            <a:avLst/>
+          </a:prstGeom>
+          <a:solidFill>
+            <a:srgbClr val="1F497D"/>
+          </a:solidFill>
+          <a:ln>
+            <a:noFill/>
+          </a:ln>
+        </p:spPr>
+        <p:style>
+          <a:lnRef idx="1">
+            <a:schemeClr val="accent1"/>
+          </a:lnRef>
+          <a:fillRef idx="3">
+            <a:schemeClr val="accent1"/>
+          </a:fillRef>
+          <a:effectRef idx="2">
+            <a:schemeClr val="accent1"/>
+          </a:effectRef>
+          <a:fontRef idx="minor">
+            <a:schemeClr val="lt1"/>
+          </a:fontRef>
+        </p:style>
+        <p:txBody>
+          <a:bodyPr rtlCol="0" anchor="ctr"/>
+          <a:lstStyle/>
+          <a:p>
+            <a:pPr algn="ctr"/>
+          </a:p>
+        </p:txBody>
+      </p:sp>
+      <p:sp>
+        <p:nvSpPr>
+          <p:cNvPr id="3" name="TextBox 2"/>
+          <p:cNvSpPr txBox="1"/>
+          <p:nvPr/>
+        </p:nvSpPr>
+        <p:spPr>
+          <a:xfrm>
+            <a:off x="457200" y="182880"/>
+            <a:ext cx="10972800" cy="731520"/>
+          </a:xfrm>
+          <a:prstGeom prst="rect">
+            <a:avLst/>
+          </a:prstGeom>
+          <a:noFill/>
+        </p:spPr>
+        <p:txBody>
+          <a:bodyPr wrap="square">
+            <a:spAutoFit/>
+          </a:bodyPr>
+          <a:lstStyle/>
+          <a:p>
+            <a:pPr algn="l"/>
+            <a:r>
+              <a:rPr sz="3200" b="1">
+                <a:solidFill>
+                  <a:srgbClr val="FFFFFF"/>
+                </a:solidFill>
+                <a:latin typeface="メイリオ"/>
+              </a:rPr>
+              <a:t>Render へのデプロイ手順</a:t>
+            </a:r>
+          </a:p>
+        </p:txBody>
+      </p:sp>
+      <p:sp>
+        <p:nvSpPr>
+          <p:cNvPr id="4" name="TextBox 3"/>
+          <p:cNvSpPr txBox="1"/>
+          <p:nvPr/>
+        </p:nvSpPr>
+        <p:spPr>
+          <a:xfrm>
+            <a:off x="731520" y="1371600"/>
+            <a:ext cx="10698480" cy="4899660"/>
+          </a:xfrm>
+          <a:prstGeom prst="rect">
+            <a:avLst/>
+          </a:prstGeom>
+          <a:noFill/>
+        </p:spPr>
+        <p:txBody>
+          <a:bodyPr wrap="square">
+            <a:normAutofit/>
+          </a:bodyPr>
+          <a:lstStyle/>
+          <a:p>
+            <a:pPr algn="l"/>
+            <a:r>
+              <a:rPr sz="2000" b="0">
+                <a:solidFill>
+                  <a:srgbClr val="262626"/>
+                </a:solidFill>
+                <a:latin typeface="メイリオ"/>
+              </a:rPr>
+              <a:t>1. Render ダッシュボードを開く</a:t>
+            </a:r>
+          </a:p>
+          <a:p>
+            <a:pPr algn="l"/>
+            <a:r>
+              <a:rPr sz="2000" b="0">
+                <a:solidFill>
+                  <a:srgbClr val="262626"/>
+                </a:solidFill>
+                <a:latin typeface="メイリオ"/>
+              </a:rPr>
+              <a:t/>
+            </a:r>
+          </a:p>
+          <a:p>
+            <a:pPr algn="l"/>
+            <a:r>
+              <a:rPr sz="2000" b="0">
+                <a:solidFill>
+                  <a:srgbClr val="262626"/>
+                </a:solidFill>
+                <a:latin typeface="メイリオ"/>
+              </a:rPr>
+              <a:t>https://dashboard.render.com</a:t>
+            </a:r>
+          </a:p>
+          <a:p>
+            <a:pPr algn="l"/>
+            <a:r>
+              <a:rPr sz="2000" b="0">
+                <a:solidFill>
+                  <a:srgbClr val="262626"/>
+                </a:solidFill>
+                <a:latin typeface="メイリオ"/>
+              </a:rPr>
+              <a:t/>
+            </a:r>
+          </a:p>
+          <a:p>
+            <a:pPr algn="l"/>
+            <a:r>
+              <a:rPr sz="2000" b="0">
+                <a:solidFill>
+                  <a:srgbClr val="262626"/>
+                </a:solidFill>
+                <a:latin typeface="メイリオ"/>
+              </a:rPr>
+              <a:t>2. Web Service を新規作成</a:t>
+            </a:r>
+          </a:p>
+          <a:p>
+            <a:pPr algn="l"/>
+            <a:r>
+              <a:rPr sz="2000" b="0">
+                <a:solidFill>
+                  <a:srgbClr val="262626"/>
+                </a:solidFill>
+                <a:latin typeface="メイリオ"/>
+              </a:rPr>
+              <a:t/>
+            </a:r>
+          </a:p>
+          <a:p>
+            <a:pPr algn="l"/>
+            <a:r>
+              <a:rPr sz="2000" b="0">
+                <a:solidFill>
+                  <a:srgbClr val="262626"/>
+                </a:solidFill>
+                <a:latin typeface="メイリオ"/>
+              </a:rPr>
+              <a:t>・New → Web Service</a:t>
+            </a:r>
+          </a:p>
+          <a:p>
+            <a:pPr algn="l"/>
+            <a:r>
+              <a:rPr sz="2000" b="0">
+                <a:solidFill>
+                  <a:srgbClr val="262626"/>
+                </a:solidFill>
+                <a:latin typeface="メイリオ"/>
+              </a:rPr>
+              <a:t>・GitHub リポジトリ masauehr/jma-mcp-remote を接続</a:t>
+            </a:r>
+          </a:p>
+          <a:p>
+            <a:pPr algn="l"/>
+            <a:r>
+              <a:rPr sz="2000" b="0">
+                <a:solidFill>
+                  <a:srgbClr val="262626"/>
+                </a:solidFill>
+                <a:latin typeface="メイリオ"/>
+              </a:rPr>
+              <a:t/>
+            </a:r>
+          </a:p>
+          <a:p>
+            <a:pPr algn="l"/>
+            <a:r>
+              <a:rPr sz="2000" b="0">
+                <a:solidFill>
+                  <a:srgbClr val="262626"/>
+                </a:solidFill>
+                <a:latin typeface="メイリオ"/>
+              </a:rPr>
+              <a:t>3. ビルド・起動設定</a:t>
+            </a:r>
+          </a:p>
+          <a:p>
+            <a:pPr algn="l"/>
+            <a:r>
+              <a:rPr sz="2000" b="0">
+                <a:solidFill>
+                  <a:srgbClr val="262626"/>
+                </a:solidFill>
+                <a:latin typeface="メイリオ"/>
+              </a:rPr>
+              <a:t/>
+            </a:r>
+          </a:p>
+          <a:p>
+            <a:pPr algn="l"/>
+            <a:r>
+              <a:rPr sz="2000" b="0">
+                <a:solidFill>
+                  <a:srgbClr val="262626"/>
+                </a:solidFill>
+                <a:latin typeface="メイリオ"/>
+              </a:rPr>
+              <a:t/>
+            </a:r>
+          </a:p>
+          <a:p>
+            <a:pPr algn="l"/>
+            <a:r>
+              <a:rPr sz="2000" b="0">
+                <a:solidFill>
+                  <a:srgbClr val="262626"/>
+                </a:solidFill>
+                <a:latin typeface="メイリオ"/>
+              </a:rPr>
+              <a:t>4. デプロイ完了後の確認</a:t>
+            </a:r>
+          </a:p>
+          <a:p>
+            <a:pPr algn="l"/>
+            <a:r>
+              <a:rPr sz="2000" b="0">
+                <a:solidFill>
+                  <a:srgbClr val="262626"/>
+                </a:solidFill>
+                <a:latin typeface="メイリオ"/>
+              </a:rPr>
+              <a:t/>
+            </a:r>
+          </a:p>
+          <a:p>
+            <a:pPr algn="l"/>
+            <a:r>
+              <a:rPr sz="2000" b="0">
+                <a:solidFill>
+                  <a:srgbClr val="262626"/>
+                </a:solidFill>
+                <a:latin typeface="メイリオ"/>
+              </a:rPr>
+              <a:t>Render のログに以下が表示されれば起動成功：</a:t>
+            </a:r>
+          </a:p>
+        </p:txBody>
+      </p:sp>
+      <p:graphicFrame>
+        <p:nvGraphicFramePr>
+          <p:cNvPr id="5" name="Table 4"/>
+          <p:cNvGraphicFramePr>
+            <a:graphicFrameLocks noGrp="1"/>
+          </p:cNvGraphicFramePr>
+          <p:nvPr/>
+        </p:nvGraphicFramePr>
+        <p:xfrm>
+          <a:off x="731520" y="6271260"/>
+          <a:ext cx="10698480" cy="640080"/>
+        </p:xfrm>
+        <a:graphic>
+          <a:graphicData uri="http://schemas.openxmlformats.org/drawingml/2006/table">
+            <a:tbl>
+              <a:tblPr firstRow="1">
+                <a:tableStyleId>{5C22544A-7EE6-4342-B048-85BDC9FD1C3A}</a:tableStyleId>
+              </a:tblPr>
+              <a:tblGrid>
+                <a:gridCol w="5349240"/>
+                <a:gridCol w="5349240"/>
+              </a:tblGrid>
+              <a:tr h="160020">
+                <a:tc>
+                  <a:txBody>
+                    <a:bodyPr/>
+                    <a:lstStyle/>
+                    <a:p>
+                      <a:r>
+                        <a:rPr sz="1400" b="1">
+                          <a:solidFill>
+                            <a:srgbClr val="FFFFFF"/>
+                          </a:solidFill>
+                          <a:latin typeface="メイリオ"/>
+                        </a:rPr>
+                        <a:t>項目</a:t>
+                      </a:r>
+                    </a:p>
+                  </a:txBody>
+                  <a:tcPr anchor="ctr" marL="73152" marR="73152" marT="27432" marB="27432">
+                    <a:solidFill>
+                      <a:srgbClr val="1F497D"/>
+                    </a:solidFill>
+                  </a:tcPr>
+                </a:tc>
+                <a:tc>
+                  <a:txBody>
+                    <a:bodyPr/>
+                    <a:lstStyle/>
+                    <a:p>
+                      <a:r>
+                        <a:rPr sz="1400" b="1">
+                          <a:solidFill>
+                            <a:srgbClr val="FFFFFF"/>
+                          </a:solidFill>
+                          <a:latin typeface="メイリオ"/>
+                        </a:rPr>
+                        <a:t>設定値</a:t>
+                      </a:r>
+                    </a:p>
+                  </a:txBody>
+                  <a:tcPr anchor="ctr" marL="73152" marR="73152" marT="27432" marB="27432">
+                    <a:solidFill>
+                      <a:srgbClr val="1F497D"/>
+                    </a:solidFill>
+                  </a:tcPr>
+                </a:tc>
+              </a:tr>
+              <a:tr h="160020">
+                <a:tc>
+                  <a:txBody>
+                    <a:bodyPr/>
+                    <a:lstStyle/>
+                    <a:p>
+                      <a:r>
+                        <a:rPr sz="1400" b="0">
+                          <a:solidFill>
+                            <a:srgbClr val="262626"/>
+                          </a:solidFill>
+                          <a:latin typeface="メイリオ"/>
+                        </a:rPr>
+                        <a:t>Build Command</a:t>
+                      </a:r>
+                    </a:p>
+                  </a:txBody>
+                  <a:tcPr anchor="ctr" marL="73152" marR="73152" marT="27432" marB="27432">
+                    <a:solidFill>
+                      <a:srgbClr val="FFFFFF"/>
+                    </a:solidFill>
+                  </a:tcPr>
+                </a:tc>
+                <a:tc>
+                  <a:txBody>
+                    <a:bodyPr/>
+                    <a:lstStyle/>
+                    <a:p>
+                      <a:r>
+                        <a:rPr sz="1400" b="0">
+                          <a:solidFill>
+                            <a:srgbClr val="262626"/>
+                          </a:solidFill>
+                          <a:latin typeface="メイリオ"/>
+                        </a:rPr>
+                        <a:t>pip install -r requirements.txt</a:t>
+                      </a:r>
+                    </a:p>
+                  </a:txBody>
+                  <a:tcPr anchor="ctr" marL="73152" marR="73152" marT="27432" marB="27432">
+                    <a:solidFill>
+                      <a:srgbClr val="FFFFFF"/>
+                    </a:solidFill>
+                  </a:tcPr>
+                </a:tc>
+              </a:tr>
+              <a:tr h="160020">
+                <a:tc>
+                  <a:txBody>
+                    <a:bodyPr/>
+                    <a:lstStyle/>
+                    <a:p>
+                      <a:r>
+                        <a:rPr sz="1400" b="0">
+                          <a:solidFill>
+                            <a:srgbClr val="262626"/>
+                          </a:solidFill>
+                          <a:latin typeface="メイリオ"/>
+                        </a:rPr>
+                        <a:t>Start Command</a:t>
+                      </a:r>
+                    </a:p>
+                  </a:txBody>
+                  <a:tcPr anchor="ctr" marL="73152" marR="73152" marT="27432" marB="27432">
+                    <a:solidFill>
+                      <a:srgbClr val="FFFFFF"/>
+                    </a:solidFill>
+                  </a:tcPr>
+                </a:tc>
+                <a:tc>
+                  <a:txBody>
+                    <a:bodyPr/>
+                    <a:lstStyle/>
+                    <a:p>
+                      <a:r>
+                        <a:rPr sz="1400" b="0">
+                          <a:solidFill>
+                            <a:srgbClr val="262626"/>
+                          </a:solidFill>
+                          <a:latin typeface="メイリオ"/>
+                        </a:rPr>
+                        <a:t>python server.py</a:t>
+                      </a:r>
+                    </a:p>
+                  </a:txBody>
+                  <a:tcPr anchor="ctr" marL="73152" marR="73152" marT="27432" marB="27432">
+                    <a:solidFill>
+                      <a:srgbClr val="FFFFFF"/>
+                    </a:solidFill>
+                  </a:tcPr>
+                </a:tc>
+              </a:tr>
+              <a:tr h="160020">
+                <a:tc>
+                  <a:txBody>
+                    <a:bodyPr/>
+                    <a:lstStyle/>
+                    <a:p>
+                      <a:r>
+                        <a:rPr sz="1400" b="0">
+                          <a:solidFill>
+                            <a:srgbClr val="262626"/>
+                          </a:solidFill>
+                          <a:latin typeface="メイリオ"/>
+                        </a:rPr>
+                        <a:t>Root Directory</a:t>
+                      </a:r>
+                    </a:p>
+                  </a:txBody>
+                  <a:tcPr anchor="ctr" marL="73152" marR="73152" marT="27432" marB="27432">
+                    <a:solidFill>
+                      <a:srgbClr val="FFFFFF"/>
+                    </a:solidFill>
+                  </a:tcPr>
+                </a:tc>
+                <a:tc>
+                  <a:txBody>
+                    <a:bodyPr/>
+                    <a:lstStyle/>
+                    <a:p>
+                      <a:r>
+                        <a:rPr sz="1400" b="0">
+                          <a:solidFill>
+                            <a:srgbClr val="262626"/>
+                          </a:solidFill>
+                          <a:latin typeface="メイリオ"/>
+                        </a:rPr>
+                        <a:t>（空欄）</a:t>
+                      </a:r>
+                    </a:p>
+                  </a:txBody>
+                  <a:tcPr anchor="ctr" marL="73152" marR="73152" marT="27432" marB="27432">
+                    <a:solidFill>
+                      <a:srgbClr val="FFFFFF"/>
+                    </a:solidFill>
+                  </a:tcPr>
+                </a:tc>
+              </a:tr>
+            </a:tbl>
+          </a:graphicData>
+        </a:graphic>
+      </p:graphicFrame>
+      <p:sp>
+        <p:nvSpPr>
+          <p:cNvPr id="6" name="Rectangle 5"/>
+          <p:cNvSpPr/>
+          <p:nvPr/>
+        </p:nvSpPr>
+        <p:spPr>
+          <a:xfrm>
+            <a:off x="731520" y="7094220"/>
+            <a:ext cx="10698480" cy="274320"/>
+          </a:xfrm>
+          <a:prstGeom prst="rect">
+            <a:avLst/>
+          </a:prstGeom>
+          <a:solidFill>
+            <a:srgbClr val="E8E8E8"/>
+          </a:solidFill>
+          <a:ln>
+            <a:noFill/>
+          </a:ln>
+        </p:spPr>
+        <p:style>
+          <a:lnRef idx="1">
+            <a:schemeClr val="accent1"/>
+          </a:lnRef>
+          <a:fillRef idx="3">
+            <a:schemeClr val="accent1"/>
+          </a:fillRef>
+          <a:effectRef idx="2">
+            <a:schemeClr val="accent1"/>
+          </a:effectRef>
+          <a:fontRef idx="minor">
+            <a:schemeClr val="lt1"/>
+          </a:fontRef>
+        </p:style>
+        <p:txBody>
+          <a:bodyPr rtlCol="0" anchor="ctr"/>
+          <a:lstStyle/>
+          <a:p>
+            <a:pPr algn="ctr"/>
+          </a:p>
+        </p:txBody>
+      </p:sp>
+      <p:sp>
+        <p:nvSpPr>
+          <p:cNvPr id="7" name="Rectangle 6"/>
+          <p:cNvSpPr/>
+          <p:nvPr/>
+        </p:nvSpPr>
+        <p:spPr>
+          <a:xfrm>
+            <a:off x="731520" y="7094220"/>
+            <a:ext cx="54864" cy="274320"/>
+          </a:xfrm>
+          <a:prstGeom prst="rect">
+            <a:avLst/>
+          </a:prstGeom>
+          <a:solidFill>
+            <a:srgbClr val="1F497D"/>
+          </a:solidFill>
+          <a:ln>
+            <a:noFill/>
+          </a:ln>
+        </p:spPr>
+        <p:style>
+          <a:lnRef idx="1">
+            <a:schemeClr val="accent1"/>
+          </a:lnRef>
+          <a:fillRef idx="3">
+            <a:schemeClr val="accent1"/>
+          </a:fillRef>
+          <a:effectRef idx="2">
+            <a:schemeClr val="accent1"/>
+          </a:effectRef>
+          <a:fontRef idx="minor">
+            <a:schemeClr val="lt1"/>
+          </a:fontRef>
+        </p:style>
+        <p:txBody>
+          <a:bodyPr rtlCol="0" anchor="ctr"/>
+          <a:lstStyle/>
+          <a:p>
+            <a:pPr algn="ctr"/>
+          </a:p>
+        </p:txBody>
+      </p:sp>
+      <p:sp>
+        <p:nvSpPr>
+          <p:cNvPr id="8" name="TextBox 7"/>
+          <p:cNvSpPr txBox="1"/>
+          <p:nvPr/>
+        </p:nvSpPr>
+        <p:spPr>
+          <a:xfrm>
+            <a:off x="1005840" y="7185660"/>
+            <a:ext cx="10058400" cy="91440"/>
+          </a:xfrm>
+          <a:prstGeom prst="rect">
+            <a:avLst/>
+          </a:prstGeom>
+          <a:noFill/>
+        </p:spPr>
+        <p:txBody>
+          <a:bodyPr wrap="square">
+            <a:spAutoFit/>
+          </a:bodyPr>
+          <a:lstStyle/>
+          <a:p>
+            <a:pPr algn="l"/>
+            <a:r>
+              <a:rPr sz="1300" b="0">
+                <a:solidFill>
+                  <a:srgbClr val="262626"/>
+                </a:solidFill>
+                <a:latin typeface="Courier New"/>
+              </a:rPr>
+              <a:t>Uvicorn running on http://0.0.0.0:XXXXX</a:t>
+            </a:r>
+          </a:p>
+        </p:txBody>
+      </p:sp>
+      <p:sp>
+        <p:nvSpPr>
+          <p:cNvPr id="9" name="Rectangle 8"/>
+          <p:cNvSpPr/>
+          <p:nvPr/>
+        </p:nvSpPr>
+        <p:spPr>
+          <a:xfrm>
+            <a:off x="0" y="6583680"/>
+            <a:ext cx="12188952" cy="274320"/>
+          </a:xfrm>
+          <a:prstGeom prst="rect">
+            <a:avLst/>
+          </a:prstGeom>
+          <a:solidFill>
+            <a:srgbClr val="1F497D"/>
+          </a:solidFill>
+          <a:ln>
+            <a:noFill/>
+          </a:ln>
+        </p:spPr>
+        <p:style>
+          <a:lnRef idx="1">
+            <a:schemeClr val="accent1"/>
+          </a:lnRef>
+          <a:fillRef idx="3">
+            <a:schemeClr val="accent1"/>
+          </a:fillRef>
+          <a:effectRef idx="2">
+            <a:schemeClr val="accent1"/>
+          </a:effectRef>
+          <a:fontRef idx="minor">
+            <a:schemeClr val="lt1"/>
+          </a:fontRef>
+        </p:style>
+        <p:txBody>
+          <a:bodyPr rtlCol="0" anchor="ctr"/>
+          <a:lstStyle/>
+          <a:p>
+            <a:pPr algn="ctr"/>
+          </a:p>
+        </p:txBody>
+      </p:sp>
+    </p:spTree>
+  </p:cSld>
+  <p:clrMapOvr>
+    <a:masterClrMapping/>
+  </p:clrMapOvr>
+</p:sld>
+</file>
+
+<file path=ppt/slides/slide15.xml><?xml version="1.0" encoding="utf-8"?>
+<p:sld xmlns:a="http://schemas.openxmlformats.org/drawingml/2006/main" xmlns:p="http://schemas.openxmlformats.org/presentationml/2006/main" xmlns:r="http://schemas.openxmlformats.org/officeDocument/2006/relationships">
+  <p:cSld>
+    <p:bg>
+      <p:bgPr>
+        <a:solidFill>
+          <a:srgbClr val="F2F2F2"/>
+        </a:solidFill>
+        <a:effectLst/>
+      </p:bgPr>
+    </p:bg>
+    <p:spTree>
+      <p:nvGrpSpPr>
+        <p:cNvPr id="1" name=""/>
+        <p:cNvGrpSpPr/>
+        <p:nvPr/>
+      </p:nvGrpSpPr>
+      <p:grpSpPr/>
+      <p:sp>
+        <p:nvSpPr>
+          <p:cNvPr id="2" name="Rectangle 1"/>
+          <p:cNvSpPr/>
+          <p:nvPr/>
+        </p:nvSpPr>
+        <p:spPr>
+          <a:xfrm>
+            <a:off x="0" y="0"/>
+            <a:ext cx="12188952" cy="1097280"/>
+          </a:xfrm>
+          <a:prstGeom prst="rect">
+            <a:avLst/>
+          </a:prstGeom>
+          <a:solidFill>
+            <a:srgbClr val="1F497D"/>
+          </a:solidFill>
+          <a:ln>
+            <a:noFill/>
+          </a:ln>
+        </p:spPr>
+        <p:style>
+          <a:lnRef idx="1">
+            <a:schemeClr val="accent1"/>
+          </a:lnRef>
+          <a:fillRef idx="3">
+            <a:schemeClr val="accent1"/>
+          </a:fillRef>
+          <a:effectRef idx="2">
+            <a:schemeClr val="accent1"/>
+          </a:effectRef>
+          <a:fontRef idx="minor">
+            <a:schemeClr val="lt1"/>
+          </a:fontRef>
+        </p:style>
+        <p:txBody>
+          <a:bodyPr rtlCol="0" anchor="ctr"/>
+          <a:lstStyle/>
+          <a:p>
+            <a:pPr algn="ctr"/>
+          </a:p>
+        </p:txBody>
+      </p:sp>
+      <p:sp>
+        <p:nvSpPr>
+          <p:cNvPr id="3" name="TextBox 2"/>
+          <p:cNvSpPr txBox="1"/>
+          <p:nvPr/>
+        </p:nvSpPr>
+        <p:spPr>
+          <a:xfrm>
+            <a:off x="457200" y="182880"/>
+            <a:ext cx="10972800" cy="731520"/>
+          </a:xfrm>
+          <a:prstGeom prst="rect">
+            <a:avLst/>
+          </a:prstGeom>
+          <a:noFill/>
+        </p:spPr>
+        <p:txBody>
+          <a:bodyPr wrap="square">
+            <a:spAutoFit/>
+          </a:bodyPr>
+          <a:lstStyle/>
+          <a:p>
+            <a:pPr algn="l"/>
+            <a:r>
+              <a:rPr sz="3200" b="1">
+                <a:solidFill>
+                  <a:srgbClr val="FFFFFF"/>
+                </a:solidFill>
+                <a:latin typeface="メイリオ"/>
+              </a:rPr>
+              <a:t>Claude.ai への接続手順</a:t>
+            </a:r>
+          </a:p>
+        </p:txBody>
+      </p:sp>
+      <p:sp>
+        <p:nvSpPr>
+          <p:cNvPr id="4" name="TextBox 3"/>
+          <p:cNvSpPr txBox="1"/>
+          <p:nvPr/>
+        </p:nvSpPr>
+        <p:spPr>
+          <a:xfrm>
+            <a:off x="731520" y="1371600"/>
+            <a:ext cx="10698480" cy="4264660"/>
+          </a:xfrm>
+          <a:prstGeom prst="rect">
+            <a:avLst/>
+          </a:prstGeom>
+          <a:noFill/>
+        </p:spPr>
+        <p:txBody>
+          <a:bodyPr wrap="square">
+            <a:normAutofit/>
+          </a:bodyPr>
+          <a:lstStyle/>
+          <a:p>
+            <a:pPr algn="l"/>
+            <a:r>
+              <a:rPr sz="2000" b="0">
+                <a:solidFill>
+                  <a:srgbClr val="262626"/>
+                </a:solidFill>
+                <a:latin typeface="メイリオ"/>
+              </a:rPr>
+              <a:t>Web版・デスクトップアプリ・iPhone版 共通</a:t>
+            </a:r>
+          </a:p>
+          <a:p>
+            <a:pPr algn="l"/>
+            <a:r>
+              <a:rPr sz="2000" b="0">
+                <a:solidFill>
+                  <a:srgbClr val="262626"/>
+                </a:solidFill>
+                <a:latin typeface="メイリオ"/>
+              </a:rPr>
+              <a:t/>
+            </a:r>
+          </a:p>
+          <a:p>
+            <a:pPr algn="l"/>
+            <a:r>
+              <a:rPr sz="2000" b="0">
+                <a:solidFill>
+                  <a:srgbClr val="262626"/>
+                </a:solidFill>
+                <a:latin typeface="メイリオ"/>
+              </a:rPr>
+              <a:t>1. 設定 → コネクタ</a:t>
+            </a:r>
+          </a:p>
+          <a:p>
+            <a:pPr algn="l"/>
+            <a:r>
+              <a:rPr sz="2000" b="0">
+                <a:solidFill>
+                  <a:srgbClr val="262626"/>
+                </a:solidFill>
+                <a:latin typeface="メイリオ"/>
+              </a:rPr>
+              <a:t>2. カスタムコネクタを追加</a:t>
+            </a:r>
+          </a:p>
+          <a:p>
+            <a:pPr algn="l"/>
+            <a:r>
+              <a:rPr sz="2000" b="0">
+                <a:solidFill>
+                  <a:srgbClr val="262626"/>
+                </a:solidFill>
+                <a:latin typeface="メイリオ"/>
+              </a:rPr>
+              <a:t>3. 以下を入力：</a:t>
+            </a:r>
+          </a:p>
+          <a:p>
+            <a:pPr algn="l"/>
+            <a:r>
+              <a:rPr sz="2000" b="0">
+                <a:solidFill>
+                  <a:srgbClr val="262626"/>
+                </a:solidFill>
+                <a:latin typeface="メイリオ"/>
+              </a:rPr>
+              <a:t>・名前: jma-mcp-render（任意）</a:t>
+            </a:r>
+          </a:p>
+          <a:p>
+            <a:pPr algn="l"/>
+            <a:r>
+              <a:rPr sz="2000" b="0">
+                <a:solidFill>
+                  <a:srgbClr val="262626"/>
+                </a:solidFill>
+                <a:latin typeface="メイリオ"/>
+              </a:rPr>
+              <a:t>・URL: https://jma-mcp-remote.onrender.com/sse</a:t>
+            </a:r>
+          </a:p>
+          <a:p>
+            <a:pPr algn="l"/>
+            <a:r>
+              <a:rPr sz="2000" b="0">
+                <a:solidFill>
+                  <a:srgbClr val="262626"/>
+                </a:solidFill>
+                <a:latin typeface="メイリオ"/>
+              </a:rPr>
+              <a:t>4. 追加 → 接続確認</a:t>
+            </a:r>
+          </a:p>
+          <a:p>
+            <a:pPr algn="l"/>
+            <a:r>
+              <a:rPr sz="2000" b="0">
+                <a:solidFill>
+                  <a:srgbClr val="262626"/>
+                </a:solidFill>
+                <a:latin typeface="メイリオ"/>
+              </a:rPr>
+              <a:t/>
+            </a:r>
+          </a:p>
+          <a:p>
+            <a:pPr algn="l"/>
+            <a:r>
+              <a:rPr sz="2000" b="0">
+                <a:solidFill>
+                  <a:srgbClr val="262626"/>
+                </a:solidFill>
+                <a:latin typeface="メイリオ"/>
+              </a:rPr>
+              <a:t/>
+            </a:r>
+          </a:p>
+          <a:p>
+            <a:pPr algn="l"/>
+            <a:r>
+              <a:rPr sz="2000" b="0">
+                <a:solidFill>
+                  <a:srgbClr val="262626"/>
+                </a:solidFill>
+                <a:latin typeface="メイリオ"/>
+              </a:rPr>
+              <a:t>Claude Code から使う場合（jma_mcp_remote/ 内のみ）</a:t>
+            </a:r>
+          </a:p>
+          <a:p>
+            <a:pPr algn="l"/>
+            <a:r>
+              <a:rPr sz="2000" b="0">
+                <a:solidFill>
+                  <a:srgbClr val="262626"/>
+                </a:solidFill>
+                <a:latin typeface="メイリオ"/>
+              </a:rPr>
+              <a:t/>
+            </a:r>
+          </a:p>
+          <a:p>
+            <a:pPr algn="l"/>
+            <a:r>
+              <a:rPr sz="2000" b="0">
+                <a:solidFill>
+                  <a:srgbClr val="262626"/>
+                </a:solidFill>
+                <a:latin typeface="メイリオ"/>
+              </a:rPr>
+              <a:t>jma_mcp_remote/.mcp.json（gitignore済み）に記載済み：</a:t>
+            </a:r>
+          </a:p>
+        </p:txBody>
+      </p:sp>
+      <p:sp>
+        <p:nvSpPr>
+          <p:cNvPr id="5" name="Rectangle 4"/>
+          <p:cNvSpPr/>
+          <p:nvPr/>
+        </p:nvSpPr>
+        <p:spPr>
+          <a:xfrm>
+            <a:off x="731520" y="5636260"/>
+            <a:ext cx="10698480" cy="274320"/>
+          </a:xfrm>
+          <a:prstGeom prst="rect">
+            <a:avLst/>
+          </a:prstGeom>
+          <a:solidFill>
+            <a:srgbClr val="E8E8E8"/>
+          </a:solidFill>
+          <a:ln>
+            <a:noFill/>
+          </a:ln>
+        </p:spPr>
+        <p:style>
+          <a:lnRef idx="1">
+            <a:schemeClr val="accent1"/>
+          </a:lnRef>
+          <a:fillRef idx="3">
+            <a:schemeClr val="accent1"/>
+          </a:fillRef>
+          <a:effectRef idx="2">
+            <a:schemeClr val="accent1"/>
+          </a:effectRef>
+          <a:fontRef idx="minor">
+            <a:schemeClr val="lt1"/>
+          </a:fontRef>
+        </p:style>
+        <p:txBody>
+          <a:bodyPr rtlCol="0" anchor="ctr"/>
+          <a:lstStyle/>
+          <a:p>
+            <a:pPr algn="ctr"/>
+          </a:p>
+        </p:txBody>
+      </p:sp>
+      <p:sp>
+        <p:nvSpPr>
+          <p:cNvPr id="6" name="Rectangle 5"/>
+          <p:cNvSpPr/>
+          <p:nvPr/>
+        </p:nvSpPr>
+        <p:spPr>
+          <a:xfrm>
+            <a:off x="731520" y="5636260"/>
+            <a:ext cx="54864" cy="274320"/>
+          </a:xfrm>
+          <a:prstGeom prst="rect">
+            <a:avLst/>
+          </a:prstGeom>
+          <a:solidFill>
+            <a:srgbClr val="1F497D"/>
+          </a:solidFill>
+          <a:ln>
+            <a:noFill/>
+          </a:ln>
+        </p:spPr>
+        <p:style>
+          <a:lnRef idx="1">
+            <a:schemeClr val="accent1"/>
+          </a:lnRef>
+          <a:fillRef idx="3">
+            <a:schemeClr val="accent1"/>
+          </a:fillRef>
+          <a:effectRef idx="2">
+            <a:schemeClr val="accent1"/>
+          </a:effectRef>
+          <a:fontRef idx="minor">
+            <a:schemeClr val="lt1"/>
+          </a:fontRef>
+        </p:style>
+        <p:txBody>
+          <a:bodyPr rtlCol="0" anchor="ctr"/>
+          <a:lstStyle/>
+          <a:p>
+            <a:pPr algn="ctr"/>
+          </a:p>
+        </p:txBody>
+      </p:sp>
+      <p:sp>
+        <p:nvSpPr>
+          <p:cNvPr id="7" name="TextBox 6"/>
+          <p:cNvSpPr txBox="1"/>
+          <p:nvPr/>
+        </p:nvSpPr>
+        <p:spPr>
+          <a:xfrm>
+            <a:off x="1005840" y="5727700"/>
+            <a:ext cx="10058400" cy="91440"/>
+          </a:xfrm>
+          <a:prstGeom prst="rect">
+            <a:avLst/>
+          </a:prstGeom>
+          <a:noFill/>
+        </p:spPr>
+        <p:txBody>
+          <a:bodyPr wrap="square">
+            <a:spAutoFit/>
+          </a:bodyPr>
+          <a:lstStyle/>
+          <a:p>
+            <a:pPr algn="l"/>
+            <a:r>
+              <a:rPr sz="1300" b="0">
+                <a:solidFill>
+                  <a:srgbClr val="262626"/>
+                </a:solidFill>
+                <a:latin typeface="Courier New"/>
+              </a:rPr>
+              <a:t>{</a:t>
+            </a:r>
+          </a:p>
+          <a:p>
+            <a:pPr algn="l"/>
+            <a:r>
+              <a:rPr sz="1300" b="0">
+                <a:solidFill>
+                  <a:srgbClr val="262626"/>
+                </a:solidFill>
+                <a:latin typeface="Courier New"/>
+              </a:rPr>
+              <a:t>  "mcpServers": {</a:t>
+            </a:r>
+          </a:p>
+          <a:p>
+            <a:pPr algn="l"/>
+            <a:r>
+              <a:rPr sz="1300" b="0">
+                <a:solidFill>
+                  <a:srgbClr val="262626"/>
+                </a:solidFill>
+                <a:latin typeface="Courier New"/>
+              </a:rPr>
+              <a:t>    "jma-remote": {</a:t>
+            </a:r>
+          </a:p>
+          <a:p>
+            <a:pPr algn="l"/>
+            <a:r>
+              <a:rPr sz="1300" b="0">
+                <a:solidFill>
+                  <a:srgbClr val="262626"/>
+                </a:solidFill>
+                <a:latin typeface="Courier New"/>
+              </a:rPr>
+              <a:t>      "url": "https://jma-mcp-remote.onrender.com/sse"</a:t>
+            </a:r>
+          </a:p>
+          <a:p>
+            <a:pPr algn="l"/>
+            <a:r>
+              <a:rPr sz="1300" b="0">
+                <a:solidFill>
+                  <a:srgbClr val="262626"/>
+                </a:solidFill>
+                <a:latin typeface="Courier New"/>
+              </a:rPr>
+              <a:t>    }</a:t>
+            </a:r>
+          </a:p>
+          <a:p>
+            <a:pPr algn="l"/>
+            <a:r>
+              <a:rPr sz="1300" b="0">
+                <a:solidFill>
+                  <a:srgbClr val="262626"/>
+                </a:solidFill>
+                <a:latin typeface="Courier New"/>
+              </a:rPr>
+              <a:t>  }</a:t>
+            </a:r>
+          </a:p>
+          <a:p>
+            <a:pPr algn="l"/>
+            <a:r>
+              <a:rPr sz="1300" b="0">
+                <a:solidFill>
+                  <a:srgbClr val="262626"/>
+                </a:solidFill>
+                <a:latin typeface="Courier New"/>
+              </a:rPr>
+              <a:t>}</a:t>
+            </a:r>
+          </a:p>
+        </p:txBody>
+      </p:sp>
+      <p:sp>
+        <p:nvSpPr>
+          <p:cNvPr id="8" name="Rectangle 7"/>
+          <p:cNvSpPr/>
+          <p:nvPr/>
+        </p:nvSpPr>
+        <p:spPr>
+          <a:xfrm>
+            <a:off x="731520" y="5486400"/>
+            <a:ext cx="10698480" cy="822960"/>
+          </a:xfrm>
+          <a:prstGeom prst="rect">
+            <a:avLst/>
+          </a:prstGeom>
+          <a:solidFill>
+            <a:srgbClr val="F2F2F2"/>
+          </a:solidFill>
+          <a:ln>
+            <a:noFill/>
+          </a:ln>
+        </p:spPr>
+        <p:style>
+          <a:lnRef idx="1">
+            <a:schemeClr val="accent1"/>
+          </a:lnRef>
+          <a:fillRef idx="3">
+            <a:schemeClr val="accent1"/>
+          </a:fillRef>
+          <a:effectRef idx="2">
+            <a:schemeClr val="accent1"/>
+          </a:effectRef>
+          <a:fontRef idx="minor">
+            <a:schemeClr val="lt1"/>
+          </a:fontRef>
+        </p:style>
+        <p:txBody>
+          <a:bodyPr rtlCol="0" anchor="ctr"/>
+          <a:lstStyle/>
+          <a:p>
+            <a:pPr algn="ctr"/>
+          </a:p>
+        </p:txBody>
+      </p:sp>
+      <p:sp>
+        <p:nvSpPr>
+          <p:cNvPr id="9" name="Rectangle 8"/>
+          <p:cNvSpPr/>
+          <p:nvPr/>
+        </p:nvSpPr>
+        <p:spPr>
+          <a:xfrm>
+            <a:off x="731520" y="5486400"/>
+            <a:ext cx="54864" cy="822960"/>
+          </a:xfrm>
+          <a:prstGeom prst="rect">
+            <a:avLst/>
+          </a:prstGeom>
+          <a:solidFill>
+            <a:srgbClr val="1F497D"/>
+          </a:solidFill>
+          <a:ln>
+            <a:noFill/>
+          </a:ln>
+        </p:spPr>
+        <p:style>
+          <a:lnRef idx="1">
+            <a:schemeClr val="accent1"/>
+          </a:lnRef>
+          <a:fillRef idx="3">
+            <a:schemeClr val="accent1"/>
+          </a:fillRef>
+          <a:effectRef idx="2">
+            <a:schemeClr val="accent1"/>
+          </a:effectRef>
+          <a:fontRef idx="minor">
+            <a:schemeClr val="lt1"/>
+          </a:fontRef>
+        </p:style>
+        <p:txBody>
+          <a:bodyPr rtlCol="0" anchor="ctr"/>
+          <a:lstStyle/>
+          <a:p>
+            <a:pPr algn="ctr"/>
+          </a:p>
+        </p:txBody>
+      </p:sp>
+      <p:sp>
+        <p:nvSpPr>
+          <p:cNvPr id="10" name="TextBox 9"/>
+          <p:cNvSpPr txBox="1"/>
+          <p:nvPr/>
+        </p:nvSpPr>
+        <p:spPr>
+          <a:xfrm>
+            <a:off x="960120" y="5559552"/>
+            <a:ext cx="10332720" cy="676656"/>
+          </a:xfrm>
+          <a:prstGeom prst="rect">
+            <a:avLst/>
+          </a:prstGeom>
+          <a:noFill/>
+        </p:spPr>
+        <p:txBody>
+          <a:bodyPr wrap="square">
+            <a:normAutofit/>
+          </a:bodyPr>
+          <a:lstStyle/>
+          <a:p>
+            <a:pPr algn="l"/>
+            <a:r>
+              <a:rPr sz="1600" b="0">
+                <a:solidFill>
+                  <a:srgbClr val="1F497D"/>
+                </a:solidFill>
+                <a:latin typeface="メイリオ"/>
+              </a:rPr>
+              <a:t>Web版で登録した設定はデスクトップアプリ・iPhone版にも自動共有される。 同じURLを再登録しようとすると「A server with this URL already exists.」エラーが出るが、これは登録済みのため問題なし。 iPhone版はコネクタをONにすることで動作する（2026-04-23 動作確認済み）。</a:t>
+            </a:r>
+          </a:p>
+        </p:txBody>
+      </p:sp>
+      <p:sp>
+        <p:nvSpPr>
+          <p:cNvPr id="11" name="Rectangle 10"/>
+          <p:cNvSpPr/>
+          <p:nvPr/>
+        </p:nvSpPr>
+        <p:spPr>
+          <a:xfrm>
+            <a:off x="0" y="6583680"/>
+            <a:ext cx="12188952" cy="274320"/>
+          </a:xfrm>
+          <a:prstGeom prst="rect">
+            <a:avLst/>
+          </a:prstGeom>
+          <a:solidFill>
+            <a:srgbClr val="1F497D"/>
+          </a:solidFill>
+          <a:ln>
+            <a:noFill/>
+          </a:ln>
+        </p:spPr>
+        <p:style>
+          <a:lnRef idx="1">
+            <a:schemeClr val="accent1"/>
+          </a:lnRef>
+          <a:fillRef idx="3">
+            <a:schemeClr val="accent1"/>
+          </a:fillRef>
+          <a:effectRef idx="2">
+            <a:schemeClr val="accent1"/>
+          </a:effectRef>
+          <a:fontRef idx="minor">
+            <a:schemeClr val="lt1"/>
+          </a:fontRef>
+        </p:style>
+        <p:txBody>
+          <a:bodyPr rtlCol="0" anchor="ctr"/>
+          <a:lstStyle/>
+          <a:p>
+            <a:pPr algn="ctr"/>
+          </a:p>
+        </p:txBody>
+      </p:sp>
+    </p:spTree>
+  </p:cSld>
+  <p:clrMapOvr>
+    <a:masterClrMapping/>
+  </p:clrMapOvr>
+</p:sld>
+</file>
+
+<file path=ppt/slides/slide16.xml><?xml version="1.0" encoding="utf-8"?>
+<p:sld xmlns:a="http://schemas.openxmlformats.org/drawingml/2006/main" xmlns:p="http://schemas.openxmlformats.org/presentationml/2006/main" xmlns:r="http://schemas.openxmlformats.org/officeDocument/2006/relationships">
+  <p:cSld>
+    <p:bg>
+      <p:bgPr>
+        <a:solidFill>
+          <a:srgbClr val="F2F2F2"/>
+        </a:solidFill>
+        <a:effectLst/>
+      </p:bgPr>
+    </p:bg>
+    <p:spTree>
+      <p:nvGrpSpPr>
+        <p:cNvPr id="1" name=""/>
+        <p:cNvGrpSpPr/>
+        <p:nvPr/>
+      </p:nvGrpSpPr>
+      <p:grpSpPr/>
+      <p:sp>
+        <p:nvSpPr>
+          <p:cNvPr id="2" name="Rectangle 1"/>
+          <p:cNvSpPr/>
+          <p:nvPr/>
+        </p:nvSpPr>
+        <p:spPr>
+          <a:xfrm>
+            <a:off x="0" y="0"/>
+            <a:ext cx="12188952" cy="1097280"/>
+          </a:xfrm>
+          <a:prstGeom prst="rect">
+            <a:avLst/>
+          </a:prstGeom>
+          <a:solidFill>
+            <a:srgbClr val="1F497D"/>
+          </a:solidFill>
+          <a:ln>
+            <a:noFill/>
+          </a:ln>
+        </p:spPr>
+        <p:style>
+          <a:lnRef idx="1">
+            <a:schemeClr val="accent1"/>
+          </a:lnRef>
+          <a:fillRef idx="3">
+            <a:schemeClr val="accent1"/>
+          </a:fillRef>
+          <a:effectRef idx="2">
+            <a:schemeClr val="accent1"/>
+          </a:effectRef>
+          <a:fontRef idx="minor">
+            <a:schemeClr val="lt1"/>
+          </a:fontRef>
+        </p:style>
+        <p:txBody>
+          <a:bodyPr rtlCol="0" anchor="ctr"/>
+          <a:lstStyle/>
+          <a:p>
+            <a:pPr algn="ctr"/>
+          </a:p>
+        </p:txBody>
+      </p:sp>
+      <p:sp>
+        <p:nvSpPr>
+          <p:cNvPr id="3" name="TextBox 2"/>
+          <p:cNvSpPr txBox="1"/>
+          <p:nvPr/>
+        </p:nvSpPr>
+        <p:spPr>
+          <a:xfrm>
+            <a:off x="457200" y="182880"/>
+            <a:ext cx="10972800" cy="731520"/>
+          </a:xfrm>
+          <a:prstGeom prst="rect">
+            <a:avLst/>
+          </a:prstGeom>
+          <a:noFill/>
+        </p:spPr>
+        <p:txBody>
+          <a:bodyPr wrap="square">
+            <a:spAutoFit/>
+          </a:bodyPr>
+          <a:lstStyle/>
+          <a:p>
+            <a:pPr algn="l"/>
+            <a:r>
+              <a:rPr sz="3200" b="1">
+                <a:solidFill>
+                  <a:srgbClr val="FFFFFF"/>
+                </a:solidFill>
+                <a:latin typeface="メイリオ"/>
+              </a:rPr>
+              <a:t>出典リンク表示設定（Projectsカスタム指示）</a:t>
+            </a:r>
+          </a:p>
+        </p:txBody>
+      </p:sp>
+      <p:sp>
+        <p:nvSpPr>
+          <p:cNvPr id="4" name="TextBox 3"/>
+          <p:cNvSpPr txBox="1"/>
+          <p:nvPr/>
+        </p:nvSpPr>
+        <p:spPr>
+          <a:xfrm>
+            <a:off x="731520" y="1371600"/>
+            <a:ext cx="10698480" cy="772160"/>
+          </a:xfrm>
+          <a:prstGeom prst="rect">
+            <a:avLst/>
+          </a:prstGeom>
+          <a:noFill/>
+        </p:spPr>
+        <p:txBody>
+          <a:bodyPr wrap="square">
+            <a:normAutofit/>
+          </a:bodyPr>
+          <a:lstStyle/>
+          <a:p>
+            <a:pPr algn="l"/>
+            <a:r>
+              <a:rPr sz="2000" b="0">
+                <a:solidFill>
+                  <a:srgbClr val="262626"/>
+                </a:solidFill>
+                <a:latin typeface="メイリオ"/>
+              </a:rPr>
+              <a:t>Claude.ai では CLAUDE.md が読み込まれないため、出典URLを表示するには Projects のカスタム指示（「手順」欄） に以下を追加する。</a:t>
+            </a:r>
+          </a:p>
+        </p:txBody>
+      </p:sp>
+      <p:sp>
+        <p:nvSpPr>
+          <p:cNvPr id="5" name="Rectangle 4"/>
+          <p:cNvSpPr/>
+          <p:nvPr/>
+        </p:nvSpPr>
+        <p:spPr>
+          <a:xfrm>
+            <a:off x="731520" y="2143760"/>
+            <a:ext cx="10698480" cy="562610"/>
+          </a:xfrm>
+          <a:prstGeom prst="rect">
+            <a:avLst/>
+          </a:prstGeom>
+          <a:solidFill>
+            <a:srgbClr val="E8E8E8"/>
+          </a:solidFill>
+          <a:ln>
+            <a:noFill/>
+          </a:ln>
+        </p:spPr>
+        <p:style>
+          <a:lnRef idx="1">
+            <a:schemeClr val="accent1"/>
+          </a:lnRef>
+          <a:fillRef idx="3">
+            <a:schemeClr val="accent1"/>
+          </a:fillRef>
+          <a:effectRef idx="2">
+            <a:schemeClr val="accent1"/>
+          </a:effectRef>
+          <a:fontRef idx="minor">
+            <a:schemeClr val="lt1"/>
+          </a:fontRef>
+        </p:style>
+        <p:txBody>
+          <a:bodyPr rtlCol="0" anchor="ctr"/>
+          <a:lstStyle/>
+          <a:p>
+            <a:pPr algn="ctr"/>
+          </a:p>
+        </p:txBody>
+      </p:sp>
+      <p:sp>
+        <p:nvSpPr>
+          <p:cNvPr id="6" name="Rectangle 5"/>
+          <p:cNvSpPr/>
+          <p:nvPr/>
+        </p:nvSpPr>
+        <p:spPr>
+          <a:xfrm>
+            <a:off x="731520" y="2143760"/>
+            <a:ext cx="54864" cy="562610"/>
+          </a:xfrm>
+          <a:prstGeom prst="rect">
+            <a:avLst/>
+          </a:prstGeom>
+          <a:solidFill>
+            <a:srgbClr val="1F497D"/>
+          </a:solidFill>
+          <a:ln>
+            <a:noFill/>
+          </a:ln>
+        </p:spPr>
+        <p:style>
+          <a:lnRef idx="1">
+            <a:schemeClr val="accent1"/>
+          </a:lnRef>
+          <a:fillRef idx="3">
+            <a:schemeClr val="accent1"/>
+          </a:fillRef>
+          <a:effectRef idx="2">
+            <a:schemeClr val="accent1"/>
+          </a:effectRef>
+          <a:fontRef idx="minor">
+            <a:schemeClr val="lt1"/>
+          </a:fontRef>
+        </p:style>
+        <p:txBody>
+          <a:bodyPr rtlCol="0" anchor="ctr"/>
+          <a:lstStyle/>
+          <a:p>
+            <a:pPr algn="ctr"/>
+          </a:p>
+        </p:txBody>
+      </p:sp>
+      <p:sp>
+        <p:nvSpPr>
+          <p:cNvPr id="7" name="TextBox 6"/>
+          <p:cNvSpPr txBox="1"/>
+          <p:nvPr/>
+        </p:nvSpPr>
+        <p:spPr>
+          <a:xfrm>
+            <a:off x="1005840" y="2235200"/>
+            <a:ext cx="10058400" cy="379730"/>
+          </a:xfrm>
+          <a:prstGeom prst="rect">
+            <a:avLst/>
+          </a:prstGeom>
+          <a:noFill/>
+        </p:spPr>
+        <p:txBody>
+          <a:bodyPr wrap="square">
+            <a:spAutoFit/>
+          </a:bodyPr>
+          <a:lstStyle/>
+          <a:p>
+            <a:pPr algn="l"/>
+            <a:r>
+              <a:rPr sz="1300" b="0">
+                <a:solidFill>
+                  <a:srgbClr val="262626"/>
+                </a:solidFill>
+                <a:latin typeface="Courier New"/>
+              </a:rPr>
+              <a:t>気象庁MCPサーバー（jma-mcp-renderコネクタ）のツール結果を使って回答する際は、ツール結果の末尾にある「出典: 気象庁 https://...」のURLを必ず末尾にそのまま表示すること。URLを省略・変更しないこと。</a:t>
+            </a:r>
+          </a:p>
+        </p:txBody>
+      </p:sp>
+      <p:sp>
+        <p:nvSpPr>
+          <p:cNvPr id="8" name="Rectangle 7"/>
+          <p:cNvSpPr/>
+          <p:nvPr/>
+        </p:nvSpPr>
+        <p:spPr>
+          <a:xfrm>
+            <a:off x="731520" y="2889250"/>
+            <a:ext cx="10698480" cy="822960"/>
+          </a:xfrm>
+          <a:prstGeom prst="rect">
+            <a:avLst/>
+          </a:prstGeom>
+          <a:solidFill>
+            <a:srgbClr val="F2F2F2"/>
+          </a:solidFill>
+          <a:ln>
+            <a:noFill/>
+          </a:ln>
+        </p:spPr>
+        <p:style>
+          <a:lnRef idx="1">
+            <a:schemeClr val="accent1"/>
+          </a:lnRef>
+          <a:fillRef idx="3">
+            <a:schemeClr val="accent1"/>
+          </a:fillRef>
+          <a:effectRef idx="2">
+            <a:schemeClr val="accent1"/>
+          </a:effectRef>
+          <a:fontRef idx="minor">
+            <a:schemeClr val="lt1"/>
+          </a:fontRef>
+        </p:style>
+        <p:txBody>
+          <a:bodyPr rtlCol="0" anchor="ctr"/>
+          <a:lstStyle/>
+          <a:p>
+            <a:pPr algn="ctr"/>
+          </a:p>
+        </p:txBody>
+      </p:sp>
+      <p:sp>
+        <p:nvSpPr>
+          <p:cNvPr id="9" name="Rectangle 8"/>
+          <p:cNvSpPr/>
+          <p:nvPr/>
+        </p:nvSpPr>
+        <p:spPr>
+          <a:xfrm>
+            <a:off x="731520" y="2889250"/>
+            <a:ext cx="54864" cy="822960"/>
+          </a:xfrm>
+          <a:prstGeom prst="rect">
+            <a:avLst/>
+          </a:prstGeom>
+          <a:solidFill>
+            <a:srgbClr val="1F497D"/>
+          </a:solidFill>
+          <a:ln>
+            <a:noFill/>
+          </a:ln>
+        </p:spPr>
+        <p:style>
+          <a:lnRef idx="1">
+            <a:schemeClr val="accent1"/>
+          </a:lnRef>
+          <a:fillRef idx="3">
+            <a:schemeClr val="accent1"/>
+          </a:fillRef>
+          <a:effectRef idx="2">
+            <a:schemeClr val="accent1"/>
+          </a:effectRef>
+          <a:fontRef idx="minor">
+            <a:schemeClr val="lt1"/>
+          </a:fontRef>
+        </p:style>
+        <p:txBody>
+          <a:bodyPr rtlCol="0" anchor="ctr"/>
+          <a:lstStyle/>
+          <a:p>
+            <a:pPr algn="ctr"/>
+          </a:p>
+        </p:txBody>
+      </p:sp>
+      <p:sp>
+        <p:nvSpPr>
+          <p:cNvPr id="10" name="TextBox 9"/>
+          <p:cNvSpPr txBox="1"/>
+          <p:nvPr/>
+        </p:nvSpPr>
+        <p:spPr>
+          <a:xfrm>
+            <a:off x="960120" y="2962402"/>
+            <a:ext cx="10332720" cy="676656"/>
+          </a:xfrm>
+          <a:prstGeom prst="rect">
+            <a:avLst/>
+          </a:prstGeom>
+          <a:noFill/>
+        </p:spPr>
+        <p:txBody>
+          <a:bodyPr wrap="square">
+            <a:normAutofit/>
+          </a:bodyPr>
+          <a:lstStyle/>
+          <a:p>
+            <a:pPr algn="l"/>
+            <a:r>
+              <a:rPr sz="1600" b="0">
+                <a:solidFill>
+                  <a:srgbClr val="1F497D"/>
+                </a:solidFill>
+                <a:latin typeface="メイリオ"/>
+              </a:rPr>
+              <a:t>設定場所: claude.ai → プロジェクト → 手順を編集 Web版・デスクトップ・iPhone版すべてで共有される。</a:t>
+            </a:r>
+          </a:p>
+        </p:txBody>
+      </p:sp>
+      <p:sp>
+        <p:nvSpPr>
+          <p:cNvPr id="11" name="Rectangle 10"/>
+          <p:cNvSpPr/>
+          <p:nvPr/>
+        </p:nvSpPr>
+        <p:spPr>
+          <a:xfrm>
+            <a:off x="0" y="6583680"/>
+            <a:ext cx="12188952" cy="274320"/>
+          </a:xfrm>
+          <a:prstGeom prst="rect">
+            <a:avLst/>
+          </a:prstGeom>
+          <a:solidFill>
+            <a:srgbClr val="1F497D"/>
+          </a:solidFill>
+          <a:ln>
+            <a:noFill/>
+          </a:ln>
+        </p:spPr>
+        <p:style>
+          <a:lnRef idx="1">
+            <a:schemeClr val="accent1"/>
+          </a:lnRef>
+          <a:fillRef idx="3">
+            <a:schemeClr val="accent1"/>
+          </a:fillRef>
+          <a:effectRef idx="2">
+            <a:schemeClr val="accent1"/>
+          </a:effectRef>
+          <a:fontRef idx="minor">
+            <a:schemeClr val="lt1"/>
+          </a:fontRef>
+        </p:style>
+        <p:txBody>
+          <a:bodyPr rtlCol="0" anchor="ctr"/>
+          <a:lstStyle/>
+          <a:p>
+            <a:pPr algn="ctr"/>
+          </a:p>
+        </p:txBody>
+      </p:sp>
+    </p:spTree>
+  </p:cSld>
+  <p:clrMapOvr>
+    <a:masterClrMapping/>
+  </p:clrMapOvr>
+</p:sld>
+</file>
+
+<file path=ppt/slides/slide17.xml><?xml version="1.0" encoding="utf-8"?>
+<p:sld xmlns:a="http://schemas.openxmlformats.org/drawingml/2006/main" xmlns:p="http://schemas.openxmlformats.org/presentationml/2006/main" xmlns:r="http://schemas.openxmlformats.org/officeDocument/2006/relationships">
+  <p:cSld>
+    <p:bg>
+      <p:bgPr>
+        <a:solidFill>
+          <a:srgbClr val="F2F2F2"/>
+        </a:solidFill>
+        <a:effectLst/>
+      </p:bgPr>
+    </p:bg>
+    <p:spTree>
+      <p:nvGrpSpPr>
+        <p:cNvPr id="1" name=""/>
+        <p:cNvGrpSpPr/>
+        <p:nvPr/>
+      </p:nvGrpSpPr>
+      <p:grpSpPr/>
+      <p:sp>
+        <p:nvSpPr>
+          <p:cNvPr id="2" name="Rectangle 1"/>
+          <p:cNvSpPr/>
+          <p:nvPr/>
+        </p:nvSpPr>
+        <p:spPr>
+          <a:xfrm>
+            <a:off x="0" y="0"/>
+            <a:ext cx="12188952" cy="1097280"/>
+          </a:xfrm>
+          <a:prstGeom prst="rect">
+            <a:avLst/>
+          </a:prstGeom>
+          <a:solidFill>
+            <a:srgbClr val="1F497D"/>
+          </a:solidFill>
+          <a:ln>
+            <a:noFill/>
+          </a:ln>
+        </p:spPr>
+        <p:style>
+          <a:lnRef idx="1">
+            <a:schemeClr val="accent1"/>
+          </a:lnRef>
+          <a:fillRef idx="3">
+            <a:schemeClr val="accent1"/>
+          </a:fillRef>
+          <a:effectRef idx="2">
+            <a:schemeClr val="accent1"/>
+          </a:effectRef>
+          <a:fontRef idx="minor">
+            <a:schemeClr val="lt1"/>
+          </a:fontRef>
+        </p:style>
+        <p:txBody>
+          <a:bodyPr rtlCol="0" anchor="ctr"/>
+          <a:lstStyle/>
+          <a:p>
+            <a:pPr algn="ctr"/>
+          </a:p>
+        </p:txBody>
+      </p:sp>
+      <p:sp>
+        <p:nvSpPr>
+          <p:cNvPr id="3" name="TextBox 2"/>
+          <p:cNvSpPr txBox="1"/>
+          <p:nvPr/>
+        </p:nvSpPr>
+        <p:spPr>
+          <a:xfrm>
+            <a:off x="457200" y="182880"/>
+            <a:ext cx="10972800" cy="731520"/>
+          </a:xfrm>
+          <a:prstGeom prst="rect">
+            <a:avLst/>
+          </a:prstGeom>
+          <a:noFill/>
+        </p:spPr>
+        <p:txBody>
+          <a:bodyPr wrap="square">
+            <a:spAutoFit/>
+          </a:bodyPr>
+          <a:lstStyle/>
+          <a:p>
+            <a:pPr algn="l"/>
+            <a:r>
+              <a:rPr sz="3200" b="1">
+                <a:solidFill>
+                  <a:srgbClr val="FFFFFF"/>
+                </a:solidFill>
+                <a:latin typeface="メイリオ"/>
+              </a:rPr>
+              <a:t>クライアント別対応状況</a:t>
+            </a:r>
+          </a:p>
+        </p:txBody>
+      </p:sp>
+      <p:graphicFrame>
+        <p:nvGraphicFramePr>
+          <p:cNvPr id="4" name="Table 3"/>
+          <p:cNvGraphicFramePr>
+            <a:graphicFrameLocks noGrp="1"/>
+          </p:cNvGraphicFramePr>
+          <p:nvPr/>
+        </p:nvGraphicFramePr>
+        <p:xfrm>
+          <a:off x="731520" y="1371600"/>
+          <a:ext cx="10698480" cy="1994408"/>
+        </p:xfrm>
+        <a:graphic>
+          <a:graphicData uri="http://schemas.openxmlformats.org/drawingml/2006/table">
+            <a:tbl>
+              <a:tblPr firstRow="1">
+                <a:tableStyleId>{5C22544A-7EE6-4342-B048-85BDC9FD1C3A}</a:tableStyleId>
+              </a:tblPr>
+              <a:tblGrid>
+                <a:gridCol w="2674620"/>
+                <a:gridCol w="2674620"/>
+                <a:gridCol w="2674620"/>
+                <a:gridCol w="2674620"/>
+              </a:tblGrid>
+              <a:tr h="320040">
+                <a:tc>
+                  <a:txBody>
+                    <a:bodyPr/>
+                    <a:lstStyle/>
+                    <a:p>
+                      <a:r>
+                        <a:rPr sz="1400" b="1">
+                          <a:solidFill>
+                            <a:srgbClr val="FFFFFF"/>
+                          </a:solidFill>
+                          <a:latin typeface="メイリオ"/>
+                        </a:rPr>
+                        <a:t>クライアント</a:t>
+                      </a:r>
+                    </a:p>
+                  </a:txBody>
+                  <a:tcPr anchor="ctr" marL="73152" marR="73152" marT="27432" marB="27432">
+                    <a:solidFill>
+                      <a:srgbClr val="1F497D"/>
+                    </a:solidFill>
+                  </a:tcPr>
+                </a:tc>
+                <a:tc>
+                  <a:txBody>
+                    <a:bodyPr/>
+                    <a:lstStyle/>
+                    <a:p>
+                      <a:r>
+                        <a:rPr sz="1400" b="1">
+                          <a:solidFill>
+                            <a:srgbClr val="FFFFFF"/>
+                          </a:solidFill>
+                          <a:latin typeface="メイリオ"/>
+                        </a:rPr>
+                        <a:t>MCP 対応</a:t>
+                      </a:r>
+                    </a:p>
+                  </a:txBody>
+                  <a:tcPr anchor="ctr" marL="73152" marR="73152" marT="27432" marB="27432">
+                    <a:solidFill>
+                      <a:srgbClr val="1F497D"/>
+                    </a:solidFill>
+                  </a:tcPr>
+                </a:tc>
+                <a:tc>
+                  <a:txBody>
+                    <a:bodyPr/>
+                    <a:lstStyle/>
+                    <a:p>
+                      <a:r>
+                        <a:rPr sz="1400" b="1">
+                          <a:solidFill>
+                            <a:srgbClr val="FFFFFF"/>
+                          </a:solidFill>
+                          <a:latin typeface="メイリオ"/>
+                        </a:rPr>
+                        <a:t>気象庁データ取得</a:t>
+                      </a:r>
+                    </a:p>
+                  </a:txBody>
+                  <a:tcPr anchor="ctr" marL="73152" marR="73152" marT="27432" marB="27432">
+                    <a:solidFill>
+                      <a:srgbClr val="1F497D"/>
+                    </a:solidFill>
+                  </a:tcPr>
+                </a:tc>
+                <a:tc>
+                  <a:txBody>
+                    <a:bodyPr/>
+                    <a:lstStyle/>
+                    <a:p>
+                      <a:r>
+                        <a:rPr sz="1400" b="1">
+                          <a:solidFill>
+                            <a:srgbClr val="FFFFFF"/>
+                          </a:solidFill>
+                          <a:latin typeface="メイリオ"/>
+                        </a:rPr>
+                        <a:t>備考</a:t>
+                      </a:r>
+                    </a:p>
+                  </a:txBody>
+                  <a:tcPr anchor="ctr" marL="73152" marR="73152" marT="27432" marB="27432">
+                    <a:solidFill>
+                      <a:srgbClr val="1F497D"/>
+                    </a:solidFill>
+                  </a:tcPr>
+                </a:tc>
+              </a:tr>
+              <a:tr h="320040">
+                <a:tc>
+                  <a:txBody>
+                    <a:bodyPr/>
+                    <a:lstStyle/>
+                    <a:p>
+                      <a:r>
+                        <a:rPr sz="1400" b="0">
+                          <a:solidFill>
+                            <a:srgbClr val="262626"/>
+                          </a:solidFill>
+                          <a:latin typeface="メイリオ"/>
+                        </a:rPr>
+                        <a:t>Claude Code（CLI）</a:t>
+                      </a:r>
+                    </a:p>
+                  </a:txBody>
+                  <a:tcPr anchor="ctr" marL="73152" marR="73152" marT="27432" marB="27432">
+                    <a:solidFill>
+                      <a:srgbClr val="FFFFFF"/>
+                    </a:solidFill>
+                  </a:tcPr>
+                </a:tc>
+                <a:tc>
+                  <a:txBody>
+                    <a:bodyPr/>
+                    <a:lstStyle/>
+                    <a:p>
+                      <a:r>
+                        <a:rPr sz="1400" b="0">
+                          <a:solidFill>
+                            <a:srgbClr val="262626"/>
+                          </a:solidFill>
+                          <a:latin typeface="メイリオ"/>
+                        </a:rPr>
+                        <a:t>✅</a:t>
+                      </a:r>
+                    </a:p>
+                  </a:txBody>
+                  <a:tcPr anchor="ctr" marL="73152" marR="73152" marT="27432" marB="27432">
+                    <a:solidFill>
+                      <a:srgbClr val="FFFFFF"/>
+                    </a:solidFill>
+                  </a:tcPr>
+                </a:tc>
+                <a:tc>
+                  <a:txBody>
+                    <a:bodyPr/>
+                    <a:lstStyle/>
+                    <a:p>
+                      <a:r>
+                        <a:rPr sz="1400" b="0">
+                          <a:solidFill>
+                            <a:srgbClr val="262626"/>
+                          </a:solidFill>
+                          <a:latin typeface="メイリオ"/>
+                        </a:rPr>
+                        <a:t>✅ ローカル版</a:t>
+                      </a:r>
+                    </a:p>
+                  </a:txBody>
+                  <a:tcPr anchor="ctr" marL="73152" marR="73152" marT="27432" marB="27432">
+                    <a:solidFill>
+                      <a:srgbClr val="FFFFFF"/>
+                    </a:solidFill>
+                  </a:tcPr>
+                </a:tc>
+                <a:tc>
+                  <a:txBody>
+                    <a:bodyPr/>
+                    <a:lstStyle/>
+                    <a:p>
+                      <a:r>
+                        <a:rPr sz="1400" b="0">
+                          <a:solidFill>
+                            <a:srgbClr val="262626"/>
+                          </a:solidFill>
+                          <a:latin typeface="メイリオ"/>
+                        </a:rPr>
+                        <a:t>jma_mcp/.mcp.json を使用</a:t>
+                      </a:r>
+                    </a:p>
+                  </a:txBody>
+                  <a:tcPr anchor="ctr" marL="73152" marR="73152" marT="27432" marB="27432">
+                    <a:solidFill>
+                      <a:srgbClr val="FFFFFF"/>
+                    </a:solidFill>
+                  </a:tcPr>
+                </a:tc>
+              </a:tr>
+              <a:tr h="320040">
+                <a:tc>
+                  <a:txBody>
+                    <a:bodyPr/>
+                    <a:lstStyle/>
+                    <a:p>
+                      <a:r>
+                        <a:rPr sz="1400" b="0">
+                          <a:solidFill>
+                            <a:srgbClr val="262626"/>
+                          </a:solidFill>
+                          <a:latin typeface="メイリオ"/>
+                        </a:rPr>
+                        <a:t>Claude.ai Web版</a:t>
+                      </a:r>
+                    </a:p>
+                  </a:txBody>
+                  <a:tcPr anchor="ctr" marL="73152" marR="73152" marT="27432" marB="27432">
+                    <a:solidFill>
+                      <a:srgbClr val="FFFFFF"/>
+                    </a:solidFill>
+                  </a:tcPr>
+                </a:tc>
+                <a:tc>
+                  <a:txBody>
+                    <a:bodyPr/>
+                    <a:lstStyle/>
+                    <a:p>
+                      <a:r>
+                        <a:rPr sz="1400" b="0">
+                          <a:solidFill>
+                            <a:srgbClr val="262626"/>
+                          </a:solidFill>
+                          <a:latin typeface="メイリオ"/>
+                        </a:rPr>
+                        <a:t>✅</a:t>
+                      </a:r>
+                    </a:p>
+                  </a:txBody>
+                  <a:tcPr anchor="ctr" marL="73152" marR="73152" marT="27432" marB="27432">
+                    <a:solidFill>
+                      <a:srgbClr val="FFFFFF"/>
+                    </a:solidFill>
+                  </a:tcPr>
+                </a:tc>
+                <a:tc>
+                  <a:txBody>
+                    <a:bodyPr/>
+                    <a:lstStyle/>
+                    <a:p>
+                      <a:r>
+                        <a:rPr sz="1400" b="0">
+                          <a:solidFill>
+                            <a:srgbClr val="262626"/>
+                          </a:solidFill>
+                          <a:latin typeface="メイリオ"/>
+                        </a:rPr>
+                        <a:t>✅ リモート版</a:t>
+                      </a:r>
+                    </a:p>
+                  </a:txBody>
+                  <a:tcPr anchor="ctr" marL="73152" marR="73152" marT="27432" marB="27432">
+                    <a:solidFill>
+                      <a:srgbClr val="FFFFFF"/>
+                    </a:solidFill>
+                  </a:tcPr>
+                </a:tc>
+                <a:tc>
+                  <a:txBody>
+                    <a:bodyPr/>
+                    <a:lstStyle/>
+                    <a:p>
+                      <a:r>
+                        <a:rPr sz="1400" b="0">
+                          <a:solidFill>
+                            <a:srgbClr val="262626"/>
+                          </a:solidFill>
+                          <a:latin typeface="メイリオ"/>
+                        </a:rPr>
+                        <a:t>コネクタ登録済み</a:t>
+                      </a:r>
+                    </a:p>
+                  </a:txBody>
+                  <a:tcPr anchor="ctr" marL="73152" marR="73152" marT="27432" marB="27432">
+                    <a:solidFill>
+                      <a:srgbClr val="FFFFFF"/>
+                    </a:solidFill>
+                  </a:tcPr>
+                </a:tc>
+              </a:tr>
+              <a:tr h="517144">
+                <a:tc>
+                  <a:txBody>
+                    <a:bodyPr/>
+                    <a:lstStyle/>
+                    <a:p>
+                      <a:r>
+                        <a:rPr sz="1400" b="0">
+                          <a:solidFill>
+                            <a:srgbClr val="262626"/>
+                          </a:solidFill>
+                          <a:latin typeface="メイリオ"/>
+                        </a:rPr>
+                        <a:t>Claude デスクトップアプリ（macOS）</a:t>
+                      </a:r>
+                    </a:p>
+                  </a:txBody>
+                  <a:tcPr anchor="ctr" marL="73152" marR="73152" marT="27432" marB="27432">
+                    <a:solidFill>
+                      <a:srgbClr val="FFFFFF"/>
+                    </a:solidFill>
+                  </a:tcPr>
+                </a:tc>
+                <a:tc>
+                  <a:txBody>
+                    <a:bodyPr/>
+                    <a:lstStyle/>
+                    <a:p>
+                      <a:r>
+                        <a:rPr sz="1400" b="0">
+                          <a:solidFill>
+                            <a:srgbClr val="262626"/>
+                          </a:solidFill>
+                          <a:latin typeface="メイリオ"/>
+                        </a:rPr>
+                        <a:t>✅</a:t>
+                      </a:r>
+                    </a:p>
+                  </a:txBody>
+                  <a:tcPr anchor="ctr" marL="73152" marR="73152" marT="27432" marB="27432">
+                    <a:solidFill>
+                      <a:srgbClr val="FFFFFF"/>
+                    </a:solidFill>
+                  </a:tcPr>
+                </a:tc>
+                <a:tc>
+                  <a:txBody>
+                    <a:bodyPr/>
+                    <a:lstStyle/>
+                    <a:p>
+                      <a:r>
+                        <a:rPr sz="1400" b="0">
+                          <a:solidFill>
+                            <a:srgbClr val="262626"/>
+                          </a:solidFill>
+                          <a:latin typeface="メイリオ"/>
+                        </a:rPr>
+                        <a:t>✅ リモート版</a:t>
+                      </a:r>
+                    </a:p>
+                  </a:txBody>
+                  <a:tcPr anchor="ctr" marL="73152" marR="73152" marT="27432" marB="27432">
+                    <a:solidFill>
+                      <a:srgbClr val="FFFFFF"/>
+                    </a:solidFill>
+                  </a:tcPr>
+                </a:tc>
+                <a:tc>
+                  <a:txBody>
+                    <a:bodyPr/>
+                    <a:lstStyle/>
+                    <a:p>
+                      <a:r>
+                        <a:rPr sz="1400" b="0">
+                          <a:solidFill>
+                            <a:srgbClr val="262626"/>
+                          </a:solidFill>
+                          <a:latin typeface="メイリオ"/>
+                        </a:rPr>
+                        <a:t>Web版と設定共有</a:t>
+                      </a:r>
+                    </a:p>
+                  </a:txBody>
+                  <a:tcPr anchor="ctr" marL="73152" marR="73152" marT="27432" marB="27432">
+                    <a:solidFill>
+                      <a:srgbClr val="FFFFFF"/>
+                    </a:solidFill>
+                  </a:tcPr>
+                </a:tc>
+              </a:tr>
+              <a:tr h="517144">
+                <a:tc>
+                  <a:txBody>
+                    <a:bodyPr/>
+                    <a:lstStyle/>
+                    <a:p>
+                      <a:r>
+                        <a:rPr sz="1400" b="0">
+                          <a:solidFill>
+                            <a:srgbClr val="262626"/>
+                          </a:solidFill>
+                          <a:latin typeface="メイリオ"/>
+                        </a:rPr>
+                        <a:t>Claude iPhone版</a:t>
+                      </a:r>
+                    </a:p>
+                  </a:txBody>
+                  <a:tcPr anchor="ctr" marL="73152" marR="73152" marT="27432" marB="27432">
+                    <a:solidFill>
+                      <a:srgbClr val="FFFFFF"/>
+                    </a:solidFill>
+                  </a:tcPr>
+                </a:tc>
+                <a:tc>
+                  <a:txBody>
+                    <a:bodyPr/>
+                    <a:lstStyle/>
+                    <a:p>
+                      <a:r>
+                        <a:rPr sz="1400" b="0">
+                          <a:solidFill>
+                            <a:srgbClr val="262626"/>
+                          </a:solidFill>
+                          <a:latin typeface="メイリオ"/>
+                        </a:rPr>
+                        <a:t>✅</a:t>
+                      </a:r>
+                    </a:p>
+                  </a:txBody>
+                  <a:tcPr anchor="ctr" marL="73152" marR="73152" marT="27432" marB="27432">
+                    <a:solidFill>
+                      <a:srgbClr val="FFFFFF"/>
+                    </a:solidFill>
+                  </a:tcPr>
+                </a:tc>
+                <a:tc>
+                  <a:txBody>
+                    <a:bodyPr/>
+                    <a:lstStyle/>
+                    <a:p>
+                      <a:r>
+                        <a:rPr sz="1400" b="0">
+                          <a:solidFill>
+                            <a:srgbClr val="262626"/>
+                          </a:solidFill>
+                          <a:latin typeface="メイリオ"/>
+                        </a:rPr>
+                        <a:t>✅ リモート版</a:t>
+                      </a:r>
+                    </a:p>
+                  </a:txBody>
+                  <a:tcPr anchor="ctr" marL="73152" marR="73152" marT="27432" marB="27432">
+                    <a:solidFill>
+                      <a:srgbClr val="FFFFFF"/>
+                    </a:solidFill>
+                  </a:tcPr>
+                </a:tc>
+                <a:tc>
+                  <a:txBody>
+                    <a:bodyPr/>
+                    <a:lstStyle/>
+                    <a:p>
+                      <a:r>
+                        <a:rPr sz="1400" b="0">
+                          <a:solidFill>
+                            <a:srgbClr val="262626"/>
+                          </a:solidFill>
+                          <a:latin typeface="メイリオ"/>
+                        </a:rPr>
+                        <a:t>コネクタをONにすれば動作。2026-04-23 動作確認済み</a:t>
+                      </a:r>
+                    </a:p>
+                  </a:txBody>
+                  <a:tcPr anchor="ctr" marL="73152" marR="73152" marT="27432" marB="27432">
+                    <a:solidFill>
+                      <a:srgbClr val="FFFFFF"/>
+                    </a:solidFill>
+                  </a:tcPr>
+                </a:tc>
+              </a:tr>
+            </a:tbl>
+          </a:graphicData>
+        </a:graphic>
+      </p:graphicFrame>
+      <p:sp>
+        <p:nvSpPr>
+          <p:cNvPr id="5" name="Rectangle 4"/>
+          <p:cNvSpPr/>
+          <p:nvPr/>
+        </p:nvSpPr>
+        <p:spPr>
+          <a:xfrm>
+            <a:off x="0" y="6583680"/>
+            <a:ext cx="12188952" cy="274320"/>
+          </a:xfrm>
+          <a:prstGeom prst="rect">
+            <a:avLst/>
+          </a:prstGeom>
+          <a:solidFill>
+            <a:srgbClr val="1F497D"/>
+          </a:solidFill>
+          <a:ln>
+            <a:noFill/>
+          </a:ln>
+        </p:spPr>
+        <p:style>
+          <a:lnRef idx="1">
+            <a:schemeClr val="accent1"/>
+          </a:lnRef>
+          <a:fillRef idx="3">
+            <a:schemeClr val="accent1"/>
+          </a:fillRef>
+          <a:effectRef idx="2">
+            <a:schemeClr val="accent1"/>
+          </a:effectRef>
+          <a:fontRef idx="minor">
+            <a:schemeClr val="lt1"/>
+          </a:fontRef>
+        </p:style>
+        <p:txBody>
+          <a:bodyPr rtlCol="0" anchor="ctr"/>
+          <a:lstStyle/>
+          <a:p>
+            <a:pPr algn="ctr"/>
+          </a:p>
+        </p:txBody>
+      </p:sp>
+    </p:spTree>
+  </p:cSld>
+  <p:clrMapOvr>
+    <a:masterClrMapping/>
+  </p:clrMapOvr>
+</p:sld>
+</file>
+
+<file path=ppt/slides/slide18.xml><?xml version="1.0" encoding="utf-8"?>
+<p:sld xmlns:a="http://schemas.openxmlformats.org/drawingml/2006/main" xmlns:p="http://schemas.openxmlformats.org/presentationml/2006/main" xmlns:r="http://schemas.openxmlformats.org/officeDocument/2006/relationships">
+  <p:cSld>
+    <p:bg>
+      <p:bgPr>
+        <a:solidFill>
+          <a:srgbClr val="F2F2F2"/>
+        </a:solidFill>
+        <a:effectLst/>
+      </p:bgPr>
+    </p:bg>
+    <p:spTree>
+      <p:nvGrpSpPr>
+        <p:cNvPr id="1" name=""/>
+        <p:cNvGrpSpPr/>
+        <p:nvPr/>
+      </p:nvGrpSpPr>
+      <p:grpSpPr/>
+      <p:sp>
+        <p:nvSpPr>
+          <p:cNvPr id="2" name="Rectangle 1"/>
+          <p:cNvSpPr/>
+          <p:nvPr/>
+        </p:nvSpPr>
+        <p:spPr>
+          <a:xfrm>
+            <a:off x="0" y="0"/>
+            <a:ext cx="12188952" cy="1097280"/>
+          </a:xfrm>
+          <a:prstGeom prst="rect">
+            <a:avLst/>
+          </a:prstGeom>
+          <a:solidFill>
+            <a:srgbClr val="1F497D"/>
+          </a:solidFill>
+          <a:ln>
+            <a:noFill/>
+          </a:ln>
+        </p:spPr>
+        <p:style>
+          <a:lnRef idx="1">
+            <a:schemeClr val="accent1"/>
+          </a:lnRef>
+          <a:fillRef idx="3">
+            <a:schemeClr val="accent1"/>
+          </a:fillRef>
+          <a:effectRef idx="2">
+            <a:schemeClr val="accent1"/>
+          </a:effectRef>
+          <a:fontRef idx="minor">
+            <a:schemeClr val="lt1"/>
+          </a:fontRef>
+        </p:style>
+        <p:txBody>
+          <a:bodyPr rtlCol="0" anchor="ctr"/>
+          <a:lstStyle/>
+          <a:p>
+            <a:pPr algn="ctr"/>
+          </a:p>
+        </p:txBody>
+      </p:sp>
+      <p:sp>
+        <p:nvSpPr>
+          <p:cNvPr id="3" name="TextBox 2"/>
+          <p:cNvSpPr txBox="1"/>
+          <p:nvPr/>
+        </p:nvSpPr>
+        <p:spPr>
+          <a:xfrm>
+            <a:off x="457200" y="182880"/>
+            <a:ext cx="10972800" cy="731520"/>
+          </a:xfrm>
+          <a:prstGeom prst="rect">
+            <a:avLst/>
+          </a:prstGeom>
+          <a:noFill/>
+        </p:spPr>
+        <p:txBody>
+          <a:bodyPr wrap="square">
+            <a:spAutoFit/>
+          </a:bodyPr>
+          <a:lstStyle/>
+          <a:p>
+            <a:pPr algn="l"/>
+            <a:r>
+              <a:rPr sz="3200" b="1">
+                <a:solidFill>
+                  <a:srgbClr val="FFFFFF"/>
+                </a:solidFill>
+                <a:latin typeface="メイリオ"/>
+              </a:rPr>
+              <a:t>注意事項</a:t>
+            </a:r>
+          </a:p>
+        </p:txBody>
+      </p:sp>
+      <p:sp>
+        <p:nvSpPr>
+          <p:cNvPr id="4" name="TextBox 3"/>
+          <p:cNvSpPr txBox="1"/>
+          <p:nvPr/>
+        </p:nvSpPr>
+        <p:spPr>
+          <a:xfrm>
+            <a:off x="731520" y="1371600"/>
+            <a:ext cx="10698480" cy="4328160"/>
+          </a:xfrm>
+          <a:prstGeom prst="rect">
+            <a:avLst/>
+          </a:prstGeom>
+          <a:noFill/>
+        </p:spPr>
+        <p:txBody>
+          <a:bodyPr wrap="square">
+            <a:normAutofit/>
+          </a:bodyPr>
+          <a:lstStyle/>
+          <a:p>
+            <a:pPr algn="l"/>
+            <a:r>
+              <a:rPr sz="2200" b="0">
+                <a:solidFill>
+                  <a:srgbClr val="262626"/>
+                </a:solidFill>
+                <a:latin typeface="メイリオ"/>
+              </a:rPr>
+              <a:t>Render 無料プランのスリープ</a:t>
+            </a:r>
+          </a:p>
+          <a:p>
+            <a:pPr algn="l"/>
+            <a:r>
+              <a:rPr sz="2200" b="0">
+                <a:solidFill>
+                  <a:srgbClr val="262626"/>
+                </a:solidFill>
+                <a:latin typeface="メイリオ"/>
+              </a:rPr>
+              <a:t/>
+            </a:r>
+          </a:p>
+          <a:p>
+            <a:pPr algn="l"/>
+            <a:r>
+              <a:rPr sz="2200" b="0">
+                <a:solidFill>
+                  <a:srgbClr val="262626"/>
+                </a:solidFill>
+                <a:latin typeface="メイリオ"/>
+              </a:rPr>
+              <a:t>・15分間アクセスがないとスリープ状態になる</a:t>
+            </a:r>
+          </a:p>
+          <a:p>
+            <a:pPr algn="l"/>
+            <a:r>
+              <a:rPr sz="2200" b="0">
+                <a:solidFill>
+                  <a:srgbClr val="262626"/>
+                </a:solidFill>
+                <a:latin typeface="メイリオ"/>
+              </a:rPr>
+              <a:t>・次のアクセス時に起動まで 30〜60秒 かかる</a:t>
+            </a:r>
+          </a:p>
+          <a:p>
+            <a:pPr algn="l"/>
+            <a:r>
+              <a:rPr sz="2200" b="0">
+                <a:solidFill>
+                  <a:srgbClr val="262626"/>
+                </a:solidFill>
+                <a:latin typeface="メイリオ"/>
+              </a:rPr>
+              <a:t>・接続タイムアウトになる場合は少し待って再試行</a:t>
+            </a:r>
+          </a:p>
+          <a:p>
+            <a:pPr algn="l"/>
+            <a:r>
+              <a:rPr sz="2200" b="0">
+                <a:solidFill>
+                  <a:srgbClr val="262626"/>
+                </a:solidFill>
+                <a:latin typeface="メイリオ"/>
+              </a:rPr>
+              <a:t/>
+            </a:r>
+          </a:p>
+          <a:p>
+            <a:pPr algn="l"/>
+            <a:r>
+              <a:rPr sz="2200" b="0">
+                <a:solidFill>
+                  <a:srgbClr val="262626"/>
+                </a:solidFill>
+                <a:latin typeface="メイリオ"/>
+              </a:rPr>
+              <a:t>server.py の更新</a:t>
+            </a:r>
+          </a:p>
+          <a:p>
+            <a:pPr algn="l"/>
+            <a:r>
+              <a:rPr sz="2200" b="0">
+                <a:solidFill>
+                  <a:srgbClr val="262626"/>
+                </a:solidFill>
+                <a:latin typeface="メイリオ"/>
+              </a:rPr>
+              <a:t/>
+            </a:r>
+          </a:p>
+          <a:p>
+            <a:pPr algn="l"/>
+            <a:r>
+              <a:rPr sz="2200" b="0">
+                <a:solidFill>
+                  <a:srgbClr val="262626"/>
+                </a:solidFill>
+                <a:latin typeface="メイリオ"/>
+              </a:rPr>
+              <a:t>jma_mcp/server.py にツールを追加した場合は jma_mcp_remote/server.py にも反映すること。</a:t>
+            </a:r>
+          </a:p>
+          <a:p>
+            <a:pPr algn="l"/>
+            <a:r>
+              <a:rPr sz="2200" b="0">
+                <a:solidFill>
+                  <a:srgbClr val="262626"/>
+                </a:solidFill>
+                <a:latin typeface="メイリオ"/>
+              </a:rPr>
+              <a:t/>
+            </a:r>
+          </a:p>
+          <a:p>
+            <a:pPr algn="l"/>
+            <a:r>
+              <a:rPr sz="2200" b="0">
+                <a:solidFill>
+                  <a:srgbClr val="262626"/>
+                </a:solidFill>
+                <a:latin typeface="メイリオ"/>
+              </a:rPr>
+              <a:t>差分は起動部分（main() → create_app()）のみ。ツールの実装は同一。</a:t>
+            </a:r>
+          </a:p>
+        </p:txBody>
+      </p:sp>
+      <p:sp>
+        <p:nvSpPr>
+          <p:cNvPr id="5" name="Rectangle 4"/>
           <p:cNvSpPr/>
           <p:nvPr/>
         </p:nvSpPr>
@@ -3472,7 +7810,7 @@
                 </a:solidFill>
                 <a:latin typeface="メイリオ"/>
               </a:rPr>
-              <a:t>  1.  jma-mcp-remote とは</a:t>
+              <a:t>  1.  jma-mcp-remote — JMA MCP サーバー リモート版（HTTP/SSE）</a:t>
             </a:r>
           </a:p>
           <a:p>
@@ -3484,7 +7822,7 @@
                 </a:solidFill>
                 <a:latin typeface="メイリオ"/>
               </a:rPr>
-              <a:t>  2.  ローカル版との違い</a:t>
+              <a:t>  2.  概要</a:t>
             </a:r>
           </a:p>
           <a:p>
@@ -3496,7 +7834,7 @@
                 </a:solidFill>
                 <a:latin typeface="メイリオ"/>
               </a:rPr>
-              <a:t>  3.  Renderへのデプロイ手順</a:t>
+              <a:t>  3.  ファイル構成</a:t>
             </a:r>
           </a:p>
           <a:p>
@@ -3508,7 +7846,7 @@
                 </a:solidFill>
                 <a:latin typeface="メイリオ"/>
               </a:rPr>
-              <a:t>  4.  Claude.aiへの接続手順</a:t>
+              <a:t>  4.  ローカル版との違い</a:t>
             </a:r>
           </a:p>
           <a:p>
@@ -3520,7 +7858,7 @@
                 </a:solidFill>
                 <a:latin typeface="メイリオ"/>
               </a:rPr>
-              <a:t>  5.  出典リンク表示設定</a:t>
+              <a:t>  5.  Claude.ai への接続</a:t>
             </a:r>
           </a:p>
           <a:p>
@@ -3532,7 +7870,7 @@
                 </a:solidFill>
                 <a:latin typeface="メイリオ"/>
               </a:rPr>
-              <a:t>  6.  クライアント別対応状況</a:t>
+              <a:t>  6.  注意事項</a:t>
             </a:r>
           </a:p>
           <a:p>
@@ -3544,7 +7882,115 @@
                 </a:solidFill>
                 <a:latin typeface="メイリオ"/>
               </a:rPr>
-              <a:t>  7.  注意事項・今後の運用</a:t>
+              <a:t>  7.  GitHub</a:t>
+            </a:r>
+          </a:p>
+          <a:p>
+            <a:pPr algn="l"/>
+            <a:r>
+              <a:rPr sz="2200" b="0">
+                <a:solidFill>
+                  <a:srgbClr val="262626"/>
+                </a:solidFill>
+                <a:latin typeface="メイリオ"/>
+              </a:rPr>
+              <a:t>  8.  jma-mcp-remote — JMA MCP サーバー リモート版（HTTP/SSE）</a:t>
+            </a:r>
+          </a:p>
+          <a:p>
+            <a:pPr algn="l"/>
+            <a:r>
+              <a:rPr sz="2200" b="0">
+                <a:solidFill>
+                  <a:srgbClr val="262626"/>
+                </a:solidFill>
+                <a:latin typeface="メイリオ"/>
+              </a:rPr>
+              <a:t>  9.  概要</a:t>
+            </a:r>
+          </a:p>
+          <a:p>
+            <a:pPr algn="l"/>
+            <a:r>
+              <a:rPr sz="2200" b="0">
+                <a:solidFill>
+                  <a:srgbClr val="262626"/>
+                </a:solidFill>
+                <a:latin typeface="メイリオ"/>
+              </a:rPr>
+              <a:t>  10.  ローカル版との違い</a:t>
+            </a:r>
+          </a:p>
+          <a:p>
+            <a:pPr algn="l"/>
+            <a:r>
+              <a:rPr sz="2200" b="0">
+                <a:solidFill>
+                  <a:srgbClr val="262626"/>
+                </a:solidFill>
+                <a:latin typeface="メイリオ"/>
+              </a:rPr>
+              <a:t>  11.  ファイル構成</a:t>
+            </a:r>
+          </a:p>
+          <a:p>
+            <a:pPr algn="l"/>
+            <a:r>
+              <a:rPr sz="2200" b="0">
+                <a:solidFill>
+                  <a:srgbClr val="262626"/>
+                </a:solidFill>
+                <a:latin typeface="メイリオ"/>
+              </a:rPr>
+              <a:t>  12.  Render へのデプロイ手順</a:t>
+            </a:r>
+          </a:p>
+          <a:p>
+            <a:pPr algn="l"/>
+            <a:r>
+              <a:rPr sz="2200" b="0">
+                <a:solidFill>
+                  <a:srgbClr val="262626"/>
+                </a:solidFill>
+                <a:latin typeface="メイリオ"/>
+              </a:rPr>
+              <a:t>  13.  Claude.ai への接続手順</a:t>
+            </a:r>
+          </a:p>
+          <a:p>
+            <a:pPr algn="l"/>
+            <a:r>
+              <a:rPr sz="2200" b="0">
+                <a:solidFill>
+                  <a:srgbClr val="262626"/>
+                </a:solidFill>
+                <a:latin typeface="メイリオ"/>
+              </a:rPr>
+              <a:t>  14.  出典リンク表示設定（Projectsカスタム指示）</a:t>
+            </a:r>
+          </a:p>
+          <a:p>
+            <a:pPr algn="l"/>
+            <a:r>
+              <a:rPr sz="2200" b="0">
+                <a:solidFill>
+                  <a:srgbClr val="262626"/>
+                </a:solidFill>
+                <a:latin typeface="メイリオ"/>
+              </a:rPr>
+              <a:t>  15.  クライアント別対応状況</a:t>
+            </a:r>
+          </a:p>
+          <a:p>
+            <a:pPr algn="l"/>
+            <a:r>
+              <a:rPr sz="2200" b="0">
+                <a:solidFill>
+                  <a:srgbClr val="262626"/>
+                </a:solidFill>
+                <a:latin typeface="メイリオ"/>
+              </a:rPr>
+              <a:t>  16.  注意事項</a:t>
             </a:r>
           </a:p>
         </p:txBody>
@@ -3691,7 +8137,7 @@
                 </a:solidFill>
                 <a:latin typeface="メイリオ"/>
               </a:rPr>
-              <a:t>jma-mcp-remote とは</a:t>
+              <a:t>jma-mcp-remote — JMA MCP サーバー リモート版（HTTP/SSE）</a:t>
             </a:r>
           </a:p>
         </p:txBody>
@@ -3705,7 +8151,7 @@
         <p:spPr>
           <a:xfrm>
             <a:off x="731520" y="1371600"/>
-            <a:ext cx="10698480" cy="4206240"/>
+            <a:ext cx="10698480" cy="2232660"/>
           </a:xfrm>
           <a:prstGeom prst="rect">
             <a:avLst/>
@@ -3726,7 +8172,7 @@
                 </a:solidFill>
                 <a:latin typeface="メイリオ"/>
               </a:rPr>
-              <a:t>・jma_mcp（ローカルstdio版）をベースに、HTTP/SSE通信へ切り替えたリモートデプロイ版</a:t>
+              <a:t>詳しくは [jma-mcp-remote.md](jma-mcp-remote.md) を参照。</a:t>
             </a:r>
           </a:p>
           <a:p>
@@ -3738,7 +8184,7 @@
                 </a:solidFill>
                 <a:latin typeface="メイリオ"/>
               </a:rPr>
-              <a:t>・Renderにデプロイし、Claude.ai Web版・デスクトップアプリ・iPhone版から利用できる</a:t>
+              <a:t/>
             </a:r>
           </a:p>
           <a:p>
@@ -3750,7 +8196,7 @@
                 </a:solidFill>
                 <a:latin typeface="メイリオ"/>
               </a:rPr>
-              <a:t>・SSEエンドポイント: https://jma-mcp-remote.onrender.com/sse</a:t>
+              <a:t/>
             </a:r>
           </a:p>
           <a:p>
@@ -3762,7 +8208,19 @@
                 </a:solidFill>
                 <a:latin typeface="メイリオ"/>
               </a:rPr>
-              <a:t>・プロトコル: MCP（Model Context Protocol）/ HTTP + SSEベース</a:t>
+              <a:t>jma_mcp（stdio ローカル版）をベースに HTTP/SSE 通信へ切り替えたリモートデプロイ版。</a:t>
+            </a:r>
+          </a:p>
+          <a:p>
+            <a:pPr algn="l"/>
+            <a:r>
+              <a:rPr sz="2200" b="0">
+                <a:solidFill>
+                  <a:srgbClr val="262626"/>
+                </a:solidFill>
+                <a:latin typeface="メイリオ"/>
+              </a:rPr>
+              <a:t>Render にデプロイし、Claude.ai Web版・デスクトップアプリから使用する。</a:t>
             </a:r>
           </a:p>
         </p:txBody>
@@ -3909,94 +8367,359 @@
                 </a:solidFill>
                 <a:latin typeface="メイリオ"/>
               </a:rPr>
-              <a:t>ローカル版との違い</a:t>
-            </a:r>
-          </a:p>
-        </p:txBody>
-      </p:sp>
-      <p:sp>
-        <p:nvSpPr>
-          <p:cNvPr id="4" name="TextBox 3"/>
-          <p:cNvSpPr txBox="1"/>
+              <a:t>概要</a:t>
+            </a:r>
+          </a:p>
+        </p:txBody>
+      </p:sp>
+      <p:graphicFrame>
+        <p:nvGraphicFramePr>
+          <p:cNvPr id="4" name="Table 3"/>
+          <p:cNvGraphicFramePr>
+            <a:graphicFrameLocks noGrp="1"/>
+          </p:cNvGraphicFramePr>
           <p:nvPr/>
-        </p:nvSpPr>
-        <p:spPr>
-          <a:xfrm>
-            <a:off x="731520" y="1371600"/>
-            <a:ext cx="10698480" cy="4206240"/>
-          </a:xfrm>
-          <a:prstGeom prst="rect">
-            <a:avLst/>
-          </a:prstGeom>
-          <a:noFill/>
-        </p:spPr>
-        <p:txBody>
-          <a:bodyPr wrap="square">
-            <a:normAutofit/>
-          </a:bodyPr>
-          <a:lstStyle/>
-          <a:p>
-            <a:pPr algn="l"/>
-            <a:r>
-              <a:rPr sz="2200" b="0">
-                <a:solidFill>
-                  <a:srgbClr val="262626"/>
-                </a:solidFill>
-                <a:latin typeface="メイリオ"/>
-              </a:rPr>
-              <a:t>・通信方式: stdio（ローカル版）→ HTTP+SSE（リモート版）</a:t>
-            </a:r>
-          </a:p>
-          <a:p>
-            <a:pPr algn="l"/>
-            <a:r>
-              <a:rPr sz="2200" b="0">
-                <a:solidFill>
-                  <a:srgbClr val="262626"/>
-                </a:solidFill>
-                <a:latin typeface="メイリオ"/>
-              </a:rPr>
-              <a:t>・起動方法: Claude Codeがサブプロセス起動 → Render上で常駐</a:t>
-            </a:r>
-          </a:p>
-          <a:p>
-            <a:pPr algn="l"/>
-            <a:r>
-              <a:rPr sz="2200" b="0">
-                <a:solidFill>
-                  <a:srgbClr val="262626"/>
-                </a:solidFill>
-                <a:latin typeface="メイリオ"/>
-              </a:rPr>
-              <a:t>・対応クライアント: Claude Code（CLI）のみ → Web版・デスクトップ・iPhoneすべて</a:t>
-            </a:r>
-          </a:p>
-          <a:p>
-            <a:pPr algn="l"/>
-            <a:r>
-              <a:rPr sz="2200" b="0">
-                <a:solidFill>
-                  <a:srgbClr val="262626"/>
-                </a:solidFill>
-                <a:latin typeface="メイリオ"/>
-              </a:rPr>
-              <a:t>・コスト: 無料（ローカル実行） vs Render無料プラン（スリープあり）</a:t>
-            </a:r>
-          </a:p>
-          <a:p>
-            <a:pPr algn="l"/>
-            <a:r>
-              <a:rPr sz="2200" b="0">
-                <a:solidFill>
-                  <a:srgbClr val="262626"/>
-                </a:solidFill>
-                <a:latin typeface="メイリオ"/>
-              </a:rPr>
-              <a:t>・ツールの実装内容は同一（server.pyを共有、全21種）</a:t>
-            </a:r>
-          </a:p>
-        </p:txBody>
-      </p:sp>
+        </p:nvGraphicFramePr>
+        <p:xfrm>
+          <a:off x="731520" y="1371600"/>
+          <a:ext cx="10698480" cy="2240280"/>
+        </p:xfrm>
+        <a:graphic>
+          <a:graphicData uri="http://schemas.openxmlformats.org/drawingml/2006/table">
+            <a:tbl>
+              <a:tblPr firstRow="1">
+                <a:tableStyleId>{5C22544A-7EE6-4342-B048-85BDC9FD1C3A}</a:tableStyleId>
+              </a:tblPr>
+              <a:tblGrid>
+                <a:gridCol w="5349240"/>
+                <a:gridCol w="5349240"/>
+              </a:tblGrid>
+              <a:tr h="320040">
+                <a:tc>
+                  <a:txBody>
+                    <a:bodyPr/>
+                    <a:lstStyle/>
+                    <a:p>
+                      <a:r>
+                        <a:rPr sz="1400" b="1">
+                          <a:solidFill>
+                            <a:srgbClr val="FFFFFF"/>
+                          </a:solidFill>
+                          <a:latin typeface="メイリオ"/>
+                        </a:rPr>
+                        <a:t>項目</a:t>
+                      </a:r>
+                    </a:p>
+                  </a:txBody>
+                  <a:tcPr anchor="ctr" marL="73152" marR="73152" marT="27432" marB="27432">
+                    <a:solidFill>
+                      <a:srgbClr val="1F497D"/>
+                    </a:solidFill>
+                  </a:tcPr>
+                </a:tc>
+                <a:tc>
+                  <a:txBody>
+                    <a:bodyPr/>
+                    <a:lstStyle/>
+                    <a:p>
+                      <a:r>
+                        <a:rPr sz="1400" b="1">
+                          <a:solidFill>
+                            <a:srgbClr val="FFFFFF"/>
+                          </a:solidFill>
+                          <a:latin typeface="メイリオ"/>
+                        </a:rPr>
+                        <a:t>内容</a:t>
+                      </a:r>
+                    </a:p>
+                  </a:txBody>
+                  <a:tcPr anchor="ctr" marL="73152" marR="73152" marT="27432" marB="27432">
+                    <a:solidFill>
+                      <a:srgbClr val="1F497D"/>
+                    </a:solidFill>
+                  </a:tcPr>
+                </a:tc>
+              </a:tr>
+              <a:tr h="320040">
+                <a:tc>
+                  <a:txBody>
+                    <a:bodyPr/>
+                    <a:lstStyle/>
+                    <a:p>
+                      <a:r>
+                        <a:rPr sz="1400" b="0">
+                          <a:solidFill>
+                            <a:srgbClr val="262626"/>
+                          </a:solidFill>
+                          <a:latin typeface="メイリオ"/>
+                        </a:rPr>
+                        <a:t>プロトコル</a:t>
+                      </a:r>
+                    </a:p>
+                  </a:txBody>
+                  <a:tcPr anchor="ctr" marL="73152" marR="73152" marT="27432" marB="27432">
+                    <a:solidFill>
+                      <a:srgbClr val="FFFFFF"/>
+                    </a:solidFill>
+                  </a:tcPr>
+                </a:tc>
+                <a:tc>
+                  <a:txBody>
+                    <a:bodyPr/>
+                    <a:lstStyle/>
+                    <a:p>
+                      <a:r>
+                        <a:rPr sz="1400" b="0">
+                          <a:solidFill>
+                            <a:srgbClr val="262626"/>
+                          </a:solidFill>
+                          <a:latin typeface="メイリオ"/>
+                        </a:rPr>
+                        <a:t>MCP（Model Context Protocol）/ HTTP + SSE ベース</a:t>
+                      </a:r>
+                    </a:p>
+                  </a:txBody>
+                  <a:tcPr anchor="ctr" marL="73152" marR="73152" marT="27432" marB="27432">
+                    <a:solidFill>
+                      <a:srgbClr val="FFFFFF"/>
+                    </a:solidFill>
+                  </a:tcPr>
+                </a:tc>
+              </a:tr>
+              <a:tr h="320040">
+                <a:tc>
+                  <a:txBody>
+                    <a:bodyPr/>
+                    <a:lstStyle/>
+                    <a:p>
+                      <a:r>
+                        <a:rPr sz="1400" b="0">
+                          <a:solidFill>
+                            <a:srgbClr val="262626"/>
+                          </a:solidFill>
+                          <a:latin typeface="メイリオ"/>
+                        </a:rPr>
+                        <a:t>デプロイ先</a:t>
+                      </a:r>
+                    </a:p>
+                  </a:txBody>
+                  <a:tcPr anchor="ctr" marL="73152" marR="73152" marT="27432" marB="27432">
+                    <a:solidFill>
+                      <a:srgbClr val="FFFFFF"/>
+                    </a:solidFill>
+                  </a:tcPr>
+                </a:tc>
+                <a:tc>
+                  <a:txBody>
+                    <a:bodyPr/>
+                    <a:lstStyle/>
+                    <a:p>
+                      <a:r>
+                        <a:rPr sz="1400" b="0">
+                          <a:solidFill>
+                            <a:srgbClr val="262626"/>
+                          </a:solidFill>
+                          <a:latin typeface="メイリオ"/>
+                        </a:rPr>
+                        <a:t>Render（Web Service）</a:t>
+                      </a:r>
+                    </a:p>
+                  </a:txBody>
+                  <a:tcPr anchor="ctr" marL="73152" marR="73152" marT="27432" marB="27432">
+                    <a:solidFill>
+                      <a:srgbClr val="FFFFFF"/>
+                    </a:solidFill>
+                  </a:tcPr>
+                </a:tc>
+              </a:tr>
+              <a:tr h="320040">
+                <a:tc>
+                  <a:txBody>
+                    <a:bodyPr/>
+                    <a:lstStyle/>
+                    <a:p>
+                      <a:r>
+                        <a:rPr sz="1400" b="0">
+                          <a:solidFill>
+                            <a:srgbClr val="262626"/>
+                          </a:solidFill>
+                          <a:latin typeface="メイリオ"/>
+                        </a:rPr>
+                        <a:t>SSE エンドポイント</a:t>
+                      </a:r>
+                    </a:p>
+                  </a:txBody>
+                  <a:tcPr anchor="ctr" marL="73152" marR="73152" marT="27432" marB="27432">
+                    <a:solidFill>
+                      <a:srgbClr val="FFFFFF"/>
+                    </a:solidFill>
+                  </a:tcPr>
+                </a:tc>
+                <a:tc>
+                  <a:txBody>
+                    <a:bodyPr/>
+                    <a:lstStyle/>
+                    <a:p>
+                      <a:r>
+                        <a:rPr sz="1400" b="0">
+                          <a:solidFill>
+                            <a:srgbClr val="262626"/>
+                          </a:solidFill>
+                          <a:latin typeface="メイリオ"/>
+                        </a:rPr>
+                        <a:t>https://jma-mcp-remote.onrender.com/sse</a:t>
+                      </a:r>
+                    </a:p>
+                  </a:txBody>
+                  <a:tcPr anchor="ctr" marL="73152" marR="73152" marT="27432" marB="27432">
+                    <a:solidFill>
+                      <a:srgbClr val="FFFFFF"/>
+                    </a:solidFill>
+                  </a:tcPr>
+                </a:tc>
+              </a:tr>
+              <a:tr h="320040">
+                <a:tc>
+                  <a:txBody>
+                    <a:bodyPr/>
+                    <a:lstStyle/>
+                    <a:p>
+                      <a:r>
+                        <a:rPr sz="1400" b="0">
+                          <a:solidFill>
+                            <a:srgbClr val="262626"/>
+                          </a:solidFill>
+                          <a:latin typeface="メイリオ"/>
+                        </a:rPr>
+                        <a:t>対応クライアント</a:t>
+                      </a:r>
+                    </a:p>
+                  </a:txBody>
+                  <a:tcPr anchor="ctr" marL="73152" marR="73152" marT="27432" marB="27432">
+                    <a:solidFill>
+                      <a:srgbClr val="FFFFFF"/>
+                    </a:solidFill>
+                  </a:tcPr>
+                </a:tc>
+                <a:tc>
+                  <a:txBody>
+                    <a:bodyPr/>
+                    <a:lstStyle/>
+                    <a:p>
+                      <a:r>
+                        <a:rPr sz="1400" b="0">
+                          <a:solidFill>
+                            <a:srgbClr val="262626"/>
+                          </a:solidFill>
+                          <a:latin typeface="メイリオ"/>
+                        </a:rPr>
+                        <a:t>Claude.ai Web版・デスクトップアプリ（macOS）</a:t>
+                      </a:r>
+                    </a:p>
+                  </a:txBody>
+                  <a:tcPr anchor="ctr" marL="73152" marR="73152" marT="27432" marB="27432">
+                    <a:solidFill>
+                      <a:srgbClr val="FFFFFF"/>
+                    </a:solidFill>
+                  </a:tcPr>
+                </a:tc>
+              </a:tr>
+              <a:tr h="320040">
+                <a:tc>
+                  <a:txBody>
+                    <a:bodyPr/>
+                    <a:lstStyle/>
+                    <a:p>
+                      <a:r>
+                        <a:rPr sz="1400" b="0">
+                          <a:solidFill>
+                            <a:srgbClr val="262626"/>
+                          </a:solidFill>
+                          <a:latin typeface="メイリオ"/>
+                        </a:rPr>
+                        <a:t>非対応クライアント</a:t>
+                      </a:r>
+                    </a:p>
+                  </a:txBody>
+                  <a:tcPr anchor="ctr" marL="73152" marR="73152" marT="27432" marB="27432">
+                    <a:solidFill>
+                      <a:srgbClr val="FFFFFF"/>
+                    </a:solidFill>
+                  </a:tcPr>
+                </a:tc>
+                <a:tc>
+                  <a:txBody>
+                    <a:bodyPr/>
+                    <a:lstStyle/>
+                    <a:p>
+                      <a:r>
+                        <a:rPr sz="1400" b="0">
+                          <a:solidFill>
+                            <a:srgbClr val="262626"/>
+                          </a:solidFill>
+                          <a:latin typeface="メイリオ"/>
+                        </a:rPr>
+                        <a:t>iPhone版 Claude（MCP未対応のため要約版になる）</a:t>
+                      </a:r>
+                    </a:p>
+                  </a:txBody>
+                  <a:tcPr anchor="ctr" marL="73152" marR="73152" marT="27432" marB="27432">
+                    <a:solidFill>
+                      <a:srgbClr val="FFFFFF"/>
+                    </a:solidFill>
+                  </a:tcPr>
+                </a:tc>
+              </a:tr>
+              <a:tr h="320040">
+                <a:tc>
+                  <a:txBody>
+                    <a:bodyPr/>
+                    <a:lstStyle/>
+                    <a:p>
+                      <a:r>
+                        <a:rPr sz="1400" b="0">
+                          <a:solidFill>
+                            <a:srgbClr val="262626"/>
+                          </a:solidFill>
+                          <a:latin typeface="メイリオ"/>
+                        </a:rPr>
+                        <a:t>GitHub</a:t>
+                      </a:r>
+                    </a:p>
+                  </a:txBody>
+                  <a:tcPr anchor="ctr" marL="73152" marR="73152" marT="27432" marB="27432">
+                    <a:solidFill>
+                      <a:srgbClr val="FFFFFF"/>
+                    </a:solidFill>
+                  </a:tcPr>
+                </a:tc>
+                <a:tc>
+                  <a:txBody>
+                    <a:bodyPr/>
+                    <a:lstStyle/>
+                    <a:p>
+                      <a:r>
+                        <a:rPr sz="1400" b="0">
+                          <a:solidFill>
+                            <a:srgbClr val="262626"/>
+                          </a:solidFill>
+                          <a:latin typeface="メイリオ"/>
+                        </a:rPr>
+                        <a:t>https://github.com/masauehr/jma-mcp-remote</a:t>
+                      </a:r>
+                    </a:p>
+                  </a:txBody>
+                  <a:tcPr anchor="ctr" marL="73152" marR="73152" marT="27432" marB="27432">
+                    <a:solidFill>
+                      <a:srgbClr val="FFFFFF"/>
+                    </a:solidFill>
+                  </a:tcPr>
+                </a:tc>
+              </a:tr>
+            </a:tbl>
+          </a:graphicData>
+        </a:graphic>
+      </p:graphicFrame>
       <p:sp>
         <p:nvSpPr>
           <p:cNvPr id="5" name="Rectangle 4"/>
@@ -4139,21 +8862,107 @@
                 </a:solidFill>
                 <a:latin typeface="メイリオ"/>
               </a:rPr>
-              <a:t>Renderへのデプロイ手順</a:t>
-            </a:r>
-          </a:p>
-        </p:txBody>
-      </p:sp>
-      <p:sp>
-        <p:nvSpPr>
-          <p:cNvPr id="4" name="TextBox 3"/>
+              <a:t>ファイル構成</a:t>
+            </a:r>
+          </a:p>
+        </p:txBody>
+      </p:sp>
+      <p:sp>
+        <p:nvSpPr>
+          <p:cNvPr id="4" name="Rectangle 3"/>
+          <p:cNvSpPr/>
+          <p:nvPr/>
+        </p:nvSpPr>
+        <p:spPr>
+          <a:xfrm>
+            <a:off x="731520" y="1371600"/>
+            <a:ext cx="10698480" cy="1701800"/>
+          </a:xfrm>
+          <a:prstGeom prst="rect">
+            <a:avLst/>
+          </a:prstGeom>
+          <a:solidFill>
+            <a:srgbClr val="E8E8E8"/>
+          </a:solidFill>
+          <a:ln>
+            <a:noFill/>
+          </a:ln>
+        </p:spPr>
+        <p:style>
+          <a:lnRef idx="1">
+            <a:schemeClr val="accent1"/>
+          </a:lnRef>
+          <a:fillRef idx="3">
+            <a:schemeClr val="accent1"/>
+          </a:fillRef>
+          <a:effectRef idx="2">
+            <a:schemeClr val="accent1"/>
+          </a:effectRef>
+          <a:fontRef idx="minor">
+            <a:schemeClr val="lt1"/>
+          </a:fontRef>
+        </p:style>
+        <p:txBody>
+          <a:bodyPr rtlCol="0" anchor="ctr"/>
+          <a:lstStyle/>
+          <a:p>
+            <a:pPr algn="ctr"/>
+          </a:p>
+        </p:txBody>
+      </p:sp>
+      <p:sp>
+        <p:nvSpPr>
+          <p:cNvPr id="5" name="Rectangle 4"/>
+          <p:cNvSpPr/>
+          <p:nvPr/>
+        </p:nvSpPr>
+        <p:spPr>
+          <a:xfrm>
+            <a:off x="731520" y="1371600"/>
+            <a:ext cx="54864" cy="1701800"/>
+          </a:xfrm>
+          <a:prstGeom prst="rect">
+            <a:avLst/>
+          </a:prstGeom>
+          <a:solidFill>
+            <a:srgbClr val="1F497D"/>
+          </a:solidFill>
+          <a:ln>
+            <a:noFill/>
+          </a:ln>
+        </p:spPr>
+        <p:style>
+          <a:lnRef idx="1">
+            <a:schemeClr val="accent1"/>
+          </a:lnRef>
+          <a:fillRef idx="3">
+            <a:schemeClr val="accent1"/>
+          </a:fillRef>
+          <a:effectRef idx="2">
+            <a:schemeClr val="accent1"/>
+          </a:effectRef>
+          <a:fontRef idx="minor">
+            <a:schemeClr val="lt1"/>
+          </a:fontRef>
+        </p:style>
+        <p:txBody>
+          <a:bodyPr rtlCol="0" anchor="ctr"/>
+          <a:lstStyle/>
+          <a:p>
+            <a:pPr algn="ctr"/>
+          </a:p>
+        </p:txBody>
+      </p:sp>
+      <p:sp>
+        <p:nvSpPr>
+          <p:cNvPr id="6" name="TextBox 5"/>
           <p:cNvSpPr txBox="1"/>
           <p:nvPr/>
         </p:nvSpPr>
         <p:spPr>
           <a:xfrm>
-            <a:off x="731520" y="1371600"/>
-            <a:ext cx="10698480" cy="4206240"/>
+            <a:off x="1005840" y="1463040"/>
+            <a:ext cx="10058400" cy="1518920"/>
           </a:xfrm>
           <a:prstGeom prst="rect">
             <a:avLst/>
@@ -4162,62 +8971,110 @@
         </p:spPr>
         <p:txBody>
           <a:bodyPr wrap="square">
-            <a:normAutofit/>
+            <a:spAutoFit/>
           </a:bodyPr>
           <a:lstStyle/>
           <a:p>
             <a:pPr algn="l"/>
             <a:r>
-              <a:rPr sz="2200" b="0">
+              <a:rPr sz="1300" b="0">
                 <a:solidFill>
                   <a:srgbClr val="262626"/>
                 </a:solidFill>
-                <a:latin typeface="メイリオ"/>
-              </a:rPr>
-              <a:t>・Renderダッシュボード（dashboard.render.com）で新規Web Serviceを作成</a:t>
-            </a:r>
-          </a:p>
-          <a:p>
-            <a:pPr algn="l"/>
-            <a:r>
-              <a:rPr sz="2200" b="0">
+                <a:latin typeface="Courier New"/>
+              </a:rPr>
+              <a:t>jma_mcp_remote/</a:t>
+            </a:r>
+          </a:p>
+          <a:p>
+            <a:pPr algn="l"/>
+            <a:r>
+              <a:rPr sz="1300" b="0">
                 <a:solidFill>
                   <a:srgbClr val="262626"/>
                 </a:solidFill>
-                <a:latin typeface="メイリオ"/>
-              </a:rPr>
-              <a:t>・GitHubリポジトリ masauehr/jma-mcp-remote を接続</a:t>
-            </a:r>
-          </a:p>
-          <a:p>
-            <a:pPr algn="l"/>
-            <a:r>
-              <a:rPr sz="2200" b="0">
+                <a:latin typeface="Courier New"/>
+              </a:rPr>
+              <a:t>├── server.py              # jma_mcp/server.py から起動部分のみ SSE に変更</a:t>
+            </a:r>
+          </a:p>
+          <a:p>
+            <a:pPr algn="l"/>
+            <a:r>
+              <a:rPr sz="1300" b="0">
                 <a:solidFill>
                   <a:srgbClr val="262626"/>
                 </a:solidFill>
-                <a:latin typeface="メイリオ"/>
-              </a:rPr>
-              <a:t>・Build Command: pip install -r requirements.txt / Start Command: python server.py</a:t>
-            </a:r>
-          </a:p>
-          <a:p>
-            <a:pPr algn="l"/>
-            <a:r>
-              <a:rPr sz="2200" b="0">
+                <a:latin typeface="Courier New"/>
+              </a:rPr>
+              <a:t>├── areas.py               # jma_mcp/areas.py からコピー</a:t>
+            </a:r>
+          </a:p>
+          <a:p>
+            <a:pPr algn="l"/>
+            <a:r>
+              <a:rPr sz="1300" b="0">
                 <a:solidFill>
                   <a:srgbClr val="262626"/>
                 </a:solidFill>
-                <a:latin typeface="メイリオ"/>
-              </a:rPr>
-              <a:t>・ログに「Uvicorn running on http://0.0.0.0:XXXXX」と出れば起動成功</a:t>
-            </a:r>
-          </a:p>
-        </p:txBody>
-      </p:sp>
-      <p:sp>
-        <p:nvSpPr>
-          <p:cNvPr id="5" name="Rectangle 4"/>
+                <a:latin typeface="Courier New"/>
+              </a:rPr>
+              <a:t>├── requirements.txt       # mcp, requests, uvicorn, starlette</a:t>
+            </a:r>
+          </a:p>
+          <a:p>
+            <a:pPr algn="l"/>
+            <a:r>
+              <a:rPr sz="1300" b="0">
+                <a:solidFill>
+                  <a:srgbClr val="262626"/>
+                </a:solidFill>
+                <a:latin typeface="Courier New"/>
+              </a:rPr>
+              <a:t>├── render.yaml            # Render デプロイ設定</a:t>
+            </a:r>
+          </a:p>
+          <a:p>
+            <a:pPr algn="l"/>
+            <a:r>
+              <a:rPr sz="1300" b="0">
+                <a:solidFill>
+                  <a:srgbClr val="262626"/>
+                </a:solidFill>
+                <a:latin typeface="Courier New"/>
+              </a:rPr>
+              <a:t>├── jma-mcp-remote.md      # このプロジェクトの詳細マニュアル</a:t>
+            </a:r>
+          </a:p>
+          <a:p>
+            <a:pPr algn="l"/>
+            <a:r>
+              <a:rPr sz="1300" b="0">
+                <a:solidFill>
+                  <a:srgbClr val="262626"/>
+                </a:solidFill>
+                <a:latin typeface="Courier New"/>
+              </a:rPr>
+              <a:t>├── .mcp.json              # Claude Code からリモート接続する場合の設定（gitignore済み）</a:t>
+            </a:r>
+          </a:p>
+          <a:p>
+            <a:pPr algn="l"/>
+            <a:r>
+              <a:rPr sz="1300" b="0">
+                <a:solidFill>
+                  <a:srgbClr val="262626"/>
+                </a:solidFill>
+                <a:latin typeface="Courier New"/>
+              </a:rPr>
+              <a:t>└── .gitignore</a:t>
+            </a:r>
+          </a:p>
+        </p:txBody>
+      </p:sp>
+      <p:sp>
+        <p:nvSpPr>
+          <p:cNvPr id="7" name="Rectangle 6"/>
           <p:cNvSpPr/>
           <p:nvPr/>
         </p:nvSpPr>
@@ -4357,206 +9214,449 @@
                 </a:solidFill>
                 <a:latin typeface="メイリオ"/>
               </a:rPr>
-              <a:t>Claude.aiへの接続手順</a:t>
-            </a:r>
-          </a:p>
-        </p:txBody>
-      </p:sp>
-      <p:sp>
-        <p:nvSpPr>
-          <p:cNvPr id="4" name="TextBox 3"/>
-          <p:cNvSpPr txBox="1"/>
+              <a:t>ローカル版との違い</a:t>
+            </a:r>
+          </a:p>
+        </p:txBody>
+      </p:sp>
+      <p:graphicFrame>
+        <p:nvGraphicFramePr>
+          <p:cNvPr id="4" name="Table 3"/>
+          <p:cNvGraphicFramePr>
+            <a:graphicFrameLocks noGrp="1"/>
+          </p:cNvGraphicFramePr>
           <p:nvPr/>
-        </p:nvSpPr>
-        <p:spPr>
-          <a:xfrm>
-            <a:off x="731520" y="1371600"/>
-            <a:ext cx="10698480" cy="4206240"/>
-          </a:xfrm>
-          <a:prstGeom prst="rect">
-            <a:avLst/>
-          </a:prstGeom>
-          <a:noFill/>
-        </p:spPr>
-        <p:txBody>
-          <a:bodyPr wrap="square">
-            <a:normAutofit/>
-          </a:bodyPr>
-          <a:lstStyle/>
-          <a:p>
-            <a:pPr algn="l"/>
-            <a:r>
-              <a:rPr sz="2200" b="0">
-                <a:solidFill>
-                  <a:srgbClr val="262626"/>
-                </a:solidFill>
-                <a:latin typeface="メイリオ"/>
-              </a:rPr>
-              <a:t>・設定 → コネクタ → カスタムコネクタを追加</a:t>
-            </a:r>
-          </a:p>
-          <a:p>
-            <a:pPr algn="l"/>
-            <a:r>
-              <a:rPr sz="2200" b="0">
-                <a:solidFill>
-                  <a:srgbClr val="262626"/>
-                </a:solidFill>
-                <a:latin typeface="メイリオ"/>
-              </a:rPr>
-              <a:t>・URLに https://jma-mcp-remote.onrender.com/sse を登録</a:t>
-            </a:r>
-          </a:p>
-          <a:p>
-            <a:pPr algn="l"/>
-            <a:r>
-              <a:rPr sz="2200" b="0">
-                <a:solidFill>
-                  <a:srgbClr val="262626"/>
-                </a:solidFill>
-                <a:latin typeface="メイリオ"/>
-              </a:rPr>
-              <a:t>・Web版で登録した設定はデスクトップアプリ・iPhone版にも自動共有される</a:t>
-            </a:r>
-          </a:p>
-          <a:p>
-            <a:pPr algn="l"/>
-            <a:r>
-              <a:rPr sz="2200" b="0">
-                <a:solidFill>
-                  <a:srgbClr val="262626"/>
-                </a:solidFill>
-                <a:latin typeface="メイリオ"/>
-              </a:rPr>
-              <a:t>・iPhone版もコネクタをONにすれば動作する</a:t>
-            </a:r>
-          </a:p>
-        </p:txBody>
-      </p:sp>
+        </p:nvGraphicFramePr>
+        <p:xfrm>
+          <a:off x="731520" y="1371600"/>
+          <a:ext cx="10698480" cy="1920240"/>
+        </p:xfrm>
+        <a:graphic>
+          <a:graphicData uri="http://schemas.openxmlformats.org/drawingml/2006/table">
+            <a:tbl>
+              <a:tblPr firstRow="1">
+                <a:tableStyleId>{5C22544A-7EE6-4342-B048-85BDC9FD1C3A}</a:tableStyleId>
+              </a:tblPr>
+              <a:tblGrid>
+                <a:gridCol w="3566160"/>
+                <a:gridCol w="3566160"/>
+                <a:gridCol w="3566160"/>
+              </a:tblGrid>
+              <a:tr h="320040">
+                <a:tc>
+                  <a:txBody>
+                    <a:bodyPr/>
+                    <a:lstStyle/>
+                    <a:p>
+                      <a:r>
+                        <a:rPr sz="1400" b="1">
+                          <a:solidFill>
+                            <a:srgbClr val="FFFFFF"/>
+                          </a:solidFill>
+                          <a:latin typeface="メイリオ"/>
+                        </a:rPr>
+                        <a:t>比較項目</a:t>
+                      </a:r>
+                    </a:p>
+                  </a:txBody>
+                  <a:tcPr anchor="ctr" marL="73152" marR="73152" marT="27432" marB="27432">
+                    <a:solidFill>
+                      <a:srgbClr val="1F497D"/>
+                    </a:solidFill>
+                  </a:tcPr>
+                </a:tc>
+                <a:tc>
+                  <a:txBody>
+                    <a:bodyPr/>
+                    <a:lstStyle/>
+                    <a:p>
+                      <a:r>
+                        <a:rPr sz="1400" b="1">
+                          <a:solidFill>
+                            <a:srgbClr val="FFFFFF"/>
+                          </a:solidFill>
+                          <a:latin typeface="メイリオ"/>
+                        </a:rPr>
+                        <a:t>jma_mcp（ローカル版）</a:t>
+                      </a:r>
+                    </a:p>
+                  </a:txBody>
+                  <a:tcPr anchor="ctr" marL="73152" marR="73152" marT="27432" marB="27432">
+                    <a:solidFill>
+                      <a:srgbClr val="1F497D"/>
+                    </a:solidFill>
+                  </a:tcPr>
+                </a:tc>
+                <a:tc>
+                  <a:txBody>
+                    <a:bodyPr/>
+                    <a:lstStyle/>
+                    <a:p>
+                      <a:r>
+                        <a:rPr sz="1400" b="1">
+                          <a:solidFill>
+                            <a:srgbClr val="FFFFFF"/>
+                          </a:solidFill>
+                          <a:latin typeface="メイリオ"/>
+                        </a:rPr>
+                        <a:t>jma_mcp_remote（リモート版）</a:t>
+                      </a:r>
+                    </a:p>
+                  </a:txBody>
+                  <a:tcPr anchor="ctr" marL="73152" marR="73152" marT="27432" marB="27432">
+                    <a:solidFill>
+                      <a:srgbClr val="1F497D"/>
+                    </a:solidFill>
+                  </a:tcPr>
+                </a:tc>
+              </a:tr>
+              <a:tr h="320040">
+                <a:tc>
+                  <a:txBody>
+                    <a:bodyPr/>
+                    <a:lstStyle/>
+                    <a:p>
+                      <a:r>
+                        <a:rPr sz="1400" b="0">
+                          <a:solidFill>
+                            <a:srgbClr val="262626"/>
+                          </a:solidFill>
+                          <a:latin typeface="メイリオ"/>
+                        </a:rPr>
+                        <a:t>通信方式</a:t>
+                      </a:r>
+                    </a:p>
+                  </a:txBody>
+                  <a:tcPr anchor="ctr" marL="73152" marR="73152" marT="27432" marB="27432">
+                    <a:solidFill>
+                      <a:srgbClr val="FFFFFF"/>
+                    </a:solidFill>
+                  </a:tcPr>
+                </a:tc>
+                <a:tc>
+                  <a:txBody>
+                    <a:bodyPr/>
+                    <a:lstStyle/>
+                    <a:p>
+                      <a:r>
+                        <a:rPr sz="1400" b="0">
+                          <a:solidFill>
+                            <a:srgbClr val="262626"/>
+                          </a:solidFill>
+                          <a:latin typeface="メイリオ"/>
+                        </a:rPr>
+                        <a:t>stdio（標準入出力）</a:t>
+                      </a:r>
+                    </a:p>
+                  </a:txBody>
+                  <a:tcPr anchor="ctr" marL="73152" marR="73152" marT="27432" marB="27432">
+                    <a:solidFill>
+                      <a:srgbClr val="FFFFFF"/>
+                    </a:solidFill>
+                  </a:tcPr>
+                </a:tc>
+                <a:tc>
+                  <a:txBody>
+                    <a:bodyPr/>
+                    <a:lstStyle/>
+                    <a:p>
+                      <a:r>
+                        <a:rPr sz="1400" b="0">
+                          <a:solidFill>
+                            <a:srgbClr val="262626"/>
+                          </a:solidFill>
+                          <a:latin typeface="メイリオ"/>
+                        </a:rPr>
+                        <a:t>HTTP + SSE</a:t>
+                      </a:r>
+                    </a:p>
+                  </a:txBody>
+                  <a:tcPr anchor="ctr" marL="73152" marR="73152" marT="27432" marB="27432">
+                    <a:solidFill>
+                      <a:srgbClr val="FFFFFF"/>
+                    </a:solidFill>
+                  </a:tcPr>
+                </a:tc>
+              </a:tr>
+              <a:tr h="320040">
+                <a:tc>
+                  <a:txBody>
+                    <a:bodyPr/>
+                    <a:lstStyle/>
+                    <a:p>
+                      <a:r>
+                        <a:rPr sz="1400" b="0">
+                          <a:solidFill>
+                            <a:srgbClr val="262626"/>
+                          </a:solidFill>
+                          <a:latin typeface="メイリオ"/>
+                        </a:rPr>
+                        <a:t>起動方法</a:t>
+                      </a:r>
+                    </a:p>
+                  </a:txBody>
+                  <a:tcPr anchor="ctr" marL="73152" marR="73152" marT="27432" marB="27432">
+                    <a:solidFill>
+                      <a:srgbClr val="FFFFFF"/>
+                    </a:solidFill>
+                  </a:tcPr>
+                </a:tc>
+                <a:tc>
+                  <a:txBody>
+                    <a:bodyPr/>
+                    <a:lstStyle/>
+                    <a:p>
+                      <a:r>
+                        <a:rPr sz="1400" b="0">
+                          <a:solidFill>
+                            <a:srgbClr val="262626"/>
+                          </a:solidFill>
+                          <a:latin typeface="メイリオ"/>
+                        </a:rPr>
+                        <a:t>Claude Code がサブプロセス起動</a:t>
+                      </a:r>
+                    </a:p>
+                  </a:txBody>
+                  <a:tcPr anchor="ctr" marL="73152" marR="73152" marT="27432" marB="27432">
+                    <a:solidFill>
+                      <a:srgbClr val="FFFFFF"/>
+                    </a:solidFill>
+                  </a:tcPr>
+                </a:tc>
+                <a:tc>
+                  <a:txBody>
+                    <a:bodyPr/>
+                    <a:lstStyle/>
+                    <a:p>
+                      <a:r>
+                        <a:rPr sz="1400" b="0">
+                          <a:solidFill>
+                            <a:srgbClr val="262626"/>
+                          </a:solidFill>
+                          <a:latin typeface="メイリオ"/>
+                        </a:rPr>
+                        <a:t>Render 上で常駐</a:t>
+                      </a:r>
+                    </a:p>
+                  </a:txBody>
+                  <a:tcPr anchor="ctr" marL="73152" marR="73152" marT="27432" marB="27432">
+                    <a:solidFill>
+                      <a:srgbClr val="FFFFFF"/>
+                    </a:solidFill>
+                  </a:tcPr>
+                </a:tc>
+              </a:tr>
+              <a:tr h="320040">
+                <a:tc>
+                  <a:txBody>
+                    <a:bodyPr/>
+                    <a:lstStyle/>
+                    <a:p>
+                      <a:r>
+                        <a:rPr sz="1400" b="0">
+                          <a:solidFill>
+                            <a:srgbClr val="262626"/>
+                          </a:solidFill>
+                          <a:latin typeface="メイリオ"/>
+                        </a:rPr>
+                        <a:t>対応クライアント</a:t>
+                      </a:r>
+                    </a:p>
+                  </a:txBody>
+                  <a:tcPr anchor="ctr" marL="73152" marR="73152" marT="27432" marB="27432">
+                    <a:solidFill>
+                      <a:srgbClr val="FFFFFF"/>
+                    </a:solidFill>
+                  </a:tcPr>
+                </a:tc>
+                <a:tc>
+                  <a:txBody>
+                    <a:bodyPr/>
+                    <a:lstStyle/>
+                    <a:p>
+                      <a:r>
+                        <a:rPr sz="1400" b="0">
+                          <a:solidFill>
+                            <a:srgbClr val="262626"/>
+                          </a:solidFill>
+                          <a:latin typeface="メイリオ"/>
+                        </a:rPr>
+                        <a:t>Claude Code（CLI）</a:t>
+                      </a:r>
+                    </a:p>
+                  </a:txBody>
+                  <a:tcPr anchor="ctr" marL="73152" marR="73152" marT="27432" marB="27432">
+                    <a:solidFill>
+                      <a:srgbClr val="FFFFFF"/>
+                    </a:solidFill>
+                  </a:tcPr>
+                </a:tc>
+                <a:tc>
+                  <a:txBody>
+                    <a:bodyPr/>
+                    <a:lstStyle/>
+                    <a:p>
+                      <a:r>
+                        <a:rPr sz="1400" b="0">
+                          <a:solidFill>
+                            <a:srgbClr val="262626"/>
+                          </a:solidFill>
+                          <a:latin typeface="メイリオ"/>
+                        </a:rPr>
+                        <a:t>Claude.ai Web・デスクトップアプリ</a:t>
+                      </a:r>
+                    </a:p>
+                  </a:txBody>
+                  <a:tcPr anchor="ctr" marL="73152" marR="73152" marT="27432" marB="27432">
+                    <a:solidFill>
+                      <a:srgbClr val="FFFFFF"/>
+                    </a:solidFill>
+                  </a:tcPr>
+                </a:tc>
+              </a:tr>
+              <a:tr h="320040">
+                <a:tc>
+                  <a:txBody>
+                    <a:bodyPr/>
+                    <a:lstStyle/>
+                    <a:p>
+                      <a:r>
+                        <a:rPr sz="1400" b="0">
+                          <a:solidFill>
+                            <a:srgbClr val="262626"/>
+                          </a:solidFill>
+                          <a:latin typeface="メイリオ"/>
+                        </a:rPr>
+                        <a:t>コスト</a:t>
+                      </a:r>
+                    </a:p>
+                  </a:txBody>
+                  <a:tcPr anchor="ctr" marL="73152" marR="73152" marT="27432" marB="27432">
+                    <a:solidFill>
+                      <a:srgbClr val="FFFFFF"/>
+                    </a:solidFill>
+                  </a:tcPr>
+                </a:tc>
+                <a:tc>
+                  <a:txBody>
+                    <a:bodyPr/>
+                    <a:lstStyle/>
+                    <a:p>
+                      <a:r>
+                        <a:rPr sz="1400" b="0">
+                          <a:solidFill>
+                            <a:srgbClr val="262626"/>
+                          </a:solidFill>
+                          <a:latin typeface="メイリオ"/>
+                        </a:rPr>
+                        <a:t>無料（ローカル実行）</a:t>
+                      </a:r>
+                    </a:p>
+                  </a:txBody>
+                  <a:tcPr anchor="ctr" marL="73152" marR="73152" marT="27432" marB="27432">
+                    <a:solidFill>
+                      <a:srgbClr val="FFFFFF"/>
+                    </a:solidFill>
+                  </a:tcPr>
+                </a:tc>
+                <a:tc>
+                  <a:txBody>
+                    <a:bodyPr/>
+                    <a:lstStyle/>
+                    <a:p>
+                      <a:r>
+                        <a:rPr sz="1400" b="0">
+                          <a:solidFill>
+                            <a:srgbClr val="262626"/>
+                          </a:solidFill>
+                          <a:latin typeface="メイリオ"/>
+                        </a:rPr>
+                        <a:t>Render 無料プラン（スリープあり）</a:t>
+                      </a:r>
+                    </a:p>
+                  </a:txBody>
+                  <a:tcPr anchor="ctr" marL="73152" marR="73152" marT="27432" marB="27432">
+                    <a:solidFill>
+                      <a:srgbClr val="FFFFFF"/>
+                    </a:solidFill>
+                  </a:tcPr>
+                </a:tc>
+              </a:tr>
+              <a:tr h="320040">
+                <a:tc>
+                  <a:txBody>
+                    <a:bodyPr/>
+                    <a:lstStyle/>
+                    <a:p>
+                      <a:r>
+                        <a:rPr sz="1400" b="0">
+                          <a:solidFill>
+                            <a:srgbClr val="262626"/>
+                          </a:solidFill>
+                          <a:latin typeface="メイリオ"/>
+                        </a:rPr>
+                        <a:t>ツール内容</a:t>
+                      </a:r>
+                    </a:p>
+                  </a:txBody>
+                  <a:tcPr anchor="ctr" marL="73152" marR="73152" marT="27432" marB="27432">
+                    <a:solidFill>
+                      <a:srgbClr val="FFFFFF"/>
+                    </a:solidFill>
+                  </a:tcPr>
+                </a:tc>
+                <a:tc>
+                  <a:txBody>
+                    <a:bodyPr/>
+                    <a:lstStyle/>
+                    <a:p>
+                      <a:r>
+                        <a:rPr sz="1400" b="0">
+                          <a:solidFill>
+                            <a:srgbClr val="262626"/>
+                          </a:solidFill>
+                          <a:latin typeface="メイリオ"/>
+                        </a:rPr>
+                        <a:t>全19種</a:t>
+                      </a:r>
+                    </a:p>
+                  </a:txBody>
+                  <a:tcPr anchor="ctr" marL="73152" marR="73152" marT="27432" marB="27432">
+                    <a:solidFill>
+                      <a:srgbClr val="FFFFFF"/>
+                    </a:solidFill>
+                  </a:tcPr>
+                </a:tc>
+                <a:tc>
+                  <a:txBody>
+                    <a:bodyPr/>
+                    <a:lstStyle/>
+                    <a:p>
+                      <a:r>
+                        <a:rPr sz="1400" b="0">
+                          <a:solidFill>
+                            <a:srgbClr val="262626"/>
+                          </a:solidFill>
+                          <a:latin typeface="メイリオ"/>
+                        </a:rPr>
+                        <a:t>同一（server.py を共有）</a:t>
+                      </a:r>
+                    </a:p>
+                  </a:txBody>
+                  <a:tcPr anchor="ctr" marL="73152" marR="73152" marT="27432" marB="27432">
+                    <a:solidFill>
+                      <a:srgbClr val="FFFFFF"/>
+                    </a:solidFill>
+                  </a:tcPr>
+                </a:tc>
+              </a:tr>
+            </a:tbl>
+          </a:graphicData>
+        </a:graphic>
+      </p:graphicFrame>
       <p:sp>
         <p:nvSpPr>
           <p:cNvPr id="5" name="Rectangle 4"/>
-          <p:cNvSpPr/>
-          <p:nvPr/>
-        </p:nvSpPr>
-        <p:spPr>
-          <a:xfrm>
-            <a:off x="731520" y="5486400"/>
-            <a:ext cx="10698480" cy="822960"/>
-          </a:xfrm>
-          <a:prstGeom prst="rect">
-            <a:avLst/>
-          </a:prstGeom>
-          <a:solidFill>
-            <a:srgbClr val="F2F2F2"/>
-          </a:solidFill>
-          <a:ln>
-            <a:noFill/>
-          </a:ln>
-        </p:spPr>
-        <p:style>
-          <a:lnRef idx="1">
-            <a:schemeClr val="accent1"/>
-          </a:lnRef>
-          <a:fillRef idx="3">
-            <a:schemeClr val="accent1"/>
-          </a:fillRef>
-          <a:effectRef idx="2">
-            <a:schemeClr val="accent1"/>
-          </a:effectRef>
-          <a:fontRef idx="minor">
-            <a:schemeClr val="lt1"/>
-          </a:fontRef>
-        </p:style>
-        <p:txBody>
-          <a:bodyPr rtlCol="0" anchor="ctr"/>
-          <a:lstStyle/>
-          <a:p>
-            <a:pPr algn="ctr"/>
-          </a:p>
-        </p:txBody>
-      </p:sp>
-      <p:sp>
-        <p:nvSpPr>
-          <p:cNvPr id="6" name="Rectangle 5"/>
-          <p:cNvSpPr/>
-          <p:nvPr/>
-        </p:nvSpPr>
-        <p:spPr>
-          <a:xfrm>
-            <a:off x="731520" y="5486400"/>
-            <a:ext cx="54864" cy="822960"/>
-          </a:xfrm>
-          <a:prstGeom prst="rect">
-            <a:avLst/>
-          </a:prstGeom>
-          <a:solidFill>
-            <a:srgbClr val="1F497D"/>
-          </a:solidFill>
-          <a:ln>
-            <a:noFill/>
-          </a:ln>
-        </p:spPr>
-        <p:style>
-          <a:lnRef idx="1">
-            <a:schemeClr val="accent1"/>
-          </a:lnRef>
-          <a:fillRef idx="3">
-            <a:schemeClr val="accent1"/>
-          </a:fillRef>
-          <a:effectRef idx="2">
-            <a:schemeClr val="accent1"/>
-          </a:effectRef>
-          <a:fontRef idx="minor">
-            <a:schemeClr val="lt1"/>
-          </a:fontRef>
-        </p:style>
-        <p:txBody>
-          <a:bodyPr rtlCol="0" anchor="ctr"/>
-          <a:lstStyle/>
-          <a:p>
-            <a:pPr algn="ctr"/>
-          </a:p>
-        </p:txBody>
-      </p:sp>
-      <p:sp>
-        <p:nvSpPr>
-          <p:cNvPr id="7" name="TextBox 6"/>
-          <p:cNvSpPr txBox="1"/>
-          <p:nvPr/>
-        </p:nvSpPr>
-        <p:spPr>
-          <a:xfrm>
-            <a:off x="960120" y="5559552"/>
-            <a:ext cx="10332720" cy="676656"/>
-          </a:xfrm>
-          <a:prstGeom prst="rect">
-            <a:avLst/>
-          </a:prstGeom>
-          <a:noFill/>
-        </p:spPr>
-        <p:txBody>
-          <a:bodyPr wrap="square">
-            <a:normAutofit/>
-          </a:bodyPr>
-          <a:lstStyle/>
-          <a:p>
-            <a:pPr algn="l"/>
-            <a:r>
-              <a:rPr sz="1600" b="0">
-                <a:solidFill>
-                  <a:srgbClr val="1F497D"/>
-                </a:solidFill>
-                <a:latin typeface="メイリオ"/>
-              </a:rPr>
-              <a:t>同じURLを再登録しようとすると「A server with this URL already exists.」と出るが、登録済みという意味なので問題ない</a:t>
-            </a:r>
-          </a:p>
-        </p:txBody>
-      </p:sp>
-      <p:sp>
-        <p:nvSpPr>
-          <p:cNvPr id="8" name="Rectangle 7"/>
           <p:cNvSpPr/>
           <p:nvPr/>
         </p:nvSpPr>
@@ -4696,7 +9796,7 @@
                 </a:solidFill>
                 <a:latin typeface="メイリオ"/>
               </a:rPr>
-              <a:t>出典リンク表示設定</a:t>
+              <a:t>Claude.ai への接続</a:t>
             </a:r>
           </a:p>
         </p:txBody>
@@ -4710,7 +9810,7 @@
         <p:spPr>
           <a:xfrm>
             <a:off x="731520" y="1371600"/>
-            <a:ext cx="10698480" cy="4206240"/>
+            <a:ext cx="10698480" cy="1184910"/>
           </a:xfrm>
           <a:prstGeom prst="rect">
             <a:avLst/>
@@ -4731,7 +9831,7 @@
                 </a:solidFill>
                 <a:latin typeface="メイリオ"/>
               </a:rPr>
-              <a:t>・Claude.aiではCLAUDE.mdが読み込まれないため、出典URLの表示にはProjectsの設定が必要</a:t>
+              <a:t>1. Claude.ai 設定 → コネクタ</a:t>
             </a:r>
           </a:p>
           <a:p>
@@ -4743,7 +9843,7 @@
                 </a:solidFill>
                 <a:latin typeface="メイリオ"/>
               </a:rPr>
-              <a:t>・Projects → 手順を編集、のカスタム指示欄に「ツール結果末尾の出典URLをそのまま表示すること」という指示を追加する</a:t>
+              <a:t>2. カスタムコネクタを追加</a:t>
             </a:r>
           </a:p>
           <a:p>
@@ -4755,7 +9855,7 @@
                 </a:solidFill>
                 <a:latin typeface="メイリオ"/>
               </a:rPr>
-              <a:t>・この設定はWeb版・デスクトップアプリ・iPhone版すべてで共有される</a:t>
+              <a:t>3. URL: https://jma-mcp-remote.onrender.com/sse</a:t>
             </a:r>
           </a:p>
         </p:txBody>
@@ -4763,6 +9863,127 @@
       <p:sp>
         <p:nvSpPr>
           <p:cNvPr id="5" name="Rectangle 4"/>
+          <p:cNvSpPr/>
+          <p:nvPr/>
+        </p:nvSpPr>
+        <p:spPr>
+          <a:xfrm>
+            <a:off x="731520" y="2556510"/>
+            <a:ext cx="10698480" cy="822960"/>
+          </a:xfrm>
+          <a:prstGeom prst="rect">
+            <a:avLst/>
+          </a:prstGeom>
+          <a:solidFill>
+            <a:srgbClr val="F2F2F2"/>
+          </a:solidFill>
+          <a:ln>
+            <a:noFill/>
+          </a:ln>
+        </p:spPr>
+        <p:style>
+          <a:lnRef idx="1">
+            <a:schemeClr val="accent1"/>
+          </a:lnRef>
+          <a:fillRef idx="3">
+            <a:schemeClr val="accent1"/>
+          </a:fillRef>
+          <a:effectRef idx="2">
+            <a:schemeClr val="accent1"/>
+          </a:effectRef>
+          <a:fontRef idx="minor">
+            <a:schemeClr val="lt1"/>
+          </a:fontRef>
+        </p:style>
+        <p:txBody>
+          <a:bodyPr rtlCol="0" anchor="ctr"/>
+          <a:lstStyle/>
+          <a:p>
+            <a:pPr algn="ctr"/>
+          </a:p>
+        </p:txBody>
+      </p:sp>
+      <p:sp>
+        <p:nvSpPr>
+          <p:cNvPr id="6" name="Rectangle 5"/>
+          <p:cNvSpPr/>
+          <p:nvPr/>
+        </p:nvSpPr>
+        <p:spPr>
+          <a:xfrm>
+            <a:off x="731520" y="2556510"/>
+            <a:ext cx="54864" cy="822960"/>
+          </a:xfrm>
+          <a:prstGeom prst="rect">
+            <a:avLst/>
+          </a:prstGeom>
+          <a:solidFill>
+            <a:srgbClr val="1F497D"/>
+          </a:solidFill>
+          <a:ln>
+            <a:noFill/>
+          </a:ln>
+        </p:spPr>
+        <p:style>
+          <a:lnRef idx="1">
+            <a:schemeClr val="accent1"/>
+          </a:lnRef>
+          <a:fillRef idx="3">
+            <a:schemeClr val="accent1"/>
+          </a:fillRef>
+          <a:effectRef idx="2">
+            <a:schemeClr val="accent1"/>
+          </a:effectRef>
+          <a:fontRef idx="minor">
+            <a:schemeClr val="lt1"/>
+          </a:fontRef>
+        </p:style>
+        <p:txBody>
+          <a:bodyPr rtlCol="0" anchor="ctr"/>
+          <a:lstStyle/>
+          <a:p>
+            <a:pPr algn="ctr"/>
+          </a:p>
+        </p:txBody>
+      </p:sp>
+      <p:sp>
+        <p:nvSpPr>
+          <p:cNvPr id="7" name="TextBox 6"/>
+          <p:cNvSpPr txBox="1"/>
+          <p:nvPr/>
+        </p:nvSpPr>
+        <p:spPr>
+          <a:xfrm>
+            <a:off x="960120" y="2629662"/>
+            <a:ext cx="10332720" cy="676656"/>
+          </a:xfrm>
+          <a:prstGeom prst="rect">
+            <a:avLst/>
+          </a:prstGeom>
+          <a:noFill/>
+        </p:spPr>
+        <p:txBody>
+          <a:bodyPr wrap="square">
+            <a:normAutofit/>
+          </a:bodyPr>
+          <a:lstStyle/>
+          <a:p>
+            <a:pPr algn="l"/>
+            <a:r>
+              <a:rPr sz="1600" b="0">
+                <a:solidFill>
+                  <a:srgbClr val="1F497D"/>
+                </a:solidFill>
+                <a:latin typeface="メイリオ"/>
+              </a:rPr>
+              <a:t>Web版で登録した設定はデスクトップアプリにも自動共有される。</a:t>
+            </a:r>
+          </a:p>
+        </p:txBody>
+      </p:sp>
+      <p:sp>
+        <p:nvSpPr>
+          <p:cNvPr id="8" name="Rectangle 7"/>
           <p:cNvSpPr/>
           <p:nvPr/>
         </p:nvSpPr>
@@ -4902,7 +10123,7 @@
                 </a:solidFill>
                 <a:latin typeface="メイリオ"/>
               </a:rPr>
-              <a:t>クライアント別対応状況</a:t>
+              <a:t>注意事項</a:t>
             </a:r>
           </a:p>
         </p:txBody>
@@ -4916,7 +10137,7 @@
         <p:spPr>
           <a:xfrm>
             <a:off x="731520" y="1371600"/>
-            <a:ext cx="10698480" cy="4206240"/>
+            <a:ext cx="10698480" cy="1534160"/>
           </a:xfrm>
           <a:prstGeom prst="rect">
             <a:avLst/>
@@ -4937,7 +10158,7 @@
                 </a:solidFill>
                 <a:latin typeface="メイリオ"/>
               </a:rPr>
-              <a:t>・Claude Code（CLI）: ローカル版を使用（.mcp.json で接続）</a:t>
+              <a:t>・Render 無料プランは15分間アクセスがないとスリープ。次回アクセス時に30〜60秒かかる。</a:t>
             </a:r>
           </a:p>
           <a:p>
@@ -4949,31 +10170,7 @@
                 </a:solidFill>
                 <a:latin typeface="メイリオ"/>
               </a:rPr>
-              <a:t>・Claude.ai Web版・デスクトップアプリ: リモート版を使用（コネクタ登録済み）</a:t>
-            </a:r>
-          </a:p>
-          <a:p>
-            <a:pPr algn="l"/>
-            <a:r>
-              <a:rPr sz="2200" b="0">
-                <a:solidFill>
-                  <a:srgbClr val="262626"/>
-                </a:solidFill>
-                <a:latin typeface="メイリオ"/>
-              </a:rPr>
-              <a:t>・Claude iPhone版: リモート版を使用（コネクタをONにすれば動作）</a:t>
-            </a:r>
-          </a:p>
-          <a:p>
-            <a:pPr algn="l"/>
-            <a:r>
-              <a:rPr sz="2200" b="0">
-                <a:solidFill>
-                  <a:srgbClr val="262626"/>
-                </a:solidFill>
-                <a:latin typeface="メイリオ"/>
-              </a:rPr>
-              <a:t>・いずれのクライアントもMCP対応・気象庁データ取得が可能</a:t>
+              <a:t>・jma_mcp/server.py にツールを追加した場合は jma_mcp_remote/server.py にも反映すること（差分は起動部分のみ）。</a:t>
             </a:r>
           </a:p>
         </p:txBody>
@@ -5035,7 +10232,7 @@
     <p:bg>
       <p:bgPr>
         <a:solidFill>
-          <a:srgbClr val="1F497D"/>
+          <a:srgbClr val="F2F2F2"/>
         </a:solidFill>
         <a:effectLst/>
       </p:bgPr>
@@ -5049,55 +10246,20 @@
       <p:grpSpPr/>
       <p:sp>
         <p:nvSpPr>
-          <p:cNvPr id="2" name="TextBox 1"/>
-          <p:cNvSpPr txBox="1"/>
-          <p:nvPr/>
-        </p:nvSpPr>
-        <p:spPr>
-          <a:xfrm>
-            <a:off x="457200" y="274320"/>
-            <a:ext cx="10972800" cy="822960"/>
-          </a:xfrm>
-          <a:prstGeom prst="rect">
-            <a:avLst/>
-          </a:prstGeom>
-          <a:noFill/>
-        </p:spPr>
-        <p:txBody>
-          <a:bodyPr wrap="square">
-            <a:spAutoFit/>
-          </a:bodyPr>
-          <a:lstStyle/>
-          <a:p>
-            <a:pPr algn="ctr"/>
-            <a:r>
-              <a:rPr sz="3600" b="1">
-                <a:solidFill>
-                  <a:srgbClr val="FFFFFF"/>
-                </a:solidFill>
-                <a:latin typeface="メイリオ"/>
-              </a:rPr>
-              <a:t>注意事項・今後の運用</a:t>
-            </a:r>
-          </a:p>
-        </p:txBody>
-      </p:sp>
-      <p:sp>
-        <p:nvSpPr>
-          <p:cNvPr id="3" name="Rectangle 2"/>
+          <p:cNvPr id="2" name="Rectangle 1"/>
           <p:cNvSpPr/>
           <p:nvPr/>
         </p:nvSpPr>
         <p:spPr>
           <a:xfrm>
-            <a:off x="457200" y="1005840"/>
-            <a:ext cx="11274552" cy="45720"/>
+            <a:off x="0" y="0"/>
+            <a:ext cx="12188952" cy="1097280"/>
           </a:xfrm>
           <a:prstGeom prst="rect">
             <a:avLst/>
           </a:prstGeom>
           <a:solidFill>
-            <a:srgbClr val="FFFFFF"/>
+            <a:srgbClr val="1F497D"/>
           </a:solidFill>
           <a:ln>
             <a:noFill/>
@@ -5127,14 +10289,14 @@
       </p:sp>
       <p:sp>
         <p:nvSpPr>
-          <p:cNvPr id="4" name="TextBox 3"/>
+          <p:cNvPr id="3" name="TextBox 2"/>
           <p:cNvSpPr txBox="1"/>
           <p:nvPr/>
         </p:nvSpPr>
         <p:spPr>
           <a:xfrm>
-            <a:off x="731520" y="1280160"/>
-            <a:ext cx="10698480" cy="5029200"/>
+            <a:off x="457200" y="182880"/>
+            <a:ext cx="10972800" cy="731520"/>
           </a:xfrm>
           <a:prstGeom prst="rect">
             <a:avLst/>
@@ -5143,6 +10305,41 @@
         </p:spPr>
         <p:txBody>
           <a:bodyPr wrap="square">
+            <a:spAutoFit/>
+          </a:bodyPr>
+          <a:lstStyle/>
+          <a:p>
+            <a:pPr algn="l"/>
+            <a:r>
+              <a:rPr sz="3200" b="1">
+                <a:solidFill>
+                  <a:srgbClr val="FFFFFF"/>
+                </a:solidFill>
+                <a:latin typeface="メイリオ"/>
+              </a:rPr>
+              <a:t>GitHub</a:t>
+            </a:r>
+          </a:p>
+        </p:txBody>
+      </p:sp>
+      <p:sp>
+        <p:nvSpPr>
+          <p:cNvPr id="4" name="TextBox 3"/>
+          <p:cNvSpPr txBox="1"/>
+          <p:nvPr/>
+        </p:nvSpPr>
+        <p:spPr>
+          <a:xfrm>
+            <a:off x="731520" y="1371600"/>
+            <a:ext cx="10698480" cy="835660"/>
+          </a:xfrm>
+          <a:prstGeom prst="rect">
+            <a:avLst/>
+          </a:prstGeom>
+          <a:noFill/>
+        </p:spPr>
+        <p:txBody>
+          <a:bodyPr wrap="square">
             <a:normAutofit/>
           </a:bodyPr>
           <a:lstStyle/>
@@ -5151,36 +10348,55 @@
             <a:r>
               <a:rPr sz="2200" b="0">
                 <a:solidFill>
-                  <a:srgbClr val="FFFFFF"/>
+                  <a:srgbClr val="262626"/>
                 </a:solidFill>
                 <a:latin typeface="メイリオ"/>
               </a:rPr>
-              <a:t>・Render無料プランは15分間アクセスがないとスリープし、次回アクセス時に起動まで30〜60秒かかる</a:t>
-            </a:r>
-          </a:p>
-          <a:p>
-            <a:pPr algn="l"/>
-            <a:r>
-              <a:rPr sz="2200" b="0">
-                <a:solidFill>
-                  <a:srgbClr val="FFFFFF"/>
-                </a:solidFill>
-                <a:latin typeface="メイリオ"/>
-              </a:rPr>
-              <a:t>・ローカル版（jma_mcp）にツールを追加した場合は、リモート版（jma_mcp_remote/server.py）にも同じ変更を反映する必要がある（差分は起動部分のみ）</a:t>
-            </a:r>
-          </a:p>
-          <a:p>
-            <a:pPr algn="l"/>
-            <a:r>
-              <a:rPr sz="2200" b="0">
-                <a:solidFill>
-                  <a:srgbClr val="FFFFFF"/>
-                </a:solidFill>
-                <a:latin typeface="メイリオ"/>
-              </a:rPr>
-              <a:t>・ローカル版とリモート版を併用し、用途（Claude CodeでのCLI利用か、Web・スマホでの利用か）に応じて使い分けるのが実用的</a:t>
-            </a:r>
+              <a:t>[https://github.com/masauehr/jma-mcp-remote](https://github.com/masauehr/jma-mcp-remote)</a:t>
+            </a:r>
+          </a:p>
+        </p:txBody>
+      </p:sp>
+      <p:sp>
+        <p:nvSpPr>
+          <p:cNvPr id="5" name="Rectangle 4"/>
+          <p:cNvSpPr/>
+          <p:nvPr/>
+        </p:nvSpPr>
+        <p:spPr>
+          <a:xfrm>
+            <a:off x="0" y="6583680"/>
+            <a:ext cx="12188952" cy="274320"/>
+          </a:xfrm>
+          <a:prstGeom prst="rect">
+            <a:avLst/>
+          </a:prstGeom>
+          <a:solidFill>
+            <a:srgbClr val="1F497D"/>
+          </a:solidFill>
+          <a:ln>
+            <a:noFill/>
+          </a:ln>
+        </p:spPr>
+        <p:style>
+          <a:lnRef idx="1">
+            <a:schemeClr val="accent1"/>
+          </a:lnRef>
+          <a:fillRef idx="3">
+            <a:schemeClr val="accent1"/>
+          </a:fillRef>
+          <a:effectRef idx="2">
+            <a:schemeClr val="accent1"/>
+          </a:effectRef>
+          <a:fontRef idx="minor">
+            <a:schemeClr val="lt1"/>
+          </a:fontRef>
+        </p:style>
+        <p:txBody>
+          <a:bodyPr rtlCol="0" anchor="ctr"/>
+          <a:lstStyle/>
+          <a:p>
+            <a:pPr algn="ctr"/>
           </a:p>
         </p:txBody>
       </p:sp>
